--- a/docs/Hydra_Nexus_Vishwakarma_Stage2_Submission.pptx
+++ b/docs/Hydra_Nexus_Vishwakarma_Stage2_Submission.pptx
@@ -5740,7 +5740,7 @@
                 </a:solidFill>
                 <a:latin typeface="Arial"/>
               </a:rPr>
-              <a:t>STAGE 2 SUBMISSION  ·  ENGINEERING DOCUMENTATION</a:t>
+              <a:t>STAGE 2 SUBMISSION</a:t>
             </a:r>
           </a:p>
         </p:txBody>
@@ -5875,7 +5875,7 @@
                 </a:solidFill>
                 <a:latin typeface="Arial"/>
               </a:rPr>
-              <a:t>POCKET-SIZE PORTABLE CAPSULE  ·  SENSE → FILTER → RE-SENSE</a:t>
+              <a:t>A POCKET-SIZE WATER CAPSULE THAT CHECKS ITS OWN WORK</a:t>
             </a:r>
           </a:p>
         </p:txBody>
@@ -5997,7 +5997,7 @@
                 </a:solidFill>
                 <a:latin typeface="Arial"/>
               </a:rPr>
-              <a:t>Not supplied in the source files — official ID required</a:t>
+              <a:t>To be added before submission</a:t>
             </a:r>
           </a:p>
         </p:txBody>
@@ -6073,7 +6073,7 @@
                 </a:solidFill>
                 <a:latin typeface="Arial"/>
               </a:rPr>
-              <a:t>Not supplied in the source files — confirmation required</a:t>
+              <a:t>To be added before submission</a:t>
             </a:r>
           </a:p>
         </p:txBody>
@@ -6149,7 +6149,7 @@
                 </a:solidFill>
                 <a:latin typeface="Arial"/>
               </a:rPr>
-              <a:t>Not stated in the Stage 1 proposal — confirmation required</a:t>
+              <a:t>To be confirmed by the team</a:t>
             </a:r>
           </a:p>
         </p:txBody>
@@ -6225,7 +6225,7 @@
                 </a:solidFill>
                 <a:latin typeface="Arial"/>
               </a:rPr>
-              <a:t>Not supplied — add only confirmed details</a:t>
+              <a:t>To be added by the team</a:t>
             </a:r>
           </a:p>
         </p:txBody>
@@ -6263,7 +6263,7 @@
                 </a:solidFill>
                 <a:latin typeface="Arial"/>
               </a:rPr>
-              <a:t>Core innovation:</a:t>
+              <a:t>The idea in one line:</a:t>
             </a:r>
             <a:r>
               <a:rPr sz="950" b="0" i="0">
@@ -6272,14 +6272,14 @@
                 </a:solidFill>
                 <a:latin typeface="Arial"/>
               </a:rPr>
-              <a:t> a pocket-size capsule that measures water before treatment, adapts its filtration with an ESP32-C3 controller, and measures the same water again before dispensing it.</a:t>
+              <a:t> a capsule you carry in your pocket that tests water, filters it, and then tests it again before it lets you drink it.</a:t>
             </a:r>
           </a:p>
         </p:txBody>
       </p:sp>
       <p:pic>
         <p:nvPicPr>
-          <p:cNvPr id="63" name="Conceptual visualization" descr="Conceptual CAD-style visualization of the proposed Hydra Nexus pocket capsule"/>
+          <p:cNvPr id="63" name="Concept render" descr="Concept render of the Hydra Nexus pocket capsule"/>
           <p:cNvPicPr>
             <a:picLocks noChangeAspect="1"/>
           </p:cNvPicPr>
@@ -6334,7 +6334,7 @@
                 </a:solidFill>
                 <a:latin typeface="Arial"/>
               </a:rPr>
-              <a:t>Conceptual CAD-style visualization of the proposed capsule — not a fabricated prototype</a:t>
+              <a:t>Concept render of the capsule. This is a design illustration, not a built prototype.</a:t>
             </a:r>
           </a:p>
         </p:txBody>
@@ -6402,7 +6402,7 @@
           <a:lstStyle/>
           <a:p>
             <a:r>
-              <a:t>Problem Context: Project Overview &amp; Need</a:t>
+              <a:t>Problem Context: What We Set Out to Fix</a:t>
             </a:r>
           </a:p>
         </p:txBody>
@@ -6609,7 +6609,7 @@
                 </a:solidFill>
                 <a:latin typeface="Arial"/>
               </a:rPr>
-              <a:t>pH ACCEPTABLE RANGE*</a:t>
+              <a:t>SAFE pH RANGE*</a:t>
             </a:r>
           </a:p>
         </p:txBody>
@@ -6709,7 +6709,7 @@
                 </a:solidFill>
                 <a:latin typeface="Arial"/>
               </a:rPr>
-              <a:t>TDS ACCEPTABLE LIMIT*</a:t>
+              <a:t>TDS LIMIT*</a:t>
             </a:r>
           </a:p>
         </p:txBody>
@@ -6809,7 +6809,7 @@
                 </a:solidFill>
                 <a:latin typeface="Arial"/>
               </a:rPr>
-              <a:t>TURBIDITY ACCEPTABLE LIMIT*</a:t>
+              <a:t>TURBIDITY LIMIT*</a:t>
             </a:r>
           </a:p>
         </p:txBody>
@@ -6871,7 +6871,7 @@
                 </a:solidFill>
                 <a:latin typeface="Arial Black"/>
               </a:rPr>
-              <a:t>Before + After</a:t>
+              <a:t>Twice</a:t>
             </a:r>
           </a:p>
         </p:txBody>
@@ -6909,7 +6909,7 @@
                 </a:solidFill>
                 <a:latin typeface="Arial"/>
               </a:rPr>
-              <a:t>SAME WATER MEASURED TWICE</a:t>
+              <a:t>WE TEST THE SAME WATER</a:t>
             </a:r>
           </a:p>
         </p:txBody>
@@ -6947,7 +6947,7 @@
                 </a:solidFill>
                 <a:latin typeface="Arial"/>
               </a:rPr>
-              <a:t>*IS 10500:2012 (BIS) acceptable limits — reference values used to interpret readings; they are not Hydra Nexus results.</a:t>
+              <a:t>*Acceptable limits from the Indian drinking-water standard, IS 10500:2012. We use them as reference points, not as our own results.</a:t>
             </a:r>
           </a:p>
         </p:txBody>
@@ -7055,7 +7055,7 @@
                 </a:solidFill>
                 <a:latin typeface="Arial"/>
               </a:rPr>
-              <a:t>Project Overview &amp; Problem Statement</a:t>
+              <a:t>The project and the problem</a:t>
             </a:r>
           </a:p>
         </p:txBody>
@@ -7102,7 +7102,7 @@
                 </a:solidFill>
                 <a:latin typeface="Arial"/>
               </a:rPr>
-              <a:t> HYDRA NEXUS — An Intelligent Water Quality Identification, Adaptive Purification and Verification System</a:t>
+              <a:t> Hydra Nexus, an intelligent water quality identification, adaptive purification and verification system.</a:t>
             </a:r>
           </a:p>
           <a:p>
@@ -7137,7 +7137,7 @@
                 </a:solidFill>
                 <a:latin typeface="Arial"/>
               </a:rPr>
-              <a:t>Not supplied in the source files — confirmation required</a:t>
+              <a:t>to be added before submission</a:t>
             </a:r>
           </a:p>
           <a:p>
@@ -7172,7 +7172,7 @@
                 </a:solidFill>
                 <a:latin typeface="Arial"/>
               </a:rPr>
-              <a:t>Not stated in the Stage 1 proposal — confirmation required</a:t>
+              <a:t>to be confirmed by the team</a:t>
             </a:r>
           </a:p>
           <a:p>
@@ -7189,7 +7189,7 @@
                 </a:solidFill>
                 <a:latin typeface="Arial"/>
               </a:rPr>
-              <a:t>Core innovation:</a:t>
+              <a:t>Our idea:</a:t>
             </a:r>
             <a:r>
               <a:rPr sz="1000" b="0" i="0">
@@ -7198,7 +7198,7 @@
                 </a:solidFill>
                 <a:latin typeface="Arial"/>
               </a:rPr>
-              <a:t> a pocket-size capsule running a closed IDENTIFY → DECIDE → PURIFY → VERIFY → COMPARE loop around an ESP32-C3 controller.</a:t>
+              <a:t> a small capsule that runs one loop every time: identify, decide, purify, verify, compare.</a:t>
             </a:r>
           </a:p>
           <a:p>
@@ -7215,7 +7215,7 @@
                 </a:solidFill>
                 <a:latin typeface="Arial"/>
               </a:rPr>
-              <a:t>Problem statement</a:t>
+              <a:t>The problem</a:t>
             </a:r>
           </a:p>
           <a:p>
@@ -7237,7 +7237,7 @@
                 </a:solidFill>
                 <a:latin typeface="Arial"/>
               </a:rPr>
-              <a:t>Water quality changes between sources and over time; laboratory testing can be expensive, slow or difficult to access.</a:t>
+              <a:t>Water changes from one source to the next, and from season to season. Lab tests are slow, costly or simply not nearby.</a:t>
             </a:r>
           </a:p>
           <a:p>
@@ -7259,7 +7259,7 @@
                 </a:solidFill>
                 <a:latin typeface="Arial"/>
               </a:rPr>
-              <a:t>Conventional purifiers generally follow a fixed process without first measuring the incoming water.</a:t>
+              <a:t>Most purifiers run the same process on every glass of water, without checking what came in.</a:t>
             </a:r>
           </a:p>
           <a:p>
@@ -7281,7 +7281,7 @@
                 </a:solidFill>
                 <a:latin typeface="Arial"/>
               </a:rPr>
-              <a:t>Users often have no simple way to verify whether treatment improved the measurable water quality.</a:t>
+              <a:t>People rarely have an easy way to see whether the treatment actually made a difference.</a:t>
             </a:r>
           </a:p>
         </p:txBody>
@@ -7389,7 +7389,7 @@
                 </a:solidFill>
                 <a:latin typeface="Arial"/>
               </a:rPr>
-              <a:t>Target Beneficiary &amp; Before-State User Flow</a:t>
+              <a:t>Who it is for, and how things work today</a:t>
             </a:r>
           </a:p>
         </p:txBody>
@@ -7432,7 +7432,7 @@
                 </a:solidFill>
                 <a:latin typeface="Arial"/>
               </a:rPr>
-              <a:t>Target users:</a:t>
+              <a:t>Who:</a:t>
             </a:r>
             <a:r>
               <a:rPr sz="1000" b="0" i="0">
@@ -7441,7 +7441,7 @@
                 </a:solidFill>
                 <a:latin typeface="Arial"/>
               </a:rPr>
-              <a:t> households using variable-quality water sources, rural communities, schools, small institutions and small community water-treatment facilities.</a:t>
+              <a:t> families on changing water sources, rural communities, schools, small institutions and small community water plants.</a:t>
             </a:r>
           </a:p>
           <a:p>
@@ -7463,7 +7463,7 @@
                 </a:solidFill>
                 <a:latin typeface="Arial"/>
               </a:rPr>
-              <a:t>Use model:</a:t>
+              <a:t>How they would use it:</a:t>
             </a:r>
             <a:r>
               <a:rPr sz="1000" b="0" i="0">
@@ -7472,7 +7472,7 @@
                 </a:solidFill>
                 <a:latin typeface="Arial"/>
               </a:rPr>
-              <a:t> a handheld capsule carried to the point of collection or use, so the check and the treatment travel with the user.</a:t>
+              <a:t> carry the capsule to the tap, well or tank, and check and treat the water right there.</a:t>
             </a:r>
           </a:p>
           <a:p>
@@ -7494,7 +7494,7 @@
                 </a:solidFill>
                 <a:latin typeface="Arial"/>
               </a:rPr>
-              <a:t>Before-state flow:</a:t>
+              <a:t>Today:</a:t>
             </a:r>
             <a:r>
               <a:rPr sz="1000" b="0" i="0">
@@ -7503,7 +7503,7 @@
                 </a:solidFill>
                 <a:latin typeface="Arial"/>
               </a:rPr>
-              <a:t> unknown or changing water quality → limited or delayed testing → fixed purification → limited post-treatment verification → uncertainty about measured improvement.</a:t>
+              <a:t> nobody knows exactly what is in the water, testing is slow, the filter does the same thing every time, and nobody checks the result.</a:t>
             </a:r>
           </a:p>
           <a:p>
@@ -7525,7 +7525,7 @@
                 </a:solidFill>
                 <a:latin typeface="Arial"/>
               </a:rPr>
-              <a:t>Existing approaches:</a:t>
+              <a:t>What exists:</a:t>
             </a:r>
             <a:r>
               <a:rPr sz="1000" b="0" i="0">
@@ -7534,7 +7534,7 @@
                 </a:solidFill>
                 <a:latin typeface="Arial"/>
               </a:rPr>
-              <a:t> laboratory tests inform but do not treat; meters measure but do not treat; conventional and portable filters treat but generally do not compare input and output water.</a:t>
+              <a:t> labs test but do not treat. Meters measure but do not treat. Filters treat, but rarely tell you what changed.</a:t>
             </a:r>
           </a:p>
         </p:txBody>
@@ -7596,7 +7596,7 @@
                 </a:solidFill>
                 <a:latin typeface="Arial"/>
               </a:rPr>
-              <a:t>Submission note:</a:t>
+              <a:t>Before we submit:</a:t>
             </a:r>
             <a:r>
               <a:rPr sz="850" b="0" i="0">
@@ -7605,7 +7605,7 @@
                 </a:solidFill>
                 <a:latin typeface="Arial"/>
               </a:rPr>
-              <a:t> Vishwakarma Application ID, Team ID and Track are not contained in the source files and must be inserted by the team before submission.</a:t>
+              <a:t> our Application ID, Team ID and Track still need to be filled in on slides 1 and 2.</a:t>
             </a:r>
           </a:p>
         </p:txBody>
@@ -7673,7 +7673,7 @@
           <a:lstStyle/>
           <a:p>
             <a:r>
-              <a:t>Problem Context: Operational Gap &amp; Baseline Plan</a:t>
+              <a:t>Problem Context: The Gap, and How We Will Measure It</a:t>
             </a:r>
           </a:p>
         </p:txBody>
@@ -7888,7 +7888,7 @@
                 </a:solidFill>
                 <a:latin typeface="Arial"/>
               </a:rPr>
-              <a:t>Operational Gap: Why Measure Twice</a:t>
+              <a:t>Why test the water twice?</a:t>
             </a:r>
           </a:p>
         </p:txBody>
@@ -7926,7 +7926,7 @@
                 </a:solidFill>
                 <a:latin typeface="Arial"/>
               </a:rPr>
-              <a:t>FIXED-PROCESS FILTER</a:t>
+              <a:t>A NORMAL FILTER</a:t>
             </a:r>
           </a:p>
         </p:txBody>
@@ -8084,7 +8084,7 @@
                 </a:solidFill>
                 <a:latin typeface="Arial"/>
               </a:rPr>
-              <a:t>Fixed filtration</a:t>
+              <a:t>Same filtering every time</a:t>
             </a:r>
           </a:p>
         </p:txBody>
@@ -8181,7 +8181,7 @@
                 </a:solidFill>
                 <a:latin typeface="Arial"/>
               </a:rPr>
-              <a:t>Output: change not measured</a:t>
+              <a:t>You hope it worked</a:t>
             </a:r>
           </a:p>
         </p:txBody>
@@ -8219,7 +8219,7 @@
                 </a:solidFill>
                 <a:latin typeface="Arial"/>
               </a:rPr>
-              <a:t>HYDRA NEXUS CAPSULE</a:t>
+              <a:t>HYDRA NEXUS</a:t>
             </a:r>
           </a:p>
         </p:txBody>
@@ -8280,7 +8280,7 @@
                 </a:solidFill>
                 <a:latin typeface="Arial"/>
               </a:rPr>
-              <a:t>Measure (M1)</a:t>
+              <a:t>Test it first</a:t>
             </a:r>
           </a:p>
         </p:txBody>
@@ -8377,7 +8377,7 @@
                 </a:solidFill>
                 <a:latin typeface="Arial"/>
               </a:rPr>
-              <a:t>Adapted filtration</a:t>
+              <a:t>Filter it to suit</a:t>
             </a:r>
           </a:p>
         </p:txBody>
@@ -8474,7 +8474,7 @@
                 </a:solidFill>
                 <a:latin typeface="Arial"/>
               </a:rPr>
-              <a:t>Measure (M2)</a:t>
+              <a:t>Test it again</a:t>
             </a:r>
           </a:p>
         </p:txBody>
@@ -8571,7 +8571,7 @@
                 </a:solidFill>
                 <a:latin typeface="Arial"/>
               </a:rPr>
-              <a:t>Dispense or warn</a:t>
+              <a:t>Pour or warn</a:t>
             </a:r>
           </a:p>
         </p:txBody>
@@ -8614,7 +8614,7 @@
                 </a:solidFill>
                 <a:latin typeface="Arial"/>
               </a:rPr>
-              <a:t>A single measurement describes the water, not whether the treatment worked.</a:t>
+              <a:t>One test tells you about the water. It does not tell you whether the treatment worked.</a:t>
             </a:r>
           </a:p>
           <a:p>
@@ -8636,7 +8636,7 @@
                 </a:solidFill>
                 <a:latin typeface="Arial"/>
               </a:rPr>
-              <a:t>Measuring the same water before and after (M1, M2) links the measured change to one cycle.</a:t>
+              <a:t>Testing the same water before and after shows exactly what that one run changed.</a:t>
             </a:r>
           </a:p>
           <a:p>
@@ -8658,7 +8658,7 @@
                 </a:solidFill>
                 <a:latin typeface="Arial"/>
               </a:rPr>
-              <a:t>A missing improvement exposes an exhausted cartridge before the water is dispensed.</a:t>
+              <a:t>If nothing improves, the cartridge is probably worn out, and we catch it before anyone drinks.</a:t>
             </a:r>
           </a:p>
           <a:p>
@@ -8680,7 +8680,7 @@
                 </a:solidFill>
                 <a:latin typeface="Arial"/>
               </a:rPr>
-              <a:t>Conditions outside the installed sensors’ capability trigger a specialist-testing recommendation instead of false assurance.</a:t>
+              <a:t>If something is outside what our sensors can check, we say so and suggest a proper lab test.</a:t>
             </a:r>
           </a:p>
         </p:txBody>
@@ -8788,7 +8788,7 @@
                 </a:solidFill>
                 <a:latin typeface="Arial"/>
               </a:rPr>
-              <a:t>Quantified Inefficiency: Baseline-Measurement Framework</a:t>
+              <a:t>Putting numbers on the problem</a:t>
             </a:r>
           </a:p>
         </p:txBody>
@@ -8831,7 +8831,7 @@
                           </a:solidFill>
                           <a:latin typeface="Arial"/>
                         </a:rPr>
-                        <a:t>Baseline metric</a:t>
+                        <a:t>What we will measure</a:t>
                       </a:r>
                     </a:p>
                   </a:txBody>
@@ -8870,7 +8870,7 @@
                           </a:solidFill>
                           <a:latin typeface="Arial"/>
                         </a:rPr>
-                        <a:t>Measurement method (prototype testing)</a:t>
+                        <a:t>How we will measure it</a:t>
                       </a:r>
                     </a:p>
                   </a:txBody>
@@ -8909,7 +8909,7 @@
                           </a:solidFill>
                           <a:latin typeface="Arial"/>
                         </a:rPr>
-                        <a:t>Reported as</a:t>
+                        <a:t>We report it as</a:t>
                       </a:r>
                     </a:p>
                   </a:txBody>
@@ -8989,7 +8989,7 @@
                           </a:solidFill>
                           <a:latin typeface="Arial"/>
                         </a:rPr>
-                        <a:t>Time to first water-quality information</a:t>
+                        <a:t>How long until you know about your water</a:t>
                       </a:r>
                     </a:p>
                   </a:txBody>
@@ -9028,7 +9028,7 @@
                           </a:solidFill>
                           <a:latin typeface="Arial"/>
                         </a:rPr>
-                        <a:t>Stopwatch from sample collection to reading: lab route, handheld meter, Hydra Nexus M1</a:t>
+                        <a:t>Time a sample from collection to result: lab, handheld meter, and our capsule</a:t>
                       </a:r>
                     </a:p>
                   </a:txBody>
@@ -9106,7 +9106,7 @@
                           </a:solidFill>
                           <a:latin typeface="Arial"/>
                         </a:rPr>
-                        <a:t>To be measured</a:t>
+                        <a:t>Not yet measured</a:t>
                       </a:r>
                     </a:p>
                   </a:txBody>
@@ -9147,7 +9147,7 @@
                           </a:solidFill>
                           <a:latin typeface="Arial"/>
                         </a:rPr>
-                        <a:t>Complete treatment-cycle time</a:t>
+                        <a:t>How long one full cycle takes</a:t>
                       </a:r>
                     </a:p>
                   </a:txBody>
@@ -9186,7 +9186,7 @@
                           </a:solidFill>
                           <a:latin typeface="Arial"/>
                         </a:rPr>
-                        <a:t>Logged timestamps from intake to dispensed water, 250 mL</a:t>
+                        <a:t>Log the time from intake to clean water out, for 250 mL</a:t>
                       </a:r>
                     </a:p>
                   </a:txBody>
@@ -9264,7 +9264,7 @@
                           </a:solidFill>
                           <a:latin typeface="Arial"/>
                         </a:rPr>
-                        <a:t>To be measured</a:t>
+                        <a:t>Not yet measured</a:t>
                       </a:r>
                     </a:p>
                   </a:txBody>
@@ -9305,7 +9305,7 @@
                           </a:solidFill>
                           <a:latin typeface="Arial"/>
                         </a:rPr>
-                        <a:t>Raw vs treated variation in pH, TDS, turbidity</a:t>
+                        <a:t>How much pH, TDS and turbidity change</a:t>
                       </a:r>
                     </a:p>
                   </a:txBody>
@@ -9344,7 +9344,7 @@
                           </a:solidFill>
                           <a:latin typeface="Arial"/>
                         </a:rPr>
-                        <a:t>Paired M1/M2 readings, ≥ 3 runs per sample type (installed sensors only)</a:t>
+                        <a:t>Before and after readings, at least 3 runs per kind of water</a:t>
                       </a:r>
                     </a:p>
                   </a:txBody>
@@ -9383,7 +9383,7 @@
                           </a:solidFill>
                           <a:latin typeface="Arial"/>
                         </a:rPr>
-                        <a:t>Δ per parameter, mean ± SD</a:t>
+                        <a:t>Average change, with spread</a:t>
                       </a:r>
                     </a:p>
                   </a:txBody>
@@ -9422,7 +9422,7 @@
                           </a:solidFill>
                           <a:latin typeface="Arial"/>
                         </a:rPr>
-                        <a:t>To be measured</a:t>
+                        <a:t>Not yet measured</a:t>
                       </a:r>
                     </a:p>
                   </a:txBody>
@@ -9463,7 +9463,7 @@
                           </a:solidFill>
                           <a:latin typeface="Arial"/>
                         </a:rPr>
-                        <a:t>Time to identify ineffective treatment</a:t>
+                        <a:t>How fast a bad treatment gets noticed</a:t>
                       </a:r>
                     </a:p>
                   </a:txBody>
@@ -9502,7 +9502,7 @@
                           </a:solidFill>
                           <a:latin typeface="Arial"/>
                         </a:rPr>
-                        <a:t>Cycles until a “no improvement” stop vs. conventional workflow (no check)</a:t>
+                        <a:t>Count cycles until our capsule stops a run; a normal filter never does</a:t>
                       </a:r>
                     </a:p>
                   </a:txBody>
@@ -9541,7 +9541,7 @@
                           </a:solidFill>
                           <a:latin typeface="Arial"/>
                         </a:rPr>
-                        <a:t>Cycles / minutes</a:t>
+                        <a:t>Cycles or minutes</a:t>
                       </a:r>
                     </a:p>
                   </a:txBody>
@@ -9580,7 +9580,7 @@
                           </a:solidFill>
                           <a:latin typeface="Arial"/>
                         </a:rPr>
-                        <a:t>To be measured</a:t>
+                        <a:t>Not yet measured</a:t>
                       </a:r>
                     </a:p>
                   </a:txBody>
@@ -9621,7 +9621,7 @@
                           </a:solidFill>
                           <a:latin typeface="Arial"/>
                         </a:rPr>
-                        <a:t>Manual verification steps</a:t>
+                        <a:t>How many steps a person has to do</a:t>
                       </a:r>
                     </a:p>
                   </a:txBody>
@@ -9660,7 +9660,7 @@
                           </a:solidFill>
                           <a:latin typeface="Arial"/>
                         </a:rPr>
-                        <a:t>Task analysis of user actions: conventional vs. Hydra Nexus</a:t>
+                        <a:t>Walk through both ways of checking water and count the steps</a:t>
                       </a:r>
                     </a:p>
                   </a:txBody>
@@ -9699,7 +9699,7 @@
                           </a:solidFill>
                           <a:latin typeface="Arial"/>
                         </a:rPr>
-                        <a:t>Count of steps</a:t>
+                        <a:t>Number of steps</a:t>
                       </a:r>
                     </a:p>
                   </a:txBody>
@@ -9738,7 +9738,7 @@
                           </a:solidFill>
                           <a:latin typeface="Arial"/>
                         </a:rPr>
-                        <a:t>To be measured</a:t>
+                        <a:t>Not yet measured</a:t>
                       </a:r>
                     </a:p>
                   </a:txBody>
@@ -9779,7 +9779,7 @@
                           </a:solidFill>
                           <a:latin typeface="Arial"/>
                         </a:rPr>
-                        <a:t>Sensor consistency &amp; repeatability</a:t>
+                        <a:t>How steady the sensors are</a:t>
                       </a:r>
                     </a:p>
                   </a:txBody>
@@ -9818,7 +9818,7 @@
                           </a:solidFill>
                           <a:latin typeface="Arial"/>
                         </a:rPr>
-                        <a:t>10 repeated readings in reference solutions; drift over 4 h</a:t>
+                        <a:t>10 repeat readings in reference liquids, and drift over 4 hours</a:t>
                       </a:r>
                     </a:p>
                   </a:txBody>
@@ -9857,7 +9857,7 @@
                           </a:solidFill>
                           <a:latin typeface="Arial"/>
                         </a:rPr>
-                        <a:t>SD, drift per hour</a:t>
+                        <a:t>Spread and drift per hour</a:t>
                       </a:r>
                     </a:p>
                   </a:txBody>
@@ -9896,7 +9896,7 @@
                           </a:solidFill>
                           <a:latin typeface="Arial"/>
                         </a:rPr>
-                        <a:t>To be measured</a:t>
+                        <a:t>Not yet measured</a:t>
                       </a:r>
                     </a:p>
                   </a:txBody>
@@ -9960,7 +9960,7 @@
                 </a:solidFill>
                 <a:latin typeface="Arial"/>
               </a:rPr>
-              <a:t>No numerical baseline is claimed. Directly comparable published benchmarks for this use case were not identified, so every baseline is measured on the same water samples during Months 3–4.</a:t>
+              <a:t>We are not quoting any baseline numbers yet. We could not find published figures that compare fairly with our setup, so we will measure them ourselves in Months 3 and 4.</a:t>
             </a:r>
           </a:p>
         </p:txBody>
@@ -10022,7 +10022,7 @@
                 </a:solidFill>
                 <a:latin typeface="Arial"/>
               </a:rPr>
-              <a:t>Method:</a:t>
+              <a:t>How:</a:t>
             </a:r>
             <a:r>
               <a:rPr sz="850" b="0" i="0">
@@ -10031,7 +10031,7 @@
                 </a:solidFill>
                 <a:latin typeface="Arial"/>
               </a:rPr>
-              <a:t> baselines are recorded for the conventional workflow and for Hydra Nexus with identical samples, so any difference is measured, not assumed.</a:t>
+              <a:t> we will run the same water samples through the usual method and through our capsule, so the difference comes from measurement, not guesswork.</a:t>
             </a:r>
           </a:p>
         </p:txBody>
@@ -10326,7 +10326,7 @@
                 </a:solidFill>
                 <a:latin typeface="Arial"/>
               </a:rPr>
-              <a:t>Unknown or changing water quality</a:t>
+              <a:t>Water quality is unknown or keeps changing</a:t>
             </a:r>
           </a:p>
         </p:txBody>
@@ -10364,7 +10364,7 @@
                 </a:solidFill>
                 <a:latin typeface="Arial"/>
               </a:rPr>
-              <a:t>Source and season change the water</a:t>
+              <a:t>Rain, season and source all change it</a:t>
             </a:r>
           </a:p>
         </p:txBody>
@@ -10461,7 +10461,7 @@
                 </a:solidFill>
                 <a:latin typeface="Arial"/>
               </a:rPr>
-              <a:t>Limited understanding of measurable conditions</a:t>
+              <a:t>People can’t tell what is in it</a:t>
             </a:r>
           </a:p>
         </p:txBody>
@@ -10499,7 +10499,7 @@
                 </a:solidFill>
                 <a:latin typeface="Arial"/>
               </a:rPr>
-              <a:t>Testing delayed, costly or unavailable</a:t>
+              <a:t>Tests are slow, costly or far away</a:t>
             </a:r>
           </a:p>
         </p:txBody>
@@ -10596,7 +10596,7 @@
                 </a:solidFill>
                 <a:latin typeface="Arial"/>
               </a:rPr>
-              <a:t>Fixed purification approach</a:t>
+              <a:t>The filter does the same thing every time</a:t>
             </a:r>
           </a:p>
         </p:txBody>
@@ -10634,7 +10634,7 @@
                 </a:solidFill>
                 <a:latin typeface="Arial"/>
               </a:rPr>
-              <a:t>Same process for every sample</a:t>
+              <a:t>One process for every sample</a:t>
             </a:r>
           </a:p>
         </p:txBody>
@@ -10731,7 +10731,7 @@
                 </a:solidFill>
                 <a:latin typeface="Arial"/>
               </a:rPr>
-              <a:t>Water is treated</a:t>
+              <a:t>Water gets treated</a:t>
             </a:r>
           </a:p>
         </p:txBody>
@@ -10769,7 +10769,7 @@
                 </a:solidFill>
                 <a:latin typeface="Arial"/>
               </a:rPr>
-              <a:t>No feedback during treatment</a:t>
+              <a:t>No feedback while it runs</a:t>
             </a:r>
           </a:p>
         </p:txBody>
@@ -10866,7 +10866,7 @@
                 </a:solidFill>
                 <a:latin typeface="Arial"/>
               </a:rPr>
-              <a:t>Limited post-treatment data</a:t>
+              <a:t>No one checks the result</a:t>
             </a:r>
           </a:p>
         </p:txBody>
@@ -10904,7 +10904,7 @@
                 </a:solidFill>
                 <a:latin typeface="Arial"/>
               </a:rPr>
-              <a:t>Cartridge exhaustion may go unnoticed</a:t>
+              <a:t>A worn-out filter can go unnoticed</a:t>
             </a:r>
           </a:p>
         </p:txBody>
@@ -11001,7 +11001,7 @@
                 </a:solidFill>
                 <a:latin typeface="Arial"/>
               </a:rPr>
-              <a:t>User remains uncertain about measured improvement</a:t>
+              <a:t>People are left guessing</a:t>
             </a:r>
           </a:p>
         </p:txBody>
@@ -11039,7 +11039,7 @@
                 </a:solidFill>
                 <a:latin typeface="Arial"/>
               </a:rPr>
-              <a:t>Trust replaces evidence</a:t>
+              <a:t>Trust instead of proof</a:t>
             </a:r>
           </a:p>
         </p:txBody>
@@ -11159,7 +11159,7 @@
                 </a:solidFill>
                 <a:latin typeface="Arial"/>
               </a:rPr>
-              <a:t>Raw water enters</a:t>
+              <a:t>Water goes in</a:t>
             </a:r>
           </a:p>
           <a:p>
@@ -11175,7 +11175,7 @@
                 </a:solidFill>
                 <a:latin typeface="Arial"/>
               </a:rPr>
-              <a:t>Intake hose draws a sample; valve V1 sends it to the sensing cell</a:t>
+              <a:t>The intake hose pulls in a small sample and sends it to the test cell</a:t>
             </a:r>
           </a:p>
         </p:txBody>
@@ -11288,7 +11288,7 @@
                 </a:solidFill>
                 <a:latin typeface="Arial"/>
               </a:rPr>
-              <a:t>M1: pH, TDS, turbidity and temperature of the raw sample</a:t>
+              <a:t>We measure pH, TDS, cloudiness and temperature of the raw water</a:t>
             </a:r>
           </a:p>
         </p:txBody>
@@ -11401,7 +11401,7 @@
                 </a:solidFill>
                 <a:latin typeface="Arial"/>
               </a:rPr>
-              <a:t>ESP32-C3 validates M1 and sets flow, UV-C dose and cartridge advice</a:t>
+              <a:t>The controller checks the readings and picks the flow speed and UV dose</a:t>
             </a:r>
           </a:p>
         </p:txBody>
@@ -11514,7 +11514,7 @@
                 </a:solidFill>
                 <a:latin typeface="Arial"/>
               </a:rPr>
-              <a:t>Pump drives water through carbon + UF membrane (+ UV-C)</a:t>
+              <a:t>The pump pushes water through carbon, a fine membrane and UV light</a:t>
             </a:r>
           </a:p>
         </p:txBody>
@@ -11627,7 +11627,7 @@
                 </a:solidFill>
                 <a:latin typeface="Arial"/>
               </a:rPr>
-              <a:t>V2 routes treated water back through the same cell (M2)</a:t>
+              <a:t>Treated water goes back through the same test cell</a:t>
             </a:r>
           </a:p>
         </p:txBody>
@@ -11740,7 +11740,7 @@
                 </a:solidFill>
                 <a:latin typeface="Arial"/>
               </a:rPr>
-              <a:t>Δ = M2 − M1; dispense only if the change meets targets</a:t>
+              <a:t>The capsule pours the water only if it really improved</a:t>
             </a:r>
           </a:p>
         </p:txBody>
@@ -11837,7 +11837,7 @@
                 </a:solidFill>
                 <a:latin typeface="Arial"/>
               </a:rPr>
-              <a:t>OLED + phone app show:</a:t>
+              <a:t>On the screen and in the app:</a:t>
             </a:r>
             <a:r>
               <a:rPr sz="900" b="0" i="0">
@@ -11846,7 +11846,7 @@
                 </a:solidFill>
                 <a:latin typeface="Arial"/>
               </a:rPr>
-              <a:t> initial readings · adaptation applied · final readings · measured change</a:t>
+              <a:t> what the water was like, what we did, and what it is like now</a:t>
             </a:r>
           </a:p>
         </p:txBody>
@@ -11979,7 +11979,7 @@
                 </a:solidFill>
                 <a:latin typeface="Arial"/>
               </a:rPr>
-              <a:t>Improvement confirmed</a:t>
+              <a:t>It got better</a:t>
             </a:r>
           </a:p>
           <a:p>
@@ -11995,7 +11995,7 @@
                 </a:solidFill>
                 <a:latin typeface="Arial"/>
               </a:rPr>
-              <a:t>water dispensed; claim limited to measured parameters</a:t>
+              <a:t>the water is poured, and we only claim what we measured</a:t>
             </a:r>
           </a:p>
         </p:txBody>
@@ -12056,7 +12056,7 @@
                 </a:solidFill>
                 <a:latin typeface="Arial"/>
               </a:rPr>
-              <a:t>Stop and advise</a:t>
+              <a:t>It didn’t</a:t>
             </a:r>
           </a:p>
           <a:p>
@@ -12072,7 +12072,7 @@
                 </a:solidFill>
                 <a:latin typeface="Arial"/>
               </a:rPr>
-              <a:t>second pass, replace cartridge, or specialist / laboratory testing</a:t>
+              <a:t>we stop and suggest a second run, a new cartridge, or a lab test</a:t>
             </a:r>
           </a:p>
         </p:txBody>
@@ -12180,7 +12180,7 @@
                 </a:solidFill>
                 <a:latin typeface="Arial"/>
               </a:rPr>
-              <a:t>What changes for the user</a:t>
+              <a:t>What changes for the person using it</a:t>
             </a:r>
           </a:p>
         </p:txBody>
@@ -12223,7 +12223,7 @@
                 </a:solidFill>
                 <a:latin typeface="Arial"/>
               </a:rPr>
-              <a:t>Carries the whole check-and-treat loop in a pocket-size capsule to the water source.</a:t>
+              <a:t>They can test and clean water wherever they are, with something that fits in a pocket.</a:t>
             </a:r>
           </a:p>
           <a:p>
@@ -12245,7 +12245,7 @@
                 </a:solidFill>
                 <a:latin typeface="Arial"/>
               </a:rPr>
-              <a:t>Sees what was measured, what the capsule changed and how the measured parameters moved.</a:t>
+              <a:t>They see what was in the water, what the capsule did about it, and how much it changed.</a:t>
             </a:r>
           </a:p>
           <a:p>
@@ -12267,7 +12267,7 @@
                 </a:solidFill>
                 <a:latin typeface="Arial"/>
               </a:rPr>
-              <a:t>Is warned — before drinking — when improvement is not achieved or a hazard cannot be measured.</a:t>
+              <a:t>They get a warning before drinking if the water did not improve, or if we cannot test for something.</a:t>
             </a:r>
           </a:p>
         </p:txBody>
@@ -12329,7 +12329,7 @@
                 </a:solidFill>
                 <a:latin typeface="Arial"/>
               </a:rPr>
-              <a:t>Stage 1 basis:</a:t>
+              <a:t>From our Stage 1 idea:</a:t>
             </a:r>
             <a:r>
               <a:rPr sz="850" b="0" i="0">
@@ -12338,7 +12338,7 @@
                 </a:solidFill>
                 <a:latin typeface="Arial"/>
               </a:rPr>
-              <a:t> the user experience moves from simply trusting a purifier to seeing measured evidence of what treatment did (Stage 1 proposal, §8).</a:t>
+              <a:t> people should not have to simply trust a purifier. They should be able to see what it actually did to their water.</a:t>
             </a:r>
           </a:p>
         </p:txBody>
@@ -12406,7 +12406,7 @@
           <a:lstStyle/>
           <a:p>
             <a:r>
-              <a:t>User Journey: Evaluation Criteria &amp; Test Records</a:t>
+              <a:t>User Journey: How We Will Judge It</a:t>
             </a:r>
           </a:p>
         </p:txBody>
@@ -12556,7 +12556,7 @@
                           </a:solidFill>
                           <a:latin typeface="Arial"/>
                         </a:rPr>
-                        <a:t>Evaluation metric</a:t>
+                        <a:t>What we check</a:t>
                       </a:r>
                     </a:p>
                   </a:txBody>
@@ -12595,7 +12595,7 @@
                           </a:solidFill>
                           <a:latin typeface="Arial"/>
                         </a:rPr>
-                        <a:t>Test method</a:t>
+                        <a:t>How we test it</a:t>
                       </a:r>
                     </a:p>
                   </a:txBody>
@@ -12634,7 +12634,7 @@
                           </a:solidFill>
                           <a:latin typeface="Arial"/>
                         </a:rPr>
-                        <a:t>Proposed acceptance target</a:t>
+                        <a:t>Our target</a:t>
                       </a:r>
                     </a:p>
                   </a:txBody>
@@ -12714,7 +12714,7 @@
                           </a:solidFill>
                           <a:latin typeface="Arial"/>
                         </a:rPr>
-                        <a:t>Pre- and post-treatment readings</a:t>
+                        <a:t>Every run has before and after readings</a:t>
                       </a:r>
                     </a:p>
                   </a:txBody>
@@ -12753,7 +12753,7 @@
                           </a:solidFill>
                           <a:latin typeface="Arial"/>
                         </a:rPr>
-                        <a:t>Audit of the per-cycle log</a:t>
+                        <a:t>Go through the log for each run</a:t>
                       </a:r>
                     </a:p>
                   </a:txBody>
@@ -12792,7 +12792,7 @@
                           </a:solidFill>
                           <a:latin typeface="Arial"/>
                         </a:rPr>
-                        <a:t>M1 and M2 recorded for 100% of cycles</a:t>
+                        <a:t>Both readings saved for every single run</a:t>
                       </a:r>
                     </a:p>
                   </a:txBody>
@@ -12831,7 +12831,7 @@
                           </a:solidFill>
                           <a:latin typeface="Arial"/>
                         </a:rPr>
-                        <a:t>Pending</a:t>
+                        <a:t>To be tested</a:t>
                       </a:r>
                     </a:p>
                   </a:txBody>
@@ -12872,7 +12872,7 @@
                           </a:solidFill>
                           <a:latin typeface="Arial"/>
                         </a:rPr>
-                        <a:t>Sensor repeatability</a:t>
+                        <a:t>Sensors give the same answer twice</a:t>
                       </a:r>
                     </a:p>
                   </a:txBody>
@@ -12911,7 +12911,7 @@
                           </a:solidFill>
                           <a:latin typeface="Arial"/>
                         </a:rPr>
-                        <a:t>10 readings in pH 4.00 / 7.00 buffers and a TDS reference solution</a:t>
+                        <a:t>10 readings in pH 4 and pH 7 buffer and a TDS reference liquid</a:t>
                       </a:r>
                     </a:p>
                   </a:txBody>
@@ -12950,7 +12950,7 @@
                           </a:solidFill>
                           <a:latin typeface="Arial"/>
                         </a:rPr>
-                        <a:t>pH within ±0.1; TDS within ±10% F.S. (bench-reference accuracy, 25 °C)</a:t>
+                        <a:t>Within 0.1 pH and 10% for TDS (the makers’ stated accuracy)</a:t>
                       </a:r>
                     </a:p>
                   </a:txBody>
@@ -12989,7 +12989,7 @@
                           </a:solidFill>
                           <a:latin typeface="Arial"/>
                         </a:rPr>
-                        <a:t>Pending</a:t>
+                        <a:t>To be tested</a:t>
                       </a:r>
                     </a:p>
                   </a:txBody>
@@ -13030,7 +13030,7 @@
                           </a:solidFill>
                           <a:latin typeface="Arial"/>
                         </a:rPr>
-                        <a:t>Sensor response time</a:t>
+                        <a:t>Sensors settle quickly</a:t>
                       </a:r>
                     </a:p>
                   </a:txBody>
@@ -13069,7 +13069,7 @@
                           </a:solidFill>
                           <a:latin typeface="Arial"/>
                         </a:rPr>
-                        <a:t>Step change between reference solutions</a:t>
+                        <a:t>Move the probes between reference liquids and time it</a:t>
                       </a:r>
                     </a:p>
                   </a:txBody>
@@ -13108,7 +13108,7 @@
                           </a:solidFill>
                           <a:latin typeface="Arial"/>
                         </a:rPr>
-                        <a:t>Stable reading ≤ 60 s (proposed; mini pH electrode to be verified)</a:t>
+                        <a:t>A steady reading within about a minute (mini pH probe still to be checked)</a:t>
                       </a:r>
                     </a:p>
                   </a:txBody>
@@ -13147,7 +13147,7 @@
                           </a:solidFill>
                           <a:latin typeface="Arial"/>
                         </a:rPr>
-                        <a:t>Pending</a:t>
+                        <a:t>To be tested</a:t>
                       </a:r>
                     </a:p>
                   </a:txBody>
@@ -13188,7 +13188,7 @@
                           </a:solidFill>
                           <a:latin typeface="Arial"/>
                         </a:rPr>
-                        <a:t>Carry-over in the shared cell</a:t>
+                        <a:t>Old water doesn’t spoil the second test</a:t>
                       </a:r>
                     </a:p>
                   </a:txBody>
@@ -13227,7 +13227,7 @@
                           </a:solidFill>
                           <a:latin typeface="Arial"/>
                         </a:rPr>
-                        <a:t>High-EC sample, then 15 mL treated flush; compare with clean reference</a:t>
+                        <a:t>Run very salty water, flush with 15 mL of clean water, then compare</a:t>
                       </a:r>
                     </a:p>
                   </a:txBody>
@@ -13266,7 +13266,7 @@
                           </a:solidFill>
                           <a:latin typeface="Arial"/>
                         </a:rPr>
-                        <a:t>Residual ≤ 2% of raw-sample EC (proposed)</a:t>
+                        <a:t>Less than 2% of the old reading left over</a:t>
                       </a:r>
                     </a:p>
                   </a:txBody>
@@ -13305,7 +13305,7 @@
                           </a:solidFill>
                           <a:latin typeface="Arial"/>
                         </a:rPr>
-                        <a:t>Pending</a:t>
+                        <a:t>To be tested</a:t>
                       </a:r>
                     </a:p>
                   </a:txBody>
@@ -13346,7 +13346,7 @@
                           </a:solidFill>
                           <a:latin typeface="Arial"/>
                         </a:rPr>
-                        <a:t>Treatment cycle time</a:t>
+                        <a:t>One cycle doesn’t take too long</a:t>
                       </a:r>
                     </a:p>
                   </a:txBody>
@@ -13385,7 +13385,7 @@
                           </a:solidFill>
                           <a:latin typeface="Arial"/>
                         </a:rPr>
-                        <a:t>Timestamps, intake → dispensed, 250 mL</a:t>
+                        <a:t>Time a 250 mL run from start to finish</a:t>
                       </a:r>
                     </a:p>
                   </a:txBody>
@@ -13424,7 +13424,7 @@
                           </a:solidFill>
                           <a:latin typeface="Arial"/>
                         </a:rPr>
-                        <a:t>≤ 3 min per 250 mL (proposed)</a:t>
+                        <a:t>Three minutes or less</a:t>
                       </a:r>
                     </a:p>
                   </a:txBody>
@@ -13463,7 +13463,7 @@
                           </a:solidFill>
                           <a:latin typeface="Arial"/>
                         </a:rPr>
-                        <a:t>Pending</a:t>
+                        <a:t>To be tested</a:t>
                       </a:r>
                     </a:p>
                   </a:txBody>
@@ -13504,7 +13504,7 @@
                           </a:solidFill>
                           <a:latin typeface="Arial"/>
                         </a:rPr>
-                        <a:t>Change in measured parameters</a:t>
+                        <a:t>How much the water improves</a:t>
                       </a:r>
                     </a:p>
                   </a:txBody>
@@ -13543,7 +13543,7 @@
                           </a:solidFill>
                           <a:latin typeface="Arial"/>
                         </a:rPr>
-                        <a:t>Paired M1/M2 readings, ≥ 3 runs per sample type</a:t>
+                        <a:t>Before and after readings, 3 or more runs per water type</a:t>
                       </a:r>
                     </a:p>
                   </a:txBody>
@@ -13582,7 +13582,7 @@
                           </a:solidFill>
                           <a:latin typeface="Arial"/>
                         </a:rPr>
-                        <a:t>Reported per sample; no gain assumed in advance</a:t>
+                        <a:t>We report what we see; we assume nothing</a:t>
                       </a:r>
                     </a:p>
                   </a:txBody>
@@ -13621,7 +13621,7 @@
                           </a:solidFill>
                           <a:latin typeface="Arial"/>
                         </a:rPr>
-                        <a:t>Pending</a:t>
+                        <a:t>To be tested</a:t>
                       </a:r>
                     </a:p>
                   </a:txBody>
@@ -13662,7 +13662,7 @@
                           </a:solidFill>
                           <a:latin typeface="Arial"/>
                         </a:rPr>
-                        <a:t>Battery endurance</a:t>
+                        <a:t>How long the battery lasts</a:t>
                       </a:r>
                     </a:p>
                   </a:txBody>
@@ -13701,7 +13701,7 @@
                           </a:solidFill>
                           <a:latin typeface="Arial"/>
                         </a:rPr>
-                        <a:t>Repeated cycles from full charge</a:t>
+                        <a:t>Run cycles back to back from a full charge</a:t>
                       </a:r>
                     </a:p>
                   </a:txBody>
@@ -13740,7 +13740,7 @@
                           </a:solidFill>
                           <a:latin typeface="Arial"/>
                         </a:rPr>
-                        <a:t>≥ 30 cycles per charge (proposed; estimate ≈ 50)</a:t>
+                        <a:t>At least 30 runs (our estimate is about 50)</a:t>
                       </a:r>
                     </a:p>
                   </a:txBody>
@@ -13779,7 +13779,7 @@
                           </a:solidFill>
                           <a:latin typeface="Arial"/>
                         </a:rPr>
-                        <a:t>Pending</a:t>
+                        <a:t>To be tested</a:t>
                       </a:r>
                     </a:p>
                   </a:txBody>
@@ -13820,7 +13820,7 @@
                           </a:solidFill>
                           <a:latin typeface="Arial"/>
                         </a:rPr>
-                        <a:t>Abnormal readings &amp; faults</a:t>
+                        <a:t>Faults are caught</a:t>
                       </a:r>
                     </a:p>
                   </a:txBody>
@@ -13859,7 +13859,7 @@
                           </a:solidFill>
                           <a:latin typeface="Arial"/>
                         </a:rPr>
-                        <a:t>Inject dry intake, clogged cartridge, unplugged sensor, moisture in spine</a:t>
+                        <a:t>Run it dry, block the cartridge, unplug a sensor, wet the electronics area</a:t>
                       </a:r>
                     </a:p>
                   </a:txBody>
@@ -13898,7 +13898,7 @@
                           </a:solidFill>
                           <a:latin typeface="Arial"/>
                         </a:rPr>
-                        <a:t>Detected; outputs off ≤ 2 s (proposed)</a:t>
+                        <a:t>Everything switches off within 2 seconds</a:t>
                       </a:r>
                     </a:p>
                   </a:txBody>
@@ -13937,7 +13937,7 @@
                           </a:solidFill>
                           <a:latin typeface="Arial"/>
                         </a:rPr>
-                        <a:t>Pending</a:t>
+                        <a:t>To be tested</a:t>
                       </a:r>
                     </a:p>
                   </a:txBody>
@@ -14071,7 +14071,7 @@
                 </a:solidFill>
                 <a:latin typeface="Arial"/>
               </a:rPr>
-              <a:t>Per-cycle test record</a:t>
+              <a:t>What we write down for every run</a:t>
             </a:r>
           </a:p>
         </p:txBody>
@@ -14114,7 +14114,7 @@
                 </a:solidFill>
                 <a:latin typeface="Arial"/>
               </a:rPr>
-              <a:t>Sample ID</a:t>
+              <a:t>Sample name</a:t>
             </a:r>
             <a:r>
               <a:rPr sz="900" b="0" i="0">
@@ -14123,7 +14123,7 @@
                 </a:solidFill>
                 <a:latin typeface="Arial"/>
               </a:rPr>
-              <a:t> and source description</a:t>
+              <a:t> and where it came from</a:t>
             </a:r>
           </a:p>
           <a:p>
@@ -14145,7 +14145,7 @@
                 </a:solidFill>
                 <a:latin typeface="Arial"/>
               </a:rPr>
-              <a:t>Initial (M1)</a:t>
+              <a:t>First readings:</a:t>
             </a:r>
             <a:r>
               <a:rPr sz="900" b="0" i="0">
@@ -14154,7 +14154,7 @@
                 </a:solidFill>
                 <a:latin typeface="Arial"/>
               </a:rPr>
-              <a:t> pH, TDS / EC, turbidity, temperature</a:t>
+              <a:t> pH, TDS, cloudiness, temperature</a:t>
             </a:r>
           </a:p>
           <a:p>
@@ -14176,7 +14176,7 @@
                 </a:solidFill>
                 <a:latin typeface="Arial"/>
               </a:rPr>
-              <a:t>Adaptation applied</a:t>
+              <a:t>What the capsule chose</a:t>
             </a:r>
             <a:r>
               <a:rPr sz="900" b="0" i="0">
@@ -14185,7 +14185,7 @@
                 </a:solidFill>
                 <a:latin typeface="Arial"/>
               </a:rPr>
-              <a:t> (flow, UV-C dose) and reason code</a:t>
+              <a:t> to do, and why</a:t>
             </a:r>
           </a:p>
           <a:p>
@@ -14207,7 +14207,7 @@
                 </a:solidFill>
                 <a:latin typeface="Arial"/>
               </a:rPr>
-              <a:t>Treatment duration</a:t>
+              <a:t>How long it ran</a:t>
             </a:r>
             <a:r>
               <a:rPr sz="900" b="0" i="0">
@@ -14216,7 +14216,7 @@
                 </a:solidFill>
                 <a:latin typeface="Arial"/>
               </a:rPr>
-              <a:t>, volume and battery used</a:t>
+              <a:t>, how much water, how much battery</a:t>
             </a:r>
           </a:p>
           <a:p>
@@ -14238,7 +14238,7 @@
                 </a:solidFill>
                 <a:latin typeface="Arial"/>
               </a:rPr>
-              <a:t>Final (M2)</a:t>
+              <a:t>Final readings</a:t>
             </a:r>
             <a:r>
               <a:rPr sz="900" b="0" i="0">
@@ -14247,7 +14247,7 @@
                 </a:solidFill>
                 <a:latin typeface="Arial"/>
               </a:rPr>
-              <a:t> readings for installed parameters</a:t>
+              <a:t> after treatment</a:t>
             </a:r>
           </a:p>
           <a:p>
@@ -14269,7 +14269,7 @@
                 </a:solidFill>
                 <a:latin typeface="Arial"/>
               </a:rPr>
-              <a:t>Repeatability</a:t>
+              <a:t>How consistent</a:t>
             </a:r>
             <a:r>
               <a:rPr sz="900" b="0" i="0">
@@ -14278,7 +14278,7 @@
                 </a:solidFill>
                 <a:latin typeface="Arial"/>
               </a:rPr>
-              <a:t> (SD of n readings)</a:t>
+              <a:t> the repeat readings were</a:t>
             </a:r>
           </a:p>
           <a:p>
@@ -14300,7 +14300,7 @@
                 </a:solidFill>
                 <a:latin typeface="Arial"/>
               </a:rPr>
-              <a:t>Faults / abnormal observations</a:t>
+              <a:t>Anything that went wrong</a:t>
             </a:r>
           </a:p>
         </p:txBody>
@@ -14408,7 +14408,7 @@
                 </a:solidFill>
                 <a:latin typeface="Arial"/>
               </a:rPr>
-              <a:t>Measurement limitation</a:t>
+              <a:t>What our sensors can’t tell you</a:t>
             </a:r>
           </a:p>
         </p:txBody>
@@ -14446,7 +14446,7 @@
                 </a:solidFill>
                 <a:latin typeface="Arial"/>
               </a:rPr>
-              <a:t>pH, TDS and turbidity cannot confirm the absence of pathogens or chemical contaminants. Results describe the measured parameters only; laboratory testing is recommended where required.</a:t>
+              <a:t>pH, TDS and cloudiness can’t prove water is free of germs or harmful chemicals. We only report what we measure, and we suggest a lab test when that matters.</a:t>
             </a:r>
           </a:p>
         </p:txBody>
@@ -14508,7 +14508,7 @@
                 </a:solidFill>
                 <a:latin typeface="Arial"/>
               </a:rPr>
-              <a:t>Quantified efficiency:</a:t>
+              <a:t>Please note:</a:t>
             </a:r>
             <a:r>
               <a:rPr sz="850" b="0" i="0">
@@ -14517,7 +14517,7 @@
                 </a:solidFill>
                 <a:latin typeface="Arial"/>
               </a:rPr>
-              <a:t> reported only after testing. Values marked “proposed” are acceptance criteria to be validated, not achieved results.</a:t>
+              <a:t> every number on this slide is a target we will test against. None of them are results yet.</a:t>
             </a:r>
           </a:p>
         </p:txBody>
@@ -14585,7 +14585,7 @@
           <a:lstStyle/>
           <a:p>
             <a:r>
-              <a:t>System Architecture &amp; Control Flow</a:t>
+              <a:t>System Architecture: How the Capsule Works</a:t>
             </a:r>
           </a:p>
         </p:txBody>
@@ -14766,7 +14766,7 @@
                 </a:solidFill>
                 <a:latin typeface="Arial"/>
               </a:rPr>
-              <a:t>Water flow</a:t>
+              <a:t>Water</a:t>
             </a:r>
           </a:p>
         </p:txBody>
@@ -14841,7 +14841,7 @@
                 </a:solidFill>
                 <a:latin typeface="Arial"/>
               </a:rPr>
-              <a:t>Sensor signal</a:t>
+              <a:t>Sensor data</a:t>
             </a:r>
           </a:p>
         </p:txBody>
@@ -14916,7 +14916,7 @@
                 </a:solidFill>
                 <a:latin typeface="Arial"/>
               </a:rPr>
-              <a:t>Control command</a:t>
+              <a:t>Commands</a:t>
             </a:r>
           </a:p>
         </p:txBody>
@@ -15000,7 +15000,7 @@
                 </a:solidFill>
                 <a:latin typeface="Arial"/>
               </a:rPr>
-              <a:t>Actuator</a:t>
+              <a:t>Moving part</a:t>
             </a:r>
           </a:p>
         </p:txBody>
@@ -15077,7 +15077,7 @@
                 </a:solidFill>
                 <a:latin typeface="Arial"/>
               </a:rPr>
-              <a:t>40 µm weighted pre-mesh</a:t>
+              <a:t>with a 40 µm mesh at the tip</a:t>
             </a:r>
           </a:p>
         </p:txBody>
@@ -15174,7 +15174,7 @@
                 </a:solidFill>
                 <a:latin typeface="Arial"/>
               </a:rPr>
-              <a:t>Micro pump P1</a:t>
+              <a:t>Small pump</a:t>
             </a:r>
           </a:p>
           <a:p>
@@ -15190,7 +15190,7 @@
                 </a:solidFill>
                 <a:latin typeface="Arial"/>
               </a:rPr>
-              <a:t>5–6 V diaphragm</a:t>
+              <a:t>runs on 5–6 V</a:t>
             </a:r>
           </a:p>
         </p:txBody>
@@ -15287,7 +15287,7 @@
                 </a:solidFill>
                 <a:latin typeface="Arial"/>
               </a:rPr>
-              <a:t>Valve V1</a:t>
+              <a:t>Valve 1</a:t>
             </a:r>
           </a:p>
           <a:p>
@@ -15303,7 +15303,7 @@
                 </a:solidFill>
                 <a:latin typeface="Arial"/>
               </a:rPr>
-              <a:t>3-way: sample / treat</a:t>
+              <a:t>test or treat</a:t>
             </a:r>
           </a:p>
         </p:txBody>
@@ -15400,7 +15400,7 @@
                 </a:solidFill>
                 <a:latin typeface="Arial"/>
               </a:rPr>
-              <a:t>Twist-lock cartridge</a:t>
+              <a:t>Filter cartridge</a:t>
             </a:r>
           </a:p>
           <a:p>
@@ -15416,7 +15416,7 @@
                 </a:solidFill>
                 <a:latin typeface="Arial"/>
               </a:rPr>
-              <a:t>activated carbon + hollow-fibre UF</a:t>
+              <a:t>carbon plus a fine membrane</a:t>
             </a:r>
           </a:p>
         </p:txBody>
@@ -15513,7 +15513,7 @@
                 </a:solidFill>
                 <a:latin typeface="Arial"/>
               </a:rPr>
-              <a:t>UV-C LED chamber</a:t>
+              <a:t>UV-C light</a:t>
             </a:r>
           </a:p>
           <a:p>
@@ -15529,7 +15529,7 @@
                 </a:solidFill>
                 <a:latin typeface="Arial"/>
               </a:rPr>
-              <a:t>optional · interlocked</a:t>
+              <a:t>optional, locks with the cap</a:t>
             </a:r>
           </a:p>
         </p:txBody>
@@ -15626,7 +15626,7 @@
                 </a:solidFill>
                 <a:latin typeface="Arial"/>
               </a:rPr>
-              <a:t>Valve V2</a:t>
+              <a:t>Valve 2</a:t>
             </a:r>
           </a:p>
           <a:p>
@@ -15642,7 +15642,7 @@
                 </a:solidFill>
                 <a:latin typeface="Arial"/>
               </a:rPr>
-              <a:t>3-way: verify / dispense</a:t>
+              <a:t>test again or pour</a:t>
             </a:r>
           </a:p>
         </p:txBody>
@@ -15739,7 +15739,7 @@
                 </a:solidFill>
                 <a:latin typeface="Arial"/>
               </a:rPr>
-              <a:t>Outlet spout</a:t>
+              <a:t>Spout</a:t>
             </a:r>
           </a:p>
           <a:p>
@@ -15755,7 +15755,7 @@
                 </a:solidFill>
                 <a:latin typeface="Arial"/>
               </a:rPr>
-              <a:t>dispensed after M2 passes</a:t>
+              <a:t>opens only after the check</a:t>
             </a:r>
           </a:p>
         </p:txBody>
@@ -15816,7 +15816,7 @@
                 </a:solidFill>
                 <a:latin typeface="Arial"/>
               </a:rPr>
-              <a:t>Battery &amp; safety</a:t>
+              <a:t>Safety sensing</a:t>
             </a:r>
           </a:p>
           <a:p>
@@ -15832,7 +15832,7 @@
                 </a:solidFill>
                 <a:latin typeface="Arial"/>
               </a:rPr>
-              <a:t>battery voltage · pump current · moisture</a:t>
+              <a:t>battery, pump current, leaks</a:t>
             </a:r>
           </a:p>
         </p:txBody>
@@ -15930,7 +15930,7 @@
                 </a:solidFill>
                 <a:latin typeface="Arial"/>
               </a:rPr>
-              <a:t>Driver stage</a:t>
+              <a:t>Switches</a:t>
             </a:r>
           </a:p>
           <a:p>
@@ -15946,7 +15946,7 @@
                 </a:solidFill>
                 <a:latin typeface="Arial"/>
               </a:rPr>
-              <a:t>MOSFETs: P1, V1, V2, UV-C</a:t>
+              <a:t>turn the pump, valves and UV on and off</a:t>
             </a:r>
           </a:p>
         </p:txBody>
@@ -16081,7 +16081,7 @@
                 </a:solidFill>
                 <a:latin typeface="Arial"/>
               </a:rPr>
-              <a:t>Shared sensing cell (≈ 3 mL) — measured twice</a:t>
+              <a:t>One small test cell (about 3 mL), used twice</a:t>
             </a:r>
           </a:p>
           <a:p>
@@ -16097,7 +16097,7 @@
                 </a:solidFill>
                 <a:latin typeface="Arial"/>
               </a:rPr>
-              <a:t>pH · EC / TDS · IR turbidity · temperature  |  M1 = raw sample via V1  ·  M2 = treated sample via V2</a:t>
+              <a:t>pH, TDS, cloudiness and temperature. First the raw water through valve 1, then the treated water through valve 2.</a:t>
             </a:r>
           </a:p>
         </p:txBody>
@@ -16266,7 +16266,7 @@
                 </a:solidFill>
                 <a:latin typeface="Arial"/>
               </a:rPr>
-              <a:t>Reject port</a:t>
+              <a:t>Waste outlet</a:t>
             </a:r>
           </a:p>
           <a:p>
@@ -16282,7 +16282,7 @@
                 </a:solidFill>
                 <a:latin typeface="Arial"/>
               </a:rPr>
-              <a:t>sample &amp; flush water</a:t>
+              <a:t>test and rinse water</a:t>
             </a:r>
           </a:p>
         </p:txBody>
@@ -16403,7 +16403,7 @@
                 </a:solidFill>
                 <a:latin typeface="Arial Black"/>
               </a:rPr>
-              <a:t>ESP32-C3 CONTROL UNIT</a:t>
+              <a:t>THE BRAIN: ESP32-C3</a:t>
             </a:r>
           </a:p>
           <a:p>
@@ -16420,7 +16420,7 @@
                 </a:solidFill>
                 <a:latin typeface="Arial"/>
               </a:rPr>
-              <a:t>ESP32-C3 module · firmware state machine</a:t>
+              <a:t>a small Wi-Fi and Bluetooth chip</a:t>
             </a:r>
           </a:p>
         </p:txBody>
@@ -16481,7 +16481,7 @@
                 </a:solidFill>
                 <a:latin typeface="Arial"/>
               </a:rPr>
-              <a:t>Identification</a:t>
+              <a:t>Check the readings</a:t>
             </a:r>
           </a:p>
           <a:p>
@@ -16497,7 +16497,7 @@
                 </a:solidFill>
                 <a:latin typeface="Arial"/>
               </a:rPr>
-              <a:t>validate M1 (range, stability)</a:t>
+              <a:t>are they sensible and steady?</a:t>
             </a:r>
           </a:p>
         </p:txBody>
@@ -16558,7 +16558,7 @@
                 </a:solidFill>
                 <a:latin typeface="Arial"/>
               </a:rPr>
-              <a:t>Adaptation logic</a:t>
+              <a:t>Choose the treatment</a:t>
             </a:r>
           </a:p>
           <a:p>
@@ -16574,7 +16574,7 @@
                 </a:solidFill>
                 <a:latin typeface="Arial"/>
               </a:rPr>
-              <a:t>flow · UV-C dose · cartridge advice</a:t>
+              <a:t>flow speed, UV dose, cartridge advice</a:t>
             </a:r>
           </a:p>
         </p:txBody>
@@ -16635,7 +16635,7 @@
                 </a:solidFill>
                 <a:latin typeface="Arial"/>
               </a:rPr>
-              <a:t>Verify before dispensing</a:t>
+              <a:t>Compare before and after</a:t>
             </a:r>
           </a:p>
           <a:p>
@@ -16651,7 +16651,7 @@
                 </a:solidFill>
                 <a:latin typeface="Arial"/>
               </a:rPr>
-              <a:t>Δ = M2 − M1 vs target bands</a:t>
+              <a:t>did the water really improve?</a:t>
             </a:r>
           </a:p>
         </p:txBody>
@@ -16712,7 +16712,7 @@
                 </a:solidFill>
                 <a:latin typeface="Arial"/>
               </a:rPr>
-              <a:t>Safety supervisor</a:t>
+              <a:t>Keep it safe</a:t>
             </a:r>
           </a:p>
           <a:p>
@@ -16728,7 +16728,7 @@
                 </a:solidFill>
                 <a:latin typeface="Arial"/>
               </a:rPr>
-              <a:t>moisture · dry intake · clog · battery · UV interlock</a:t>
+              <a:t>leaks, running dry, blockages, battery, UV lock</a:t>
             </a:r>
           </a:p>
         </p:txBody>
@@ -16826,7 +16826,7 @@
                 </a:solidFill>
                 <a:latin typeface="Arial"/>
               </a:rPr>
-              <a:t>User interface:</a:t>
+              <a:t>What you see:</a:t>
             </a:r>
             <a:r>
               <a:rPr sz="850" b="0" i="0">
@@ -16835,7 +16835,7 @@
                 </a:solidFill>
                 <a:latin typeface="Arial"/>
               </a:rPr>
-              <a:t> 0.91-inch OLED · RGB ring · button · BLE phone app (history)</a:t>
+              <a:t> a small screen, a light ring, one button, and a phone app with your history</a:t>
             </a:r>
           </a:p>
         </p:txBody>
@@ -16933,7 +16933,7 @@
                 </a:solidFill>
                 <a:latin typeface="Arial"/>
               </a:rPr>
-              <a:t>NORMAL — DISPENSE</a:t>
+              <a:t>ALL GOOD: WATER POURS</a:t>
             </a:r>
           </a:p>
           <a:p>
@@ -16949,7 +16949,7 @@
                 </a:solidFill>
                 <a:latin typeface="Arial"/>
               </a:rPr>
-              <a:t>measured change within targets</a:t>
+              <a:t>the change is what we wanted</a:t>
             </a:r>
           </a:p>
         </p:txBody>
@@ -17010,7 +17010,7 @@
                 </a:solidFill>
                 <a:latin typeface="Arial"/>
               </a:rPr>
-              <a:t>WARNING — STOP &amp; ADVISE</a:t>
+              <a:t>NOT GOOD: STOP AND ADVISE</a:t>
             </a:r>
           </a:p>
           <a:p>
@@ -17026,7 +17026,7 @@
                 </a:solidFill>
                 <a:latin typeface="Arial"/>
               </a:rPr>
-              <a:t>second pass · replace cartridge · laboratory testing</a:t>
+              <a:t>run again, change the cartridge, or get a lab test</a:t>
             </a:r>
           </a:p>
         </p:txBody>
@@ -17106,7 +17106,7 @@
                           </a:solidFill>
                           <a:latin typeface="Arial"/>
                         </a:rPr>
-                        <a:t>Condition measured at M1</a:t>
+                        <a:t>What the first test shows</a:t>
                       </a:r>
                     </a:p>
                   </a:txBody>
@@ -17145,7 +17145,7 @@
                           </a:solidFill>
                           <a:latin typeface="Arial"/>
                         </a:rPr>
-                        <a:t>Proposed adaptation</a:t>
+                        <a:t>What the capsule does</a:t>
                       </a:r>
                     </a:p>
                   </a:txBody>
@@ -17184,7 +17184,7 @@
                           </a:solidFill>
                           <a:latin typeface="Arial"/>
                         </a:rPr>
-                        <a:t>If the fitted cartridge cannot correct it</a:t>
+                        <a:t>If the cartridge can’t fix it</a:t>
                       </a:r>
                     </a:p>
                   </a:txBody>
@@ -17225,7 +17225,7 @@
                           </a:solidFill>
                           <a:latin typeface="Arial"/>
                         </a:rPr>
-                        <a:t>Readings invalid or unstable</a:t>
+                        <a:t>Readings look wrong or jumpy</a:t>
                       </a:r>
                     </a:p>
                   </a:txBody>
@@ -17264,7 +17264,7 @@
                           </a:solidFill>
                           <a:latin typeface="Arial"/>
                         </a:rPr>
-                        <a:t>No treatment; re-sample twice</a:t>
+                        <a:t>Doesn’t treat; tests twice more</a:t>
                       </a:r>
                     </a:p>
                   </a:txBody>
@@ -17303,7 +17303,7 @@
                           </a:solidFill>
                           <a:latin typeface="Arial"/>
                         </a:rPr>
-                        <a:t>Sensor fault warning</a:t>
+                        <a:t>Warns about a sensor problem</a:t>
                       </a:r>
                     </a:p>
                   </a:txBody>
@@ -17344,7 +17344,7 @@
                           </a:solidFill>
                           <a:latin typeface="Arial"/>
                         </a:rPr>
-                        <a:t>Turbidity above reference band</a:t>
+                        <a:t>Water is cloudy</a:t>
                       </a:r>
                     </a:p>
                   </a:txBody>
@@ -17383,7 +17383,7 @@
                           </a:solidFill>
                           <a:latin typeface="Arial"/>
                         </a:rPr>
-                        <a:t>Reduced flow (longer contact); UV-C only once M2 turbidity is in band</a:t>
+                        <a:t>Slows the flow; uses UV only once it is clear</a:t>
                       </a:r>
                     </a:p>
                   </a:txBody>
@@ -17422,7 +17422,7 @@
                           </a:solidFill>
                           <a:latin typeface="Arial"/>
                         </a:rPr>
-                        <a:t>Stop; suggest settling / second pass</a:t>
+                        <a:t>Stops and suggests letting it settle</a:t>
                       </a:r>
                     </a:p>
                   </a:txBody>
@@ -17463,7 +17463,7 @@
                           </a:solidFill>
                           <a:latin typeface="Arial"/>
                         </a:rPr>
-                        <a:t>Turbidity within band</a:t>
+                        <a:t>Water is clear</a:t>
                       </a:r>
                     </a:p>
                   </a:txBody>
@@ -17502,7 +17502,7 @@
                           </a:solidFill>
                           <a:latin typeface="Arial"/>
                         </a:rPr>
-                        <a:t>Standard flow; UV-C on (if fitted)</a:t>
+                        <a:t>Normal flow, UV on if fitted</a:t>
                       </a:r>
                     </a:p>
                   </a:txBody>
@@ -17541,7 +17541,7 @@
                           </a:solidFill>
                           <a:latin typeface="Arial"/>
                         </a:rPr>
-                        <a:t>—</a:t>
+                        <a:t>Nothing extra needed</a:t>
                       </a:r>
                     </a:p>
                   </a:txBody>
@@ -17582,7 +17582,7 @@
                           </a:solidFill>
                           <a:latin typeface="Arial"/>
                         </a:rPr>
-                        <a:t>TDS &gt; 500 mg/L or pH outside 6.5–8.5</a:t>
+                        <a:t>TDS above 500 mg/L, or pH outside 6.5–8.5</a:t>
                       </a:r>
                     </a:p>
                   </a:txBody>
@@ -17621,7 +17621,7 @@
                           </a:solidFill>
                           <a:latin typeface="Arial"/>
                         </a:rPr>
-                        <a:t>Standard pathway; parameter flagged</a:t>
+                        <a:t>Treats as normal and flags it</a:t>
                       </a:r>
                     </a:p>
                   </a:txBody>
@@ -17660,7 +17660,7 @@
                           </a:solidFill>
                           <a:latin typeface="Arial"/>
                         </a:rPr>
-                        <a:t>Warn: cartridge does not change TDS / pH; recommend testing</a:t>
+                        <a:t>Explains the cartridge can’t change this; suggests a test</a:t>
                       </a:r>
                     </a:p>
                   </a:txBody>
@@ -17701,7 +17701,7 @@
                           </a:solidFill>
                           <a:latin typeface="Arial"/>
                         </a:rPr>
-                        <a:t>M2 shows no improvement vs M1</a:t>
+                        <a:t>Second test shows no improvement</a:t>
                       </a:r>
                     </a:p>
                   </a:txBody>
@@ -17740,7 +17740,7 @@
                           </a:solidFill>
                           <a:latin typeface="Arial"/>
                         </a:rPr>
-                        <a:t>Stop before dispensing</a:t>
+                        <a:t>Doesn’t pour the water</a:t>
                       </a:r>
                     </a:p>
                   </a:txBody>
@@ -17779,7 +17779,7 @@
                           </a:solidFill>
                           <a:latin typeface="Arial"/>
                         </a:rPr>
-                        <a:t>Replace cartridge; laboratory testing</a:t>
+                        <a:t>Suggests a new cartridge or a lab test</a:t>
                       </a:r>
                     </a:p>
                   </a:txBody>
@@ -17913,7 +17913,7 @@
                 </a:solidFill>
                 <a:latin typeface="Arial"/>
               </a:rPr>
-              <a:t>Why the closed loop is the innovation</a:t>
+              <a:t>Why this loop matters</a:t>
             </a:r>
           </a:p>
         </p:txBody>
@@ -17956,7 +17956,7 @@
                 </a:solidFill>
                 <a:latin typeface="Arial"/>
               </a:rPr>
-              <a:t>The same cell measures the water before and after, so the result is never assumed from the cartridge.</a:t>
+              <a:t>The same sensors test the water before and after, so we never just assume the filter worked.</a:t>
             </a:r>
           </a:p>
           <a:p>
@@ -17978,7 +17978,7 @@
                 </a:solidFill>
                 <a:latin typeface="Arial"/>
               </a:rPr>
-              <a:t>Water is dispensed only after the post-treatment check passes.</a:t>
+              <a:t>Water only comes out once the second test passes.</a:t>
             </a:r>
           </a:p>
         </p:txBody>
@@ -18046,7 +18046,7 @@
           <a:lstStyle/>
           <a:p>
             <a:r>
-              <a:t>Target Specifications &amp; Hardware Selection</a:t>
+              <a:t>System Specs: Targets and Parts We Chose</a:t>
             </a:r>
           </a:p>
         </p:txBody>
@@ -18196,7 +18196,7 @@
                           </a:solidFill>
                           <a:latin typeface="Arial"/>
                         </a:rPr>
-                        <a:t>Parameter</a:t>
+                        <a:t>Area</a:t>
                       </a:r>
                     </a:p>
                   </a:txBody>
@@ -18235,7 +18235,7 @@
                           </a:solidFill>
                           <a:latin typeface="Arial"/>
                         </a:rPr>
-                        <a:t>Proposed target</a:t>
+                        <a:t>What we are aiming for</a:t>
                       </a:r>
                     </a:p>
                   </a:txBody>
@@ -18274,7 +18274,7 @@
                           </a:solidFill>
                           <a:latin typeface="Arial"/>
                         </a:rPr>
-                        <a:t>Selected / proposed component</a:t>
+                        <a:t>Parts we plan to use</a:t>
                       </a:r>
                     </a:p>
                   </a:txBody>
@@ -18313,7 +18313,7 @@
                           </a:solidFill>
                           <a:latin typeface="Arial"/>
                         </a:rPr>
-                        <a:t>Validation method / status</a:t>
+                        <a:t>How we will check it</a:t>
                       </a:r>
                     </a:p>
                   </a:txBody>
@@ -18354,7 +18354,7 @@
                           </a:solidFill>
                           <a:latin typeface="Arial"/>
                         </a:rPr>
-                        <a:t>Form factor</a:t>
+                        <a:t>Size</a:t>
                       </a:r>
                     </a:p>
                   </a:txBody>
@@ -18393,7 +18393,7 @@
                           </a:solidFill>
                           <a:latin typeface="Arial"/>
                         </a:rPr>
-                        <a:t>Pocket-size capsule ≈ Ø 60 × 210 mm incl. spout (v1); later ≤ Ø 50 × 170 mm; ≤ 400 g in use</a:t>
+                        <a:t>About 60 mm wide and 210 mm tall for the first version, shrinking to about 50 × 170 mm; under 400 g</a:t>
                       </a:r>
                     </a:p>
                   </a:txBody>
@@ -18432,7 +18432,7 @@
                           </a:solidFill>
                           <a:latin typeface="Arial"/>
                         </a:rPr>
-                        <a:t>3D-printed PETG shell (v1); wet core beside a sealed dry spine</a:t>
+                        <a:t>3D-printed PETG body, with the wet parts kept separate from a sealed electronics section</a:t>
                       </a:r>
                     </a:p>
                   </a:txBody>
@@ -18471,7 +18471,7 @@
                           </a:solidFill>
                           <a:latin typeface="Arial"/>
                         </a:rPr>
-                        <a:t>Measure &amp; weigh v1 — pending</a:t>
+                        <a:t>Measure and weigh version 1</a:t>
                       </a:r>
                     </a:p>
                   </a:txBody>
@@ -18551,7 +18551,7 @@
                           </a:solidFill>
                           <a:latin typeface="Arial"/>
                         </a:rPr>
-                        <a:t>Low-power MCU with BLE; deep sleep between cycles</a:t>
+                        <a:t>Low power, Bluetooth for the phone app, sleeps between uses</a:t>
                       </a:r>
                     </a:p>
                   </a:txBody>
@@ -18590,7 +18590,7 @@
                           </a:solidFill>
                           <a:latin typeface="Arial"/>
                         </a:rPr>
-                        <a:t>ESP32-C3 module: WROOM-02 in schematic v0.1, MINI-1 for final size (RISC-V, up to 160 MHz, Wi-Fi + BLE)</a:t>
+                        <a:t>ESP32-C3 (the WROOM-02 module in our schematic; the smaller MINI-1 for the final build)</a:t>
                       </a:r>
                     </a:p>
                   </a:txBody>
@@ -18629,7 +18629,7 @@
                           </a:solidFill>
                           <a:latin typeface="Arial"/>
                         </a:rPr>
-                        <a:t>Bring-up &amp; sleep current — pending</a:t>
+                        <a:t>Power it up and measure sleep current</a:t>
                       </a:r>
                     </a:p>
                   </a:txBody>
@@ -18670,7 +18670,7 @@
                           </a:solidFill>
                           <a:latin typeface="Arial"/>
                         </a:rPr>
-                        <a:t>Sensing &amp; accuracy</a:t>
+                        <a:t>Sensors</a:t>
                       </a:r>
                     </a:p>
                   </a:txBody>
@@ -18709,7 +18709,7 @@
                           </a:solidFill>
                           <a:latin typeface="Arial"/>
                         </a:rPr>
-                        <a:t>One ≈ 3 mL cell measured twice; pH ±0.1, TDS ±10% F.S., temp. ±0.5 °C; turbidity relative until calibrated</a:t>
+                        <a:t>One 3 mL test cell used twice; pH within 0.1, TDS within 10%, temperature within 0.5 °C</a:t>
                       </a:r>
                     </a:p>
                   </a:txBody>
@@ -18748,7 +18748,7 @@
                           </a:solidFill>
                           <a:latin typeface="Arial"/>
                         </a:rPr>
-                        <a:t>Mini pH electrode (supplier TBD) + SEN0161-V2 front-end and DFR0504 isolator; SEN0244 EC/TDS; IR scatter turbidity pair; DS18B20; ADS1115</a:t>
+                        <a:t>Small pH probe (supplier still to find) with a DFRobot pH board and isolator, DFRobot TDS board, our own infrared cloudiness sensor, DS18B20, ADS1115</a:t>
                       </a:r>
                     </a:p>
                   </a:txBody>
@@ -18787,7 +18787,7 @@
                           </a:solidFill>
                           <a:latin typeface="Arial"/>
                         </a:rPr>
-                        <a:t>Calibration vs buffers / formazin — pending</a:t>
+                        <a:t>Calibrate with buffer liquids and turbidity standards</a:t>
                       </a:r>
                     </a:p>
                   </a:txBody>
@@ -18867,7 +18867,7 @@
                           </a:solidFill>
                           <a:latin typeface="Arial"/>
                         </a:rPr>
-                        <a:t>250 mL per cycle; 0.2–0.4 L/min; 15 mL flush before M2</a:t>
+                        <a:t>250 mL per run at 0.2–0.4 L per minute, with a 15 mL rinse before the second test</a:t>
                       </a:r>
                     </a:p>
                   </a:txBody>
@@ -18906,7 +18906,7 @@
                           </a:solidFill>
                           <a:latin typeface="Arial"/>
                         </a:rPr>
-                        <a:t>Intake + 40 µm mesh → P1 → V1 → cartridge → UV-C → V2 → spout; samples → cell → reject port</a:t>
+                        <a:t>Hose and mesh, pump, valve 1, cartridge, UV, valve 2, spout; test water goes to the waste outlet</a:t>
                       </a:r>
                     </a:p>
                   </a:txBody>
@@ -18945,7 +18945,7 @@
                           </a:solidFill>
                           <a:latin typeface="Arial"/>
                         </a:rPr>
-                        <a:t>Flow &amp; carry-over tests — pending</a:t>
+                        <a:t>Flow test and leftover-water test</a:t>
                       </a:r>
                     </a:p>
                   </a:txBody>
@@ -18986,7 +18986,7 @@
                           </a:solidFill>
                           <a:latin typeface="Arial"/>
                         </a:rPr>
-                        <a:t>Treatment &amp; adaptation</a:t>
+                        <a:t>Treatment</a:t>
                       </a:r>
                     </a:p>
                   </a:txBody>
@@ -19025,7 +19025,7 @@
                           </a:solidFill>
                           <a:latin typeface="Arial"/>
                         </a:rPr>
-                        <a:t>Adapts flow (contact time), UV-C dose, second-pass prompt, cartridge advice</a:t>
+                        <a:t>Adjust flow speed, UV dose, suggest a second run or a new cartridge</a:t>
                       </a:r>
                     </a:p>
                   </a:txBody>
@@ -19064,7 +19064,7 @@
                           </a:solidFill>
                           <a:latin typeface="Arial"/>
                         </a:rPr>
-                        <a:t>Twist-lock cartridge: activated carbon + hollow-fibre UF (pore rating per supplier); UV-C LED (optional)</a:t>
+                        <a:t>Twist-off cartridge with activated carbon and a hollow-fibre membrane; optional UV-C LED</a:t>
                       </a:r>
                     </a:p>
                   </a:txBody>
@@ -19103,7 +19103,7 @@
                           </a:solidFill>
                           <a:latin typeface="Arial"/>
                         </a:rPr>
-                        <a:t>Routing &amp; dose tests — pending</a:t>
+                        <a:t>Check each treatment route with clean water</a:t>
                       </a:r>
                     </a:p>
                   </a:txBody>
@@ -19144,7 +19144,7 @@
                           </a:solidFill>
                           <a:latin typeface="Arial"/>
                         </a:rPr>
-                        <a:t>Pump &amp; valves</a:t>
+                        <a:t>Pump and valves</a:t>
                       </a:r>
                     </a:p>
                   </a:txBody>
@@ -19183,7 +19183,7 @@
                           </a:solidFill>
                           <a:latin typeface="Arial"/>
                         </a:rPr>
-                        <a:t>Self-priming; dry-intake stop ≤ 3 s; clog detection from pump current</a:t>
+                        <a:t>Primes itself, stops within 3 s if dry, spots blockages from pump current</a:t>
                       </a:r>
                     </a:p>
                   </a:txBody>
@@ -19222,7 +19222,7 @@
                           </a:solidFill>
                           <a:latin typeface="Arial"/>
                         </a:rPr>
-                        <a:t>5–6 V micro diaphragm pump; 2 × micro 3-way solenoid valves; INA219-class current sense</a:t>
+                        <a:t>Small 5–6 V diaphragm pump, two small 3-way valves, INA219 current sensor</a:t>
                       </a:r>
                     </a:p>
                   </a:txBody>
@@ -19261,7 +19261,7 @@
                           </a:solidFill>
                           <a:latin typeface="Arial"/>
                         </a:rPr>
-                        <a:t>Dry-run &amp; clog tests — pending</a:t>
+                        <a:t>Dry-run and blockage tests</a:t>
                       </a:r>
                     </a:p>
                   </a:txBody>
@@ -19341,7 +19341,7 @@
                           </a:solidFill>
                           <a:latin typeface="Arial"/>
                         </a:rPr>
-                        <a:t>≥ 30 cycles per charge; USB-C charging; charge-temperature protection added in rev 0.2</a:t>
+                        <a:t>At least 30 runs per charge, USB-C charging; temperature-safe charging in the next version</a:t>
                       </a:r>
                     </a:p>
                   </a:txBody>
@@ -19380,7 +19380,7 @@
                           </a:solidFill>
                           <a:latin typeface="Arial"/>
                         </a:rPr>
-                        <a:t>1 × protected 18650 Li-ion (≈ 3 Ah class), MCP73831 charger, AP2112K 3.3 V LDO, MT3608 5 V boost, battery-voltage sense</a:t>
+                        <a:t>One protected 18650 battery, MCP73831 charger, 3.3 V and 5 V supplies, battery level check</a:t>
                       </a:r>
                     </a:p>
                   </a:txBody>
@@ -19419,7 +19419,7 @@
                           </a:solidFill>
                           <a:latin typeface="Arial"/>
                         </a:rPr>
-                        <a:t>Endurance test — pending</a:t>
+                        <a:t>Battery life test</a:t>
                       </a:r>
                     </a:p>
                   </a:txBody>
@@ -19460,7 +19460,7 @@
                           </a:solidFill>
                           <a:latin typeface="Arial"/>
                         </a:rPr>
-                        <a:t>Enclosure &amp; separation</a:t>
+                        <a:t>Waterproofing</a:t>
                       </a:r>
                     </a:p>
                   </a:txBody>
@@ -19499,7 +19499,7 @@
                           </a:solidFill>
                           <a:latin typeface="Arial"/>
                         </a:rPr>
-                        <a:t>Dry spine sealed from wet core; IPX7 design target</a:t>
+                        <a:t>Electronics fully sealed off from the water; aiming for IPX7</a:t>
                       </a:r>
                     </a:p>
                   </a:txBody>
@@ -19538,7 +19538,7 @@
                           </a:solidFill>
                           <a:latin typeface="Arial"/>
                         </a:rPr>
-                        <a:t>O-ring bulkhead, potted feed-throughs, sealed USB-C, moisture-sense traces</a:t>
+                        <a:t>O-ring wall, sealed cable passages, sealed USB-C, a leak sensor inside</a:t>
                       </a:r>
                     </a:p>
                   </a:txBody>
@@ -19577,7 +19577,7 @@
                           </a:solidFill>
                           <a:latin typeface="Arial"/>
                         </a:rPr>
-                        <a:t>Immersion test planned; IP not tested</a:t>
+                        <a:t>Dunk test planned; not tested yet</a:t>
                       </a:r>
                     </a:p>
                   </a:txBody>
@@ -19618,7 +19618,7 @@
                           </a:solidFill>
                           <a:latin typeface="Arial"/>
                         </a:rPr>
-                        <a:t>Comparison logic</a:t>
+                        <a:t>Comparison</a:t>
                       </a:r>
                     </a:p>
                   </a:txBody>
@@ -19657,7 +19657,7 @@
                           </a:solidFill>
                           <a:latin typeface="Arial"/>
                         </a:rPr>
-                        <a:t>Median of 30 samples; Δ = M2 − M1 vs target band; verify before dispensing</a:t>
+                        <a:t>Average 30 readings, compare before and after, pour only if it passes</a:t>
                       </a:r>
                     </a:p>
                   </a:txBody>
@@ -19696,7 +19696,7 @@
                           </a:solidFill>
                           <a:latin typeface="Arial"/>
                         </a:rPr>
-                        <a:t>ESP32-C3 firmware; reference bands from IS 10500:2012</a:t>
+                        <a:t>Code on the ESP32-C3, with limits from IS 10500:2012</a:t>
                       </a:r>
                     </a:p>
                   </a:txBody>
@@ -19735,7 +19735,7 @@
                           </a:solidFill>
                           <a:latin typeface="Arial"/>
                         </a:rPr>
-                        <a:t>Known-sample verification — pending</a:t>
+                        <a:t>Test with water we already know</a:t>
                       </a:r>
                     </a:p>
                   </a:txBody>
@@ -19776,7 +19776,7 @@
                           </a:solidFill>
                           <a:latin typeface="Arial"/>
                         </a:rPr>
-                        <a:t>Monitoring interface</a:t>
+                        <a:t>Display</a:t>
                       </a:r>
                     </a:p>
                   </a:txBody>
@@ -19815,7 +19815,7 @@
                           </a:solidFill>
                           <a:latin typeface="Arial"/>
                         </a:rPr>
-                        <a:t>Result on device ≤ 1 s after M2; history in phone app</a:t>
+                        <a:t>Result shown within a second; history kept in the app</a:t>
                       </a:r>
                     </a:p>
                   </a:txBody>
@@ -19854,7 +19854,7 @@
                           </a:solidFill>
                           <a:latin typeface="Arial"/>
                         </a:rPr>
-                        <a:t>0.91-inch OLED, RGB ring, one button; BLE phone app (to be developed)</a:t>
+                        <a:t>Small OLED screen, light ring, one button, phone app (still to build)</a:t>
                       </a:r>
                     </a:p>
                   </a:txBody>
@@ -19893,7 +19893,7 @@
                           </a:solidFill>
                           <a:latin typeface="Arial"/>
                         </a:rPr>
-                        <a:t>User walkthrough — pending</a:t>
+                        <a:t>Try it out with real users</a:t>
                       </a:r>
                     </a:p>
                   </a:txBody>
@@ -19934,7 +19934,7 @@
                           </a:solidFill>
                           <a:latin typeface="Arial"/>
                         </a:rPr>
-                        <a:t>Operating conditions</a:t>
+                        <a:t>Conditions</a:t>
                       </a:r>
                     </a:p>
                   </a:txBody>
@@ -19973,7 +19973,7 @@
                           </a:solidFill>
                           <a:latin typeface="Arial"/>
                         </a:rPr>
-                        <a:t>Water 5–40 °C; ambient 5–40 °C; dip or pour from an open container</a:t>
+                        <a:t>Water and air between 5 and 40 °C; you dip it in, or pour water into a cup</a:t>
                       </a:r>
                     </a:p>
                   </a:txBody>
@@ -20012,7 +20012,7 @@
                           </a:solidFill>
                           <a:latin typeface="Arial"/>
                         </a:rPr>
-                        <a:t>Bounded by probe ratings and Li-ion cell limits</a:t>
+                        <a:t>Limited by the probes and the battery</a:t>
                       </a:r>
                     </a:p>
                   </a:txBody>
@@ -20051,7 +20051,7 @@
                           </a:solidFill>
                           <a:latin typeface="Arial"/>
                         </a:rPr>
-                        <a:t>Temperature check — pending</a:t>
+                        <a:t>Temperature check</a:t>
                       </a:r>
                     </a:p>
                   </a:txBody>
@@ -20115,7 +20115,7 @@
                 </a:solidFill>
                 <a:latin typeface="Arial"/>
               </a:rPr>
-              <a:t>PROPOSED CONTROL SEQUENCE (ONE 250 mL CYCLE)</a:t>
+              <a:t>ONE 250 mL RUN, STEP BY STEP</a:t>
             </a:r>
           </a:p>
         </p:txBody>
@@ -20172,7 +20172,7 @@
                 </a:solidFill>
                 <a:latin typeface="Arial"/>
               </a:rPr>
-              <a:t>Sample raw</a:t>
+              <a:t>Take a sample</a:t>
             </a:r>
           </a:p>
         </p:txBody>
@@ -20229,7 +20229,7 @@
                 </a:solidFill>
                 <a:latin typeface="Arial"/>
               </a:rPr>
-              <a:t>Measure M1</a:t>
+              <a:t>Test it</a:t>
             </a:r>
           </a:p>
         </p:txBody>
@@ -20286,7 +20286,7 @@
                 </a:solidFill>
                 <a:latin typeface="Arial"/>
               </a:rPr>
-              <a:t>Validate</a:t>
+              <a:t>Check readings</a:t>
             </a:r>
           </a:p>
         </p:txBody>
@@ -20343,7 +20343,7 @@
                 </a:solidFill>
                 <a:latin typeface="Arial"/>
               </a:rPr>
-              <a:t>Adapt flow &amp; UV-C</a:t>
+              <a:t>Pick a treatment</a:t>
             </a:r>
           </a:p>
         </p:txBody>
@@ -20457,7 +20457,7 @@
                 </a:solidFill>
                 <a:latin typeface="Arial"/>
               </a:rPr>
-              <a:t>Flush &amp; measure M2</a:t>
+              <a:t>Rinse and retest</a:t>
             </a:r>
           </a:p>
         </p:txBody>
@@ -20571,7 +20571,7 @@
                 </a:solidFill>
                 <a:latin typeface="Arial"/>
               </a:rPr>
-              <a:t>Dispense / stop &amp; warn</a:t>
+              <a:t>Pour or warn</a:t>
             </a:r>
           </a:p>
         </p:txBody>
@@ -20633,7 +20633,7 @@
                 </a:solidFill>
                 <a:latin typeface="Arial"/>
               </a:rPr>
-              <a:t>Energy budget (assumed loads):</a:t>
+              <a:t>Battery maths (our estimate):</a:t>
             </a:r>
             <a:r>
               <a:rPr sz="850" b="0" i="0">
@@ -20642,7 +20642,7 @@
                 </a:solidFill>
                 <a:latin typeface="Arial"/>
               </a:rPr>
-              <a:t> pump 1.5 W + UV-C 1.0 W + electronics 0.4 W for 3 min ≈ 0.15 Wh per cycle; 18650 ≈ 10.8 Wh × 0.8 usable × 0.85 conversion ≈ 7.3 Wh → ≈ 50 cycles (≈ 12 L) per charge.</a:t>
+              <a:t> pump 1.5 W, UV 1 W and electronics 0.4 W for 3 minutes is about 0.15 Wh per run. A 18650 holds about 10.8 Wh, so roughly 50 runs (12 litres) per charge.</a:t>
             </a:r>
           </a:p>
         </p:txBody>
@@ -20710,7 +20710,7 @@
           <a:lstStyle/>
           <a:p>
             <a:r>
-              <a:t>CAD Design: Capsule Assembly &amp; Exploded Views</a:t>
+              <a:t>CAD Design: The Capsule, Inside and Out</a:t>
             </a:r>
           </a:p>
         </p:txBody>
@@ -20824,7 +20824,7 @@
       </p:sp>
       <p:pic>
         <p:nvPicPr>
-          <p:cNvPr id="7" name="Isometric assembly (conceptual)" descr="cap_assembly_c.png"/>
+          <p:cNvPr id="7" name="Assembly view (concept)" descr="cap_assembly_c.png"/>
           <p:cNvPicPr>
             <a:picLocks noChangeAspect="1"/>
           </p:cNvPicPr>
@@ -20879,14 +20879,14 @@
                 </a:solidFill>
                 <a:latin typeface="Arial"/>
               </a:rPr>
-              <a:t>Figure: capsule assembly with concept dimensions</a:t>
+              <a:t>The capsule put together, with rough sizes</a:t>
             </a:r>
           </a:p>
         </p:txBody>
       </p:sp>
       <p:pic>
         <p:nvPicPr>
-          <p:cNvPr id="9" name="Exploded view (conceptual)" descr="cap_exploded_c.png"/>
+          <p:cNvPr id="9" name="Exploded view (concept)" descr="cap_exploded_c.png"/>
           <p:cNvPicPr>
             <a:picLocks noChangeAspect="1"/>
           </p:cNvPicPr>
@@ -20941,7 +20941,7 @@
                 </a:solidFill>
                 <a:latin typeface="Arial"/>
               </a:rPr>
-              <a:t>Figure: exploded view — cap, cartridge, cell, pump, spine</a:t>
+              <a:t>Taken apart: cap, cartridge, test cell, pump, electronics</a:t>
             </a:r>
           </a:p>
         </p:txBody>
@@ -21049,7 +21049,7 @@
                 </a:solidFill>
                 <a:latin typeface="Arial"/>
               </a:rPr>
-              <a:t>Component key</a:t>
+              <a:t>What each part is</a:t>
             </a:r>
           </a:p>
         </p:txBody>
@@ -21144,7 +21144,7 @@
                 </a:solidFill>
                 <a:latin typeface="Arial"/>
               </a:rPr>
-              <a:t>Outlet spout in top cap (RGB status ring)</a:t>
+              <a:t>Spout in the top cap, with a status light ring</a:t>
             </a:r>
           </a:p>
         </p:txBody>
@@ -21239,7 +21239,7 @@
                 </a:solidFill>
                 <a:latin typeface="Arial"/>
               </a:rPr>
-              <a:t>UV-C LED chamber, quartz window — optional</a:t>
+              <a:t>UV-C light chamber with a quartz window (optional)</a:t>
             </a:r>
           </a:p>
         </p:txBody>
@@ -21334,7 +21334,7 @@
                 </a:solidFill>
                 <a:latin typeface="Arial"/>
               </a:rPr>
-              <a:t>Twist-lock cartridge: carbon + hollow-fibre UF</a:t>
+              <a:t>Twist-off filter: carbon and a fine membrane</a:t>
             </a:r>
           </a:p>
         </p:txBody>
@@ -21429,7 +21429,7 @@
                 </a:solidFill>
                 <a:latin typeface="Arial"/>
               </a:rPr>
-              <a:t>Shared sensing cell: pH, EC/TDS, turbidity, temp.</a:t>
+              <a:t>Test cell for pH, TDS, cloudiness and temperature</a:t>
             </a:r>
           </a:p>
         </p:txBody>
@@ -21524,7 +21524,7 @@
                 </a:solidFill>
                 <a:latin typeface="Arial"/>
               </a:rPr>
-              <a:t>Micro 3-way valves V1 (sample/treat), V2 (verify)</a:t>
+              <a:t>Valve 1 (test or treat) and valve 2 (retest or pour)</a:t>
             </a:r>
           </a:p>
         </p:txBody>
@@ -21619,7 +21619,7 @@
                 </a:solidFill>
                 <a:latin typeface="Arial"/>
               </a:rPr>
-              <a:t>Micro diaphragm pump P1</a:t>
+              <a:t>Small pump</a:t>
             </a:r>
           </a:p>
         </p:txBody>
@@ -21714,7 +21714,7 @@
                 </a:solidFill>
                 <a:latin typeface="Arial"/>
               </a:rPr>
-              <a:t>Intake hose with weighted 40 µm pre-mesh</a:t>
+              <a:t>Intake hose with a weighted mesh tip</a:t>
             </a:r>
           </a:p>
         </p:txBody>
@@ -21809,7 +21809,7 @@
                 </a:solidFill>
                 <a:latin typeface="Arial"/>
               </a:rPr>
-              <a:t>Reject port for sample and flush water</a:t>
+              <a:t>Waste outlet for test and rinse water</a:t>
             </a:r>
           </a:p>
         </p:txBody>
@@ -21904,7 +21904,7 @@
                 </a:solidFill>
                 <a:latin typeface="Arial"/>
               </a:rPr>
-              <a:t>Dry spine: protected 18650 Li-ion cell</a:t>
+              <a:t>Battery (18650), in the sealed dry side</a:t>
             </a:r>
           </a:p>
         </p:txBody>
@@ -21999,7 +21999,7 @@
                 </a:solidFill>
                 <a:latin typeface="Arial"/>
               </a:rPr>
-              <a:t>Dry spine: controller PCB (ESP32-C3, ADC, drivers)</a:t>
+              <a:t>Circuit board with the ESP32-C3</a:t>
             </a:r>
           </a:p>
         </p:txBody>
@@ -22094,7 +22094,7 @@
                 </a:solidFill>
                 <a:latin typeface="Arial"/>
               </a:rPr>
-              <a:t>0.91-inch OLED and button on the shell</a:t>
+              <a:t>Small screen and button on the side</a:t>
             </a:r>
           </a:p>
         </p:txBody>
@@ -22189,7 +22189,7 @@
                 </a:solidFill>
                 <a:latin typeface="Arial"/>
               </a:rPr>
-              <a:t>Sealed USB-C charging / data port</a:t>
+              <a:t>Sealed USB-C port for charging</a:t>
             </a:r>
           </a:p>
         </p:txBody>
@@ -22227,7 +22227,7 @@
                 </a:solidFill>
                 <a:latin typeface="Arial"/>
               </a:rPr>
-              <a:t>Flow path:</a:t>
+              <a:t>Water path:</a:t>
             </a:r>
             <a:r>
               <a:rPr sz="850" b="0" i="0">
@@ -22236,7 +22236,7 @@
                 </a:solidFill>
                 <a:latin typeface="Arial"/>
               </a:rPr>
-              <a:t> 7 → 6 → 5 (V1) → 3 → 2 → 5 (V2) → 1; samples via V1 / V2 → 4 → 8.</a:t>
+              <a:t> hose (7), pump (6), valve 1, filter (3), UV (2), valve 2, spout (1). Test water goes through the cell (4) to the waste outlet (8).</a:t>
             </a:r>
           </a:p>
           <a:p>
@@ -22253,7 +22253,7 @@
                 </a:solidFill>
                 <a:latin typeface="Arial"/>
               </a:rPr>
-              <a:t>Service:</a:t>
+              <a:t>Changing the filter:</a:t>
             </a:r>
             <a:r>
               <a:rPr sz="850" b="0" i="0">
@@ -22262,7 +22262,7 @@
                 </a:solidFill>
                 <a:latin typeface="Arial"/>
               </a:rPr>
-              <a:t> top cap unscrews; cartridge twists out (¼ turn); probes replaceable from the cell.</a:t>
+              <a:t> unscrew the cap and give the cartridge a quarter turn.</a:t>
             </a:r>
           </a:p>
           <a:p>
@@ -22279,7 +22279,7 @@
                 </a:solidFill>
                 <a:latin typeface="Arial"/>
               </a:rPr>
-              <a:t>Concept envelope:</a:t>
+              <a:t>Size:</a:t>
             </a:r>
             <a:r>
               <a:rPr sz="850" b="0" i="0">
@@ -22288,7 +22288,7 @@
                 </a:solidFill>
                 <a:latin typeface="Arial"/>
               </a:rPr>
-              <a:t> ≈ Ø 60 × 210 mm (v1); target ≤ Ø 50 × 170 mm.</a:t>
+              <a:t> about 60 × 210 mm now, aiming for 50 × 170 mm.</a:t>
             </a:r>
           </a:p>
         </p:txBody>
@@ -22350,7 +22350,7 @@
                 </a:solidFill>
                 <a:latin typeface="Arial"/>
               </a:rPr>
-              <a:t>Evidence status:</a:t>
+              <a:t>About these pictures:</a:t>
             </a:r>
             <a:r>
               <a:rPr sz="850" b="0" i="0">
@@ -22359,7 +22359,7 @@
                 </a:solidFill>
                 <a:latin typeface="Arial"/>
               </a:rPr>
-              <a:t> these are conceptual renders. The native parametric FreeCAD model (.FCStd + .STEP) is in the project repository — screenshot on slide 13.</a:t>
+              <a:t> they are concept renders. Our actual parametric FreeCAD model is in the project repository, and there is a screenshot of it on slide 13.</a:t>
             </a:r>
           </a:p>
         </p:txBody>
@@ -22427,7 +22427,7 @@
           <a:lstStyle/>
           <a:p>
             <a:r>
-              <a:t>Mechanical Specs: Materials &amp; Validation Plan</a:t>
+              <a:t>Mechanical Specs: Materials and Our Checks</a:t>
             </a:r>
           </a:p>
         </p:txBody>
@@ -22577,7 +22577,7 @@
                           </a:solidFill>
                           <a:latin typeface="Arial"/>
                         </a:rPr>
-                        <a:t>Component</a:t>
+                        <a:t>Part</a:t>
                       </a:r>
                     </a:p>
                   </a:txBody>
@@ -22616,7 +22616,7 @@
                           </a:solidFill>
                           <a:latin typeface="Arial"/>
                         </a:rPr>
-                        <a:t>Proposed material</a:t>
+                        <a:t>Material we picked</a:t>
                       </a:r>
                     </a:p>
                   </a:txBody>
@@ -22655,7 +22655,7 @@
                           </a:solidFill>
                           <a:latin typeface="Arial"/>
                         </a:rPr>
-                        <a:t>Selection rationale</a:t>
+                        <a:t>Why</a:t>
                       </a:r>
                     </a:p>
                   </a:txBody>
@@ -22735,7 +22735,7 @@
                           </a:solidFill>
                           <a:latin typeface="Arial"/>
                         </a:rPr>
-                        <a:t>Shell &amp; top cap</a:t>
+                        <a:t>Body and cap</a:t>
                       </a:r>
                     </a:p>
                   </a:txBody>
@@ -22774,7 +22774,7 @@
                           </a:solidFill>
                           <a:latin typeface="Arial"/>
                         </a:rPr>
-                        <a:t>PETG (3D-printed) for v1; PP or copolyester, injection-moulded, later</a:t>
+                        <a:t>3D-printed PETG for now; moulded PP or Tritan-type plastic later</a:t>
                       </a:r>
                     </a:p>
                   </a:txBody>
@@ -22813,7 +22813,7 @@
                           </a:solidFill>
                           <a:latin typeface="Arial"/>
                         </a:rPr>
-                        <a:t>Tough and light; printable now, mouldable at scale</a:t>
+                        <a:t>Tough and light; easy to print today, easy to mould later</a:t>
                       </a:r>
                     </a:p>
                   </a:txBody>
@@ -22852,7 +22852,7 @@
                           </a:solidFill>
                           <a:latin typeface="Arial"/>
                         </a:rPr>
-                        <a:t>Food-contact grade to confirm</a:t>
+                        <a:t>Need to confirm it is food-safe</a:t>
                       </a:r>
                     </a:p>
                   </a:txBody>
@@ -22893,7 +22893,7 @@
                           </a:solidFill>
                           <a:latin typeface="Arial"/>
                         </a:rPr>
-                        <a:t>Wet path &amp; tubing</a:t>
+                        <a:t>Water tubes</a:t>
                       </a:r>
                     </a:p>
                   </a:txBody>
@@ -22932,7 +22932,7 @@
                           </a:solidFill>
                           <a:latin typeface="Arial"/>
                         </a:rPr>
-                        <a:t>PP fittings; platinum-cured silicone tubing, 3 mm ID</a:t>
+                        <a:t>PP fittings and platinum-cured silicone tube, 3 mm inside</a:t>
                       </a:r>
                     </a:p>
                   </a:txBody>
@@ -22971,7 +22971,7 @@
                           </a:solidFill>
                           <a:latin typeface="Arial"/>
                         </a:rPr>
-                        <a:t>Flexible routing in a small volume; water-compatible</a:t>
+                        <a:t>Bends around tight corners and is safe with water</a:t>
                       </a:r>
                     </a:p>
                   </a:txBody>
@@ -23010,7 +23010,7 @@
                           </a:solidFill>
                           <a:latin typeface="Arial"/>
                         </a:rPr>
-                        <a:t>Grade certificate required</a:t>
+                        <a:t>Need the supplier’s certificate</a:t>
                       </a:r>
                     </a:p>
                   </a:txBody>
@@ -23051,7 +23051,7 @@
                           </a:solidFill>
                           <a:latin typeface="Arial"/>
                         </a:rPr>
-                        <a:t>Sensing cell</a:t>
+                        <a:t>Test cell</a:t>
                       </a:r>
                     </a:p>
                   </a:txBody>
@@ -23090,7 +23090,7 @@
                           </a:solidFill>
                           <a:latin typeface="Arial"/>
                         </a:rPr>
-                        <a:t>PMMA body, IR-transparent window; titanium or 316 SS EC pins</a:t>
+                        <a:t>Clear acrylic with an infrared window; titanium or stainless-steel pins</a:t>
                       </a:r>
                     </a:p>
                   </a:txBody>
@@ -23129,7 +23129,7 @@
                           </a:solidFill>
                           <a:latin typeface="Arial"/>
                         </a:rPr>
-                        <a:t>Optical clarity for turbidity; corrosion-resistant electrodes</a:t>
+                        <a:t>Clear enough for the cloudiness sensor; pins that won’t rust</a:t>
                       </a:r>
                     </a:p>
                   </a:txBody>
@@ -23168,7 +23168,7 @@
                           </a:solidFill>
                           <a:latin typeface="Arial"/>
                         </a:rPr>
-                        <a:t>Proposed</a:t>
+                        <a:t>Our choice</a:t>
                       </a:r>
                     </a:p>
                   </a:txBody>
@@ -23248,7 +23248,7 @@
                           </a:solidFill>
                           <a:latin typeface="Arial"/>
                         </a:rPr>
-                        <a:t>Quartz window with PTFE reflector</a:t>
+                        <a:t>Quartz window with a PTFE reflector</a:t>
                       </a:r>
                     </a:p>
                   </a:txBody>
@@ -23287,7 +23287,7 @@
                           </a:solidFill>
                           <a:latin typeface="Arial"/>
                         </a:rPr>
-                        <a:t>UV-C degrades most plastics; quartz transmits UV-C</a:t>
+                        <a:t>UV-C damages most plastics, but passes through quartz</a:t>
                       </a:r>
                     </a:p>
                   </a:txBody>
@@ -23326,7 +23326,7 @@
                           </a:solidFill>
                           <a:latin typeface="Arial"/>
                         </a:rPr>
-                        <a:t>Supplier data required</a:t>
+                        <a:t>Need supplier data</a:t>
                       </a:r>
                     </a:p>
                   </a:txBody>
@@ -23367,7 +23367,7 @@
                           </a:solidFill>
                           <a:latin typeface="Arial"/>
                         </a:rPr>
-                        <a:t>Cartridge &amp; seals</a:t>
+                        <a:t>Cartridge and seals</a:t>
                       </a:r>
                     </a:p>
                   </a:txBody>
@@ -23406,7 +23406,7 @@
                           </a:solidFill>
                           <a:latin typeface="Arial"/>
                         </a:rPr>
-                        <a:t>PP housing with bayonet lugs; EPDM or silicone O-rings</a:t>
+                        <a:t>PP housing with twist-lock tabs; EPDM or silicone O-rings</a:t>
                       </a:r>
                     </a:p>
                   </a:txBody>
@@ -23445,7 +23445,7 @@
                           </a:solidFill>
                           <a:latin typeface="Arial"/>
                         </a:rPr>
-                        <a:t>Quarter-turn replacement; resilient sealing</a:t>
+                        <a:t>Quick to swap, and it seals well</a:t>
                       </a:r>
                     </a:p>
                   </a:txBody>
@@ -23484,7 +23484,7 @@
                           </a:solidFill>
                           <a:latin typeface="Arial"/>
                         </a:rPr>
-                        <a:t>Compatibility to confirm</a:t>
+                        <a:t>Need to confirm</a:t>
                       </a:r>
                     </a:p>
                   </a:txBody>
@@ -23525,7 +23525,7 @@
                           </a:solidFill>
                           <a:latin typeface="Arial"/>
                         </a:rPr>
-                        <a:t>Dry spine &amp; grip</a:t>
+                        <a:t>Electronics side and grip</a:t>
                       </a:r>
                     </a:p>
                   </a:txBody>
@@ -23564,7 +23564,7 @@
                           </a:solidFill>
                           <a:latin typeface="Arial"/>
                         </a:rPr>
-                        <a:t>Flame-retardant PC/ABS spine; silicone grip sleeve; 316 SS screws</a:t>
+                        <a:t>Flame-retardant PC/ABS, a silicone grip sleeve, stainless screws</a:t>
                       </a:r>
                     </a:p>
                   </a:txBody>
@@ -23603,7 +23603,7 @@
                           </a:solidFill>
                           <a:latin typeface="Arial"/>
                         </a:rPr>
-                        <a:t>Protects the battery bay; secure grip when wet</a:t>
+                        <a:t>Protects the battery; easy to hold when wet</a:t>
                       </a:r>
                     </a:p>
                   </a:txBody>
@@ -23642,7 +23642,7 @@
                           </a:solidFill>
                           <a:latin typeface="Arial"/>
                         </a:rPr>
-                        <a:t>Proposed</a:t>
+                        <a:t>Our choice</a:t>
                       </a:r>
                     </a:p>
                   </a:txBody>
@@ -23706,7 +23706,7 @@
                 </a:solidFill>
                 <a:latin typeface="Arial"/>
               </a:rPr>
-              <a:t>Criteria weighed: water compatibility, corrosion resistance, manufacturability, leak prevention, maintenance, weight and cost. Final selections need supplier data sheets confirming drinking-water contact suitability over 5–40 °C.</a:t>
+              <a:t>We weighed safety with water, rust, how easy it is to make, leaks, upkeep, weight and cost. Before we lock anything in, we need supplier sheets showing each material is safe for drinking water between 5 and 40 °C.</a:t>
             </a:r>
           </a:p>
         </p:txBody>
@@ -23814,7 +23814,7 @@
                 </a:solidFill>
                 <a:latin typeface="Arial"/>
               </a:rPr>
-              <a:t>Preliminary calculations &amp; validation plan</a:t>
+              <a:t>Our rough calculations and planned tests</a:t>
             </a:r>
           </a:p>
         </p:txBody>
@@ -23846,22 +23846,22 @@
               <a:buNone/>
             </a:pPr>
             <a:r>
-              <a:rPr sz="950" b="1" i="0">
+              <a:rPr sz="900" b="1" i="0">
                 <a:solidFill>
                   <a:srgbClr val="0F172A"/>
                 </a:solidFill>
                 <a:latin typeface="Arial"/>
               </a:rPr>
-              <a:t>1. Mass:</a:t>
-            </a:r>
-            <a:r>
-              <a:rPr sz="950" b="0" i="0">
+              <a:t>1. Weight:</a:t>
+            </a:r>
+            <a:r>
+              <a:rPr sz="900" b="0" i="0">
                 <a:solidFill>
                   <a:srgbClr val="334155"/>
                 </a:solidFill>
                 <a:latin typeface="Arial"/>
               </a:rPr>
-              <a:t> shell 120 g + wet cartridge 90 g + 18650 cell 47 g + pump 40 g + valves 30 g + PCB / OLED 25 g + UV-C 15 g + cell &amp; sensors 30 g ≈ 400 g (assumed; weigh v1).</a:t>
+              <a:t> body 120 g, wet cartridge 90 g, battery 47 g, pump 40 g, valves 30 g, board and screen 25 g, UV 15 g, test cell 30 g. That is about 400 g. These are estimates; we will weigh the real parts.</a:t>
             </a:r>
           </a:p>
           <a:p>
@@ -23872,22 +23872,22 @@
               <a:buNone/>
             </a:pPr>
             <a:r>
-              <a:rPr sz="950" b="1" i="0">
+              <a:rPr sz="900" b="1" i="0">
                 <a:solidFill>
                   <a:srgbClr val="0F172A"/>
                 </a:solidFill>
                 <a:latin typeface="Arial"/>
               </a:rPr>
-              <a:t>2. Internal flow loss:</a:t>
-            </a:r>
-            <a:r>
-              <a:rPr sz="950" b="0" i="0">
+              <a:t>2. Pressure loss in the tubes:</a:t>
+            </a:r>
+            <a:r>
+              <a:rPr sz="900" b="0" i="0">
                 <a:solidFill>
                   <a:srgbClr val="334155"/>
                 </a:solidFill>
                 <a:latin typeface="Arial"/>
               </a:rPr>
-              <a:t> Q = 0.3 L/min, ID 3 mm → v ≈ 0.71 m/s, Re ≈ 2,100 (laminar), f = 64/Re ≈ 0.030 → ≈ 0.025 bar/m; ≈ 0.3 m of path ≈ 0.008 bar. Membrane ΔP dominates → tracked through pump current.</a:t>
+              <a:t> at 0.3 L per minute through a 3 mm tube, water moves at about 0.7 m/s and the flow is smooth (Re about 2,100). That costs only about 0.008 bar over our 0.3 m of tube. The membrane matters far more, so we watch it through the pump current.</a:t>
             </a:r>
           </a:p>
           <a:p>
@@ -23898,22 +23898,22 @@
               <a:buNone/>
             </a:pPr>
             <a:r>
-              <a:rPr sz="950" b="1" i="0">
+              <a:rPr sz="900" b="1" i="0">
                 <a:solidFill>
                   <a:srgbClr val="0F172A"/>
                 </a:solidFill>
                 <a:latin typeface="Arial"/>
               </a:rPr>
-              <a:t>3. Pressure &amp; leakage:</a:t>
-            </a:r>
-            <a:r>
-              <a:rPr sz="950" b="0" i="0">
+              <a:t>3. Leaks:</a:t>
+            </a:r>
+            <a:r>
+              <a:rPr sz="900" b="0" i="0">
                 <a:solidFill>
                   <a:srgbClr val="334155"/>
                 </a:solidFill>
                 <a:latin typeface="Arial"/>
               </a:rPr>
-              <a:t> hydrostatic test at 1.5× pump shut-off pressure for 10 min; zero moisture in the dry spine (proposed).</a:t>
+              <a:t> pressurise it to 1.5 times the pump’s maximum for 10 minutes. The electronics side must stay completely dry.</a:t>
             </a:r>
           </a:p>
           <a:p>
@@ -23924,22 +23924,22 @@
               <a:buNone/>
             </a:pPr>
             <a:r>
-              <a:rPr sz="950" b="1" i="0">
+              <a:rPr sz="900" b="1" i="0">
                 <a:solidFill>
                   <a:srgbClr val="0F172A"/>
                 </a:solidFill>
                 <a:latin typeface="Arial"/>
               </a:rPr>
-              <a:t>4. Ingress &amp; drop:</a:t>
-            </a:r>
-            <a:r>
-              <a:rPr sz="950" b="0" i="0">
+              <a:t>4. Water and drops:</a:t>
+            </a:r>
+            <a:r>
+              <a:rPr sz="900" b="0" i="0">
                 <a:solidFill>
                   <a:srgbClr val="334155"/>
                 </a:solidFill>
                 <a:latin typeface="Arial"/>
               </a:rPr>
-              <a:t> IPX7-style 1 m / 30 min immersion (planned, not tested); 1 m drop on six faces with a full cartridge (proposed).</a:t>
+              <a:t> a 1 m, 30-minute dunk test (planned), and dropping it from 1 m onto each side with a full cartridge.</a:t>
             </a:r>
           </a:p>
           <a:p>
@@ -23950,22 +23950,22 @@
               <a:buNone/>
             </a:pPr>
             <a:r>
-              <a:rPr sz="950" b="1" i="0">
+              <a:rPr sz="900" b="1" i="0">
                 <a:solidFill>
                   <a:srgbClr val="0F172A"/>
                 </a:solidFill>
                 <a:latin typeface="Arial"/>
               </a:rPr>
-              <a:t>5. Bayonet &amp; joints:</a:t>
-            </a:r>
-            <a:r>
-              <a:rPr sz="950" b="0" i="0">
+              <a:t>5. Twist-lock and joints:</a:t>
+            </a:r>
+            <a:r>
+              <a:rPr sz="900" b="0" i="0">
                 <a:solidFill>
                   <a:srgbClr val="334155"/>
                 </a:solidFill>
                 <a:latin typeface="Arial"/>
               </a:rPr>
-              <a:t> removal torque ≤ 1 N·m; 500 twist cycles; pull test on every tubing joint.</a:t>
+              <a:t> easy to turn (under 1 N·m), survives 500 twists, and every tube joint gets a pull test.</a:t>
             </a:r>
           </a:p>
           <a:p>
@@ -23976,22 +23976,22 @@
               <a:buNone/>
             </a:pPr>
             <a:r>
-              <a:rPr sz="950" b="1" i="0">
+              <a:rPr sz="900" b="1" i="0">
                 <a:solidFill>
                   <a:srgbClr val="0F172A"/>
                 </a:solidFill>
                 <a:latin typeface="Arial"/>
               </a:rPr>
-              <a:t>6. FEA — not yet performed:</a:t>
-            </a:r>
-            <a:r>
-              <a:rPr sz="950" b="0" i="0">
+              <a:t>6. Stress analysis:</a:t>
+            </a:r>
+            <a:r>
+              <a:rPr sz="900" b="0" i="0">
                 <a:solidFill>
                   <a:srgbClr val="334155"/>
                 </a:solidFill>
                 <a:latin typeface="Arial"/>
               </a:rPr>
-              <a:t> shell under drop impact and bayonet lugs; acceptance FoS ≥ 2 on yield (proposed).</a:t>
+              <a:t> not done yet. We will check the body in a drop and the twist-lock tabs, aiming for a safety factor of at least 2.</a:t>
             </a:r>
           </a:p>
         </p:txBody>
@@ -24053,7 +24053,7 @@
                 </a:solidFill>
                 <a:latin typeface="Arial"/>
               </a:rPr>
-              <a:t>Integrity note:</a:t>
+              <a:t>To be clear:</a:t>
             </a:r>
             <a:r>
               <a:rPr sz="850" b="0" i="0">
@@ -24062,7 +24062,7 @@
                 </a:solidFill>
                 <a:latin typeface="Arial"/>
               </a:rPr>
-              <a:t> no FEA, stress plots or safety factors are claimed. Values above are transparent hand calculations with stated assumptions, to be replaced by measured data.</a:t>
+              <a:t> we have not done any FEA yet and we are not claiming safety factors. These are hand calculations with our assumptions shown, and real measurements will replace them.</a:t>
             </a:r>
           </a:p>
         </p:txBody>
@@ -24130,7 +24130,7 @@
           <a:lstStyle/>
           <a:p>
             <a:r>
-              <a:t>Electronics Architecture &amp; Pin Allocation</a:t>
+              <a:t>Electronics: Schematic Overview and Pin Map</a:t>
             </a:r>
           </a:p>
         </p:txBody>
@@ -24298,7 +24298,7 @@
                 </a:solidFill>
                 <a:latin typeface="Arial"/>
               </a:rPr>
-              <a:t>USB-C 5 V input</a:t>
+              <a:t>USB-C port</a:t>
             </a:r>
           </a:p>
           <a:p>
@@ -24314,7 +24314,7 @@
                 </a:solidFill>
                 <a:latin typeface="Arial"/>
               </a:rPr>
-              <a:t>charging + programming + log export</a:t>
+              <a:t>charging, programming, downloading logs</a:t>
             </a:r>
           </a:p>
         </p:txBody>
@@ -24411,7 +24411,7 @@
                 </a:solidFill>
                 <a:latin typeface="Arial"/>
               </a:rPr>
-              <a:t>MCP73831 charger</a:t>
+              <a:t>Charger (MCP73831)</a:t>
             </a:r>
           </a:p>
           <a:p>
@@ -24427,7 +24427,7 @@
                 </a:solidFill>
                 <a:latin typeface="Arial"/>
               </a:rPr>
-              <a:t>500 mA (PROG = 2 kΩ)</a:t>
+              <a:t>charges at 500 mA</a:t>
             </a:r>
           </a:p>
         </p:txBody>
@@ -24524,7 +24524,7 @@
                 </a:solidFill>
                 <a:latin typeface="Arial"/>
               </a:rPr>
-              <a:t>Protected 18650 cell</a:t>
+              <a:t>18650 battery</a:t>
             </a:r>
           </a:p>
           <a:p>
@@ -24540,7 +24540,7 @@
                 </a:solidFill>
                 <a:latin typeface="Arial"/>
               </a:rPr>
-              <a:t>PCM · polyfuse · voltage sense</a:t>
+              <a:t>built-in protection, fuse, level check</a:t>
             </a:r>
           </a:p>
         </p:txBody>
@@ -24673,7 +24673,7 @@
                 </a:solidFill>
                 <a:latin typeface="Arial"/>
               </a:rPr>
-              <a:t>AP2112K 3.3 V</a:t>
+              <a:t>3.3 V supply</a:t>
             </a:r>
           </a:p>
           <a:p>
@@ -24689,7 +24689,7 @@
                 </a:solidFill>
                 <a:latin typeface="Arial"/>
               </a:rPr>
-              <a:t>ESP32-C3, ADC, OLED</a:t>
+              <a:t>chip, sensors, screen</a:t>
             </a:r>
           </a:p>
         </p:txBody>
@@ -24750,7 +24750,7 @@
                 </a:solidFill>
                 <a:latin typeface="Arial"/>
               </a:rPr>
-              <a:t>MT3608 5 V</a:t>
+              <a:t>5 V supply</a:t>
             </a:r>
           </a:p>
           <a:p>
@@ -24766,7 +24766,7 @@
                 </a:solidFill>
                 <a:latin typeface="Arial"/>
               </a:rPr>
-              <a:t>pump, valves, UV-C, isolator</a:t>
+              <a:t>pump, valves, UV</a:t>
             </a:r>
           </a:p>
         </p:txBody>
@@ -24876,7 +24876,7 @@
                 </a:solidFill>
                 <a:latin typeface="Arial"/>
               </a:rPr>
-              <a:t>Wake: button press; deep sleep between cycles</a:t>
+              <a:t>Sleeps between uses; one button press wakes it up</a:t>
             </a:r>
           </a:p>
         </p:txBody>
@@ -24960,7 +24960,7 @@
                 </a:solidFill>
                 <a:latin typeface="Arial Black"/>
               </a:rPr>
-              <a:t>ESP32-C3 module</a:t>
+              <a:t>ESP32-C3</a:t>
             </a:r>
           </a:p>
           <a:p>
@@ -24977,7 +24977,7 @@
                 </a:solidFill>
                 <a:latin typeface="Arial"/>
               </a:rPr>
-              <a:t>RISC-V · Wi-Fi + Bluetooth LE</a:t>
+              <a:t>Wi-Fi and Bluetooth</a:t>
             </a:r>
           </a:p>
           <a:p>
@@ -24994,7 +24994,7 @@
                 </a:solidFill>
                 <a:latin typeface="Arial"/>
               </a:rPr>
-              <a:t>I²C</a:t>
+              <a:t>Sensor bus</a:t>
             </a:r>
             <a:r>
               <a:rPr sz="800" b="0" i="0">
@@ -25003,7 +25003,7 @@
                 </a:solidFill>
                 <a:latin typeface="Arial"/>
               </a:rPr>
-              <a:t> GPIO6 / 7</a:t>
+              <a:t> pins 6, 7</a:t>
             </a:r>
           </a:p>
           <a:p>
@@ -25020,7 +25020,7 @@
                 </a:solidFill>
                 <a:latin typeface="Arial"/>
               </a:rPr>
-              <a:t>1-Wire</a:t>
+              <a:t>Temperature</a:t>
             </a:r>
             <a:r>
               <a:rPr sz="800" b="0" i="0">
@@ -25029,7 +25029,7 @@
                 </a:solidFill>
                 <a:latin typeface="Arial"/>
               </a:rPr>
-              <a:t> GPIO21</a:t>
+              <a:t> pin 21</a:t>
             </a:r>
           </a:p>
           <a:p>
@@ -25046,7 +25046,7 @@
                 </a:solidFill>
                 <a:latin typeface="Arial"/>
               </a:rPr>
-              <a:t>Pump PWM</a:t>
+              <a:t>Pump</a:t>
             </a:r>
             <a:r>
               <a:rPr sz="800" b="0" i="0">
@@ -25055,7 +25055,7 @@
                 </a:solidFill>
                 <a:latin typeface="Arial"/>
               </a:rPr>
-              <a:t> GPIO10</a:t>
+              <a:t> pin 10</a:t>
             </a:r>
           </a:p>
           <a:p>
@@ -25072,7 +25072,7 @@
                 </a:solidFill>
                 <a:latin typeface="Arial"/>
               </a:rPr>
-              <a:t>V1 / V2</a:t>
+              <a:t>Valves</a:t>
             </a:r>
             <a:r>
               <a:rPr sz="800" b="0" i="0">
@@ -25081,7 +25081,7 @@
                 </a:solidFill>
                 <a:latin typeface="Arial"/>
               </a:rPr>
-              <a:t> GPIO4 / 5</a:t>
+              <a:t> pins 4, 5</a:t>
             </a:r>
           </a:p>
           <a:p>
@@ -25098,7 +25098,7 @@
                 </a:solidFill>
                 <a:latin typeface="Arial"/>
               </a:rPr>
-              <a:t>UV-C enable</a:t>
+              <a:t>UV light</a:t>
             </a:r>
             <a:r>
               <a:rPr sz="800" b="0" i="0">
@@ -25107,7 +25107,7 @@
                 </a:solidFill>
                 <a:latin typeface="Arial"/>
               </a:rPr>
-              <a:t> GPIO1</a:t>
+              <a:t> pin 1</a:t>
             </a:r>
           </a:p>
           <a:p>
@@ -25124,7 +25124,7 @@
                 </a:solidFill>
                 <a:latin typeface="Arial"/>
               </a:rPr>
-              <a:t>IR LED pulse</a:t>
+              <a:t>IR light</a:t>
             </a:r>
             <a:r>
               <a:rPr sz="800" b="0" i="0">
@@ -25133,7 +25133,7 @@
                 </a:solidFill>
                 <a:latin typeface="Arial"/>
               </a:rPr>
-              <a:t> GPIO0</a:t>
+              <a:t> pin 0</a:t>
             </a:r>
           </a:p>
           <a:p>
@@ -25150,7 +25150,7 @@
                 </a:solidFill>
                 <a:latin typeface="Arial"/>
               </a:rPr>
-              <a:t>EC power</a:t>
+              <a:t>TDS power</a:t>
             </a:r>
             <a:r>
               <a:rPr sz="800" b="0" i="0">
@@ -25159,7 +25159,7 @@
                 </a:solidFill>
                 <a:latin typeface="Arial"/>
               </a:rPr>
-              <a:t> GPIO3</a:t>
+              <a:t> pin 3</a:t>
             </a:r>
           </a:p>
           <a:p>
@@ -25176,7 +25176,7 @@
                 </a:solidFill>
                 <a:latin typeface="Arial"/>
               </a:rPr>
-              <a:t>Button / RGB</a:t>
+              <a:t>Button, lights</a:t>
             </a:r>
             <a:r>
               <a:rPr sz="800" b="0" i="0">
@@ -25185,7 +25185,7 @@
                 </a:solidFill>
                 <a:latin typeface="Arial"/>
               </a:rPr>
-              <a:t> GPIO9 / 20</a:t>
+              <a:t> pins 9, 20</a:t>
             </a:r>
           </a:p>
           <a:p>
@@ -25202,7 +25202,7 @@
                 </a:solidFill>
                 <a:latin typeface="Arial"/>
               </a:rPr>
-              <a:t>Moisture</a:t>
+              <a:t>Leak sensor</a:t>
             </a:r>
             <a:r>
               <a:rPr sz="800" b="0" i="0">
@@ -25211,7 +25211,7 @@
                 </a:solidFill>
                 <a:latin typeface="Arial"/>
               </a:rPr>
-              <a:t> GPIO2</a:t>
+              <a:t> pin 2</a:t>
             </a:r>
           </a:p>
           <a:p>
@@ -25228,7 +25228,7 @@
                 </a:solidFill>
                 <a:latin typeface="Arial"/>
               </a:rPr>
-              <a:t>USB D−/D+</a:t>
+              <a:t>USB</a:t>
             </a:r>
             <a:r>
               <a:rPr sz="800" b="0" i="0">
@@ -25237,7 +25237,7 @@
                 </a:solidFill>
                 <a:latin typeface="Arial"/>
               </a:rPr>
-              <a:t> GPIO18 / 19</a:t>
+              <a:t> pins 18, 19</a:t>
             </a:r>
           </a:p>
         </p:txBody>
@@ -25298,7 +25298,7 @@
                 </a:solidFill>
                 <a:latin typeface="Arial"/>
               </a:rPr>
-              <a:t>ADS1115 (0x48)</a:t>
+              <a:t>ADS1115 converter</a:t>
             </a:r>
           </a:p>
           <a:p>
@@ -25314,7 +25314,7 @@
                 </a:solidFill>
                 <a:latin typeface="Arial"/>
               </a:rPr>
-              <a:t>pH via DFR0504 · EC/TDS · turbidity TIA (MCP6001) · battery voltage</a:t>
+              <a:t>reads pH, TDS, cloudiness and battery level</a:t>
             </a:r>
           </a:p>
         </p:txBody>
@@ -25412,7 +25412,7 @@
                 </a:solidFill>
                 <a:latin typeface="Arial"/>
               </a:rPr>
-              <a:t>DS18B20 (1-Wire)</a:t>
+              <a:t>DS18B20</a:t>
             </a:r>
           </a:p>
           <a:p>
@@ -25428,7 +25428,7 @@
                 </a:solidFill>
                 <a:latin typeface="Arial"/>
               </a:rPr>
-              <a:t>in the sensing cell; temperature compensation</a:t>
+              <a:t>temperature, inside the test cell</a:t>
             </a:r>
           </a:p>
         </p:txBody>
@@ -25526,7 +25526,7 @@
                 </a:solidFill>
                 <a:latin typeface="Arial"/>
               </a:rPr>
-              <a:t>INA219 (0x40)</a:t>
+              <a:t>INA219</a:t>
             </a:r>
           </a:p>
           <a:p>
@@ -25542,7 +25542,7 @@
                 </a:solidFill>
                 <a:latin typeface="Arial"/>
               </a:rPr>
-              <a:t>actuator-rail current: clog and dry-intake detection</a:t>
+              <a:t>watches pump current to spot blockages or running dry</a:t>
             </a:r>
           </a:p>
         </p:txBody>
@@ -25640,7 +25640,7 @@
                 </a:solidFill>
                 <a:latin typeface="Arial"/>
               </a:rPr>
-              <a:t>0.91-inch OLED (0x3C)</a:t>
+              <a:t>Small OLED screen</a:t>
             </a:r>
           </a:p>
           <a:p>
@@ -25656,7 +25656,7 @@
                 </a:solidFill>
                 <a:latin typeface="Arial"/>
               </a:rPr>
-              <a:t>local result display on I²C</a:t>
+              <a:t>shows the result on the capsule</a:t>
             </a:r>
           </a:p>
         </p:txBody>
@@ -25754,7 +25754,7 @@
                 </a:solidFill>
                 <a:latin typeface="Arial"/>
               </a:rPr>
-              <a:t>Digital inputs</a:t>
+              <a:t>Simple inputs</a:t>
             </a:r>
           </a:p>
           <a:p>
@@ -25770,7 +25770,7 @@
                 </a:solidFill>
                 <a:latin typeface="Arial"/>
               </a:rPr>
-              <a:t>button · moisture traces in spine · cartridge-locked switch</a:t>
+              <a:t>button, leak sensor, cap-locked switch</a:t>
             </a:r>
           </a:p>
         </p:txBody>
@@ -25868,7 +25868,7 @@
                 </a:solidFill>
                 <a:latin typeface="Arial"/>
               </a:rPr>
-              <a:t>5-ch low-side MOSFET driver</a:t>
+              <a:t>Five electronic switches (MOSFETs)</a:t>
             </a:r>
           </a:p>
           <a:p>
@@ -25884,7 +25884,7 @@
                 </a:solidFill>
                 <a:latin typeface="Arial"/>
               </a:rPr>
-              <a:t>logic-level N-MOSFETs for 3.3 V gate drive · flyback diodes on pump and valves · UV-C constant-current driver enable</a:t>
+              <a:t>let the 3.3 V chip turn the pump, valves and lights on and off, with diodes to protect against voltage spikes</a:t>
             </a:r>
           </a:p>
         </p:txBody>
@@ -26018,7 +26018,7 @@
                 </a:solidFill>
                 <a:latin typeface="Arial"/>
               </a:rPr>
-              <a:t>Loads (5 V rail)</a:t>
+              <a:t>What they power (5 V)</a:t>
             </a:r>
           </a:p>
           <a:p>
@@ -26034,7 +26034,7 @@
                 </a:solidFill>
                 <a:latin typeface="Arial"/>
               </a:rPr>
-              <a:t>pump P1 · valves V1, V2 · UV-C LED (optional, interlocked) · IR LED</a:t>
+              <a:t>pump, two valves, UV-C light (only when the cap is locked), infrared light</a:t>
             </a:r>
           </a:p>
         </p:txBody>
@@ -26072,7 +26072,7 @@
                 </a:solidFill>
                 <a:latin typeface="Arial"/>
               </a:rPr>
-              <a:t>Logical block diagram. The full KiCad schematic (75 parts, ERC: 0 errors, 0 warnings) is in the project repository — see slide 13.</a:t>
+              <a:t>A simplified block view. Our full KiCad schematic has 75 parts and passes KiCad’s electrical check with no errors or warnings. It is in the repository (see slide 13).</a:t>
             </a:r>
           </a:p>
         </p:txBody>
@@ -26114,7 +26114,7 @@
                           </a:solidFill>
                           <a:latin typeface="Arial"/>
                         </a:rPr>
-                        <a:t>GPIO</a:t>
+                        <a:t>Pin</a:t>
                       </a:r>
                     </a:p>
                   </a:txBody>
@@ -26153,7 +26153,7 @@
                           </a:solidFill>
                           <a:latin typeface="Arial"/>
                         </a:rPr>
-                        <a:t>Function</a:t>
+                        <a:t>Used for</a:t>
                       </a:r>
                     </a:p>
                   </a:txBody>
@@ -26192,7 +26192,7 @@
                           </a:solidFill>
                           <a:latin typeface="Arial"/>
                         </a:rPr>
-                        <a:t>Design note</a:t>
+                        <a:t>Note</a:t>
                       </a:r>
                     </a:p>
                   </a:txBody>
@@ -26233,7 +26233,7 @@
                           </a:solidFill>
                           <a:latin typeface="Arial"/>
                         </a:rPr>
-                        <a:t>6 / 7</a:t>
+                        <a:t>6, 7</a:t>
                       </a:r>
                     </a:p>
                   </a:txBody>
@@ -26272,7 +26272,7 @@
                           </a:solidFill>
                           <a:latin typeface="Arial"/>
                         </a:rPr>
-                        <a:t>I²C SDA / SCL</a:t>
+                        <a:t>Sensor bus (I²C)</a:t>
                       </a:r>
                     </a:p>
                   </a:txBody>
@@ -26311,7 +26311,7 @@
                           </a:solidFill>
                           <a:latin typeface="Arial"/>
                         </a:rPr>
-                        <a:t>ADS1115, INA219, OLED</a:t>
+                        <a:t>Converter, current sensor, screen</a:t>
                       </a:r>
                     </a:p>
                   </a:txBody>
@@ -26391,7 +26391,7 @@
                           </a:solidFill>
                           <a:latin typeface="Arial"/>
                         </a:rPr>
-                        <a:t>1-Wire bus</a:t>
+                        <a:t>Temperature probe</a:t>
                       </a:r>
                     </a:p>
                   </a:txBody>
@@ -26430,7 +26430,7 @@
                           </a:solidFill>
                           <a:latin typeface="Arial"/>
                         </a:rPr>
-                        <a:t>DS18B20 in the cell</a:t>
+                        <a:t>Sits in the test cell</a:t>
                       </a:r>
                     </a:p>
                   </a:txBody>
@@ -26510,7 +26510,7 @@
                           </a:solidFill>
                           <a:latin typeface="Arial"/>
                         </a:rPr>
-                        <a:t>Pump P1</a:t>
+                        <a:t>Pump</a:t>
                       </a:r>
                     </a:p>
                   </a:txBody>
@@ -26549,7 +26549,7 @@
                           </a:solidFill>
                           <a:latin typeface="Arial"/>
                         </a:rPr>
-                        <a:t>LEDC PWM soft-start</a:t>
+                        <a:t>Starts gently</a:t>
                       </a:r>
                     </a:p>
                   </a:txBody>
@@ -26590,7 +26590,7 @@
                           </a:solidFill>
                           <a:latin typeface="Arial"/>
                         </a:rPr>
-                        <a:t>4 / 5</a:t>
+                        <a:t>4, 5</a:t>
                       </a:r>
                     </a:p>
                   </a:txBody>
@@ -26629,7 +26629,7 @@
                           </a:solidFill>
                           <a:latin typeface="Arial"/>
                         </a:rPr>
-                        <a:t>Valves V1 / V2</a:t>
+                        <a:t>Valves 1 and 2</a:t>
                       </a:r>
                     </a:p>
                   </a:txBody>
@@ -26668,7 +26668,7 @@
                           </a:solidFill>
                           <a:latin typeface="Arial"/>
                         </a:rPr>
-                        <a:t>De-energised = route to reject</a:t>
+                        <a:t>With no power, water goes to waste</a:t>
                       </a:r>
                     </a:p>
                   </a:txBody>
@@ -26748,7 +26748,7 @@
                           </a:solidFill>
                           <a:latin typeface="Arial"/>
                         </a:rPr>
-                        <a:t>UV-C enable</a:t>
+                        <a:t>UV light</a:t>
                       </a:r>
                     </a:p>
                   </a:txBody>
@@ -26787,7 +26787,7 @@
                           </a:solidFill>
                           <a:latin typeface="Arial"/>
                         </a:rPr>
-                        <a:t>Only with flow and cap locked</a:t>
+                        <a:t>Only with water flowing and cap locked</a:t>
                       </a:r>
                     </a:p>
                   </a:txBody>
@@ -26867,7 +26867,7 @@
                           </a:solidFill>
                           <a:latin typeface="Arial"/>
                         </a:rPr>
-                        <a:t>IR LED pulse</a:t>
+                        <a:t>Infrared light</a:t>
                       </a:r>
                     </a:p>
                   </a:txBody>
@@ -26906,7 +26906,7 @@
                           </a:solidFill>
                           <a:latin typeface="Arial"/>
                         </a:rPr>
-                        <a:t>Rejects ambient light</a:t>
+                        <a:t>Pulsed, to ignore room light</a:t>
                       </a:r>
                     </a:p>
                   </a:txBody>
@@ -26986,7 +26986,7 @@
                           </a:solidFill>
                           <a:latin typeface="Arial"/>
                         </a:rPr>
-                        <a:t>EC excitation power</a:t>
+                        <a:t>TDS board power</a:t>
                       </a:r>
                     </a:p>
                   </a:txBody>
@@ -27066,7 +27066,7 @@
                           </a:solidFill>
                           <a:latin typeface="Arial"/>
                         </a:rPr>
-                        <a:t>9 / 20</a:t>
+                        <a:t>9, 20</a:t>
                       </a:r>
                     </a:p>
                   </a:txBody>
@@ -27105,7 +27105,7 @@
                           </a:solidFill>
                           <a:latin typeface="Arial"/>
                         </a:rPr>
-                        <a:t>Button / RGB ring</a:t>
+                        <a:t>Button, light ring</a:t>
                       </a:r>
                     </a:p>
                   </a:txBody>
@@ -27144,7 +27144,7 @@
                           </a:solidFill>
                           <a:latin typeface="Arial"/>
                         </a:rPr>
-                        <a:t>GPIO9 is a strapping pin</a:t>
+                        <a:t>Pin 9 also sets boot mode</a:t>
                       </a:r>
                     </a:p>
                   </a:txBody>
@@ -27224,7 +27224,7 @@
                           </a:solidFill>
                           <a:latin typeface="Arial"/>
                         </a:rPr>
-                        <a:t>Moisture sense</a:t>
+                        <a:t>Leak sensor</a:t>
                       </a:r>
                     </a:p>
                   </a:txBody>
@@ -27263,7 +27263,7 @@
                           </a:solidFill>
                           <a:latin typeface="Arial"/>
                         </a:rPr>
-                        <a:t>Strapping pin, idles high</a:t>
+                        <a:t>Normally high</a:t>
                       </a:r>
                     </a:p>
                   </a:txBody>
@@ -27304,7 +27304,7 @@
                           </a:solidFill>
                           <a:latin typeface="Arial"/>
                         </a:rPr>
-                        <a:t>18 / 19</a:t>
+                        <a:t>18, 19</a:t>
                       </a:r>
                     </a:p>
                   </a:txBody>
@@ -27343,7 +27343,7 @@
                           </a:solidFill>
                           <a:latin typeface="Arial"/>
                         </a:rPr>
-                        <a:t>USB D− / D+</a:t>
+                        <a:t>USB data</a:t>
                       </a:r>
                     </a:p>
                   </a:txBody>
@@ -27382,7 +27382,7 @@
                           </a:solidFill>
                           <a:latin typeface="Arial"/>
                         </a:rPr>
-                        <a:t>Native USB via the USB-C port</a:t>
+                        <a:t>Through the USB-C port</a:t>
                       </a:r>
                     </a:p>
                   </a:txBody>
@@ -27446,7 +27446,7 @@
                 </a:solidFill>
                 <a:latin typeface="Arial"/>
               </a:rPr>
-              <a:t>Wet/dry separation:</a:t>
+              <a:t>Keeping water away:</a:t>
             </a:r>
             <a:r>
               <a:rPr sz="800" b="0" i="0">
@@ -27455,7 +27455,7 @@
                 </a:solidFill>
                 <a:latin typeface="Arial"/>
               </a:rPr>
-              <a:t> sensor leads pass through potted feed-throughs in the bulkhead; DFR0504 keeps pH sensor and MCU grounds separate.</a:t>
+              <a:t> sensor wires pass through sealed holes in the inner wall. The pH sensor runs on an isolated supply so it doesn’t pick up noise.</a:t>
             </a:r>
           </a:p>
           <a:p>
@@ -27472,7 +27472,7 @@
                 </a:solidFill>
                 <a:latin typeface="Arial"/>
               </a:rPr>
-              <a:t>Fail-safe routing:</a:t>
+              <a:t>Failing safe:</a:t>
             </a:r>
             <a:r>
               <a:rPr sz="800" b="0" i="0">
@@ -27481,7 +27481,7 @@
                 </a:solidFill>
                 <a:latin typeface="Arial"/>
               </a:rPr>
-              <a:t> with valves unpowered, water goes to the reject port — a fault can never dispense untested water.</a:t>
+              <a:t> if the valves lose power, water goes to the waste outlet. A fault can never pour untested water.</a:t>
             </a:r>
           </a:p>
         </p:txBody>
@@ -27543,7 +27543,7 @@
                 </a:solidFill>
                 <a:latin typeface="Arial"/>
               </a:rPr>
-              <a:t>Fault handling:</a:t>
+              <a:t>If something goes wrong:</a:t>
             </a:r>
             <a:r>
               <a:rPr sz="850" b="0" i="0">
@@ -27552,7 +27552,7 @@
                 </a:solidFill>
                 <a:latin typeface="Arial"/>
               </a:rPr>
-              <a:t> moisture in spine, dry intake, clog, invalid sensor, over-temperature or low battery → pump and UV-C off, valves to reject, red ring + OLED code, event logged.</a:t>
+              <a:t> a leak, running dry, a blockage, a bad sensor, overheating or a flat battery switches off the pump and UV, sends water to waste, and shows an error.</a:t>
             </a:r>
           </a:p>
         </p:txBody>
@@ -27620,7 +27620,7 @@
           <a:lstStyle/>
           <a:p>
             <a:r>
-              <a:t>Itemized Prototype Bill of Materials (Preliminary)</a:t>
+              <a:t>Bill of Materials: First Prototype</a:t>
             </a:r>
           </a:p>
         </p:txBody>
@@ -27773,7 +27773,7 @@
                           </a:solidFill>
                           <a:latin typeface="Arial"/>
                         </a:rPr>
-                        <a:t>Component</a:t>
+                        <a:t>Part</a:t>
                       </a:r>
                     </a:p>
                   </a:txBody>
@@ -27812,7 +27812,7 @@
                           </a:solidFill>
                           <a:latin typeface="Arial"/>
                         </a:rPr>
-                        <a:t>Part number / specification</a:t>
+                        <a:t>What exactly</a:t>
                       </a:r>
                     </a:p>
                   </a:txBody>
@@ -27890,7 +27890,7 @@
                           </a:solidFill>
                           <a:latin typeface="Arial"/>
                         </a:rPr>
-                        <a:t>Est. unit cost</a:t>
+                        <a:t>Unit cost</a:t>
                       </a:r>
                     </a:p>
                   </a:txBody>
@@ -27929,7 +27929,7 @@
                           </a:solidFill>
                           <a:latin typeface="Arial"/>
                         </a:rPr>
-                        <a:t>Est. total</a:t>
+                        <a:t>Total</a:t>
                       </a:r>
                     </a:p>
                   </a:txBody>
@@ -27968,7 +27968,7 @@
                           </a:solidFill>
                           <a:latin typeface="Arial"/>
                         </a:rPr>
-                        <a:t>Supplier / lead time</a:t>
+                        <a:t>Where from</a:t>
                       </a:r>
                     </a:p>
                   </a:txBody>
@@ -28007,7 +28007,7 @@
                           </a:solidFill>
                           <a:latin typeface="Arial"/>
                         </a:rPr>
-                        <a:t>Status / source</a:t>
+                        <a:t>Status</a:t>
                       </a:r>
                     </a:p>
                   </a:txBody>
@@ -28087,7 +28087,7 @@
                           </a:solidFill>
                           <a:latin typeface="Arial"/>
                         </a:rPr>
-                        <a:t>ESP32-C3 module: WROOM-02 (schematic v0.1) or MINI-1</a:t>
+                        <a:t>ESP32-C3 module (WROOM-02 now, MINI-1 later)</a:t>
                       </a:r>
                     </a:p>
                   </a:txBody>
@@ -28165,7 +28165,7 @@
                           </a:solidFill>
                           <a:latin typeface="Arial"/>
                         </a:rPr>
-                        <a:t>Quotation required</a:t>
+                        <a:t>Need a quote</a:t>
                       </a:r>
                     </a:p>
                   </a:txBody>
@@ -28243,7 +28243,7 @@
                           </a:solidFill>
                           <a:latin typeface="Arial"/>
                         </a:rPr>
-                        <a:t>Local distributor; lead time to confirm</a:t>
+                        <a:t>Local electronics shop</a:t>
                       </a:r>
                     </a:p>
                   </a:txBody>
@@ -28282,7 +28282,7 @@
                           </a:solidFill>
                           <a:latin typeface="Arial"/>
                         </a:rPr>
-                        <a:t>Proposed</a:t>
+                        <a:t>Chosen, not bought</a:t>
                       </a:r>
                     </a:p>
                   </a:txBody>
@@ -28323,7 +28323,7 @@
                           </a:solidFill>
                           <a:latin typeface="Arial"/>
                         </a:rPr>
-                        <a:t>pH front-end kit</a:t>
+                        <a:t>pH kit</a:t>
                       </a:r>
                     </a:p>
                   </a:txBody>
@@ -28362,7 +28362,7 @@
                           </a:solidFill>
                           <a:latin typeface="Arial"/>
                         </a:rPr>
-                        <a:t>DFRobot SEN0161-V2 (board, bench probe, buffers)</a:t>
+                        <a:t>DFRobot SEN0161-V2 (board, test probe, buffers)</a:t>
                       </a:r>
                     </a:p>
                   </a:txBody>
@@ -28518,7 +28518,7 @@
                           </a:solidFill>
                           <a:latin typeface="Arial"/>
                         </a:rPr>
-                        <a:t>DFRobot; lead time to confirm</a:t>
+                        <a:t>DFRobot</a:t>
                       </a:r>
                     </a:p>
                   </a:txBody>
@@ -28557,7 +28557,7 @@
                           </a:solidFill>
                           <a:latin typeface="Arial"/>
                         </a:rPr>
-                        <a:t>List price, 24 Oct 2026</a:t>
+                        <a:t>Listed price, 24 Oct 2026</a:t>
                       </a:r>
                     </a:p>
                   </a:txBody>
@@ -28598,7 +28598,7 @@
                           </a:solidFill>
                           <a:latin typeface="Arial"/>
                         </a:rPr>
-                        <a:t>Mini pH electrode</a:t>
+                        <a:t>Small pH probe</a:t>
                       </a:r>
                     </a:p>
                   </a:txBody>
@@ -28637,7 +28637,7 @@
                           </a:solidFill>
                           <a:latin typeface="Arial"/>
                         </a:rPr>
-                        <a:t>≤ 8 mm combination electrode for the capsule cell</a:t>
+                        <a:t>Under 8 mm wide, to fit our test cell</a:t>
                       </a:r>
                     </a:p>
                   </a:txBody>
@@ -28715,7 +28715,7 @@
                           </a:solidFill>
                           <a:latin typeface="Arial"/>
                         </a:rPr>
-                        <a:t>Quotation required</a:t>
+                        <a:t>Need a quote</a:t>
                       </a:r>
                     </a:p>
                   </a:txBody>
@@ -28793,7 +28793,7 @@
                           </a:solidFill>
                           <a:latin typeface="Arial"/>
                         </a:rPr>
-                        <a:t>Supplier to identify</a:t>
+                        <a:t>Still looking</a:t>
                       </a:r>
                     </a:p>
                   </a:txBody>
@@ -28832,7 +28832,7 @@
                           </a:solidFill>
                           <a:latin typeface="Arial"/>
                         </a:rPr>
-                        <a:t>Critical item</a:t>
+                        <a:t>Most important to find</a:t>
                       </a:r>
                     </a:p>
                   </a:txBody>
@@ -28873,7 +28873,7 @@
                           </a:solidFill>
                           <a:latin typeface="Arial"/>
                         </a:rPr>
-                        <a:t>EC / TDS sensor</a:t>
+                        <a:t>TDS sensor</a:t>
                       </a:r>
                     </a:p>
                   </a:txBody>
@@ -28912,7 +28912,7 @@
                           </a:solidFill>
                           <a:latin typeface="Arial"/>
                         </a:rPr>
-                        <a:t>DFRobot SEN0244 (probe pins adapted into the cell)</a:t>
+                        <a:t>DFRobot SEN0244, pins fitted into our cell</a:t>
                       </a:r>
                     </a:p>
                   </a:txBody>
@@ -29107,7 +29107,7 @@
                           </a:solidFill>
                           <a:latin typeface="Arial"/>
                         </a:rPr>
-                        <a:t>List price, 24 Oct 2026</a:t>
+                        <a:t>Listed price, 24 Oct 2026</a:t>
                       </a:r>
                     </a:p>
                   </a:txBody>
@@ -29148,7 +29148,7 @@
                           </a:solidFill>
                           <a:latin typeface="Arial"/>
                         </a:rPr>
-                        <a:t>Temperature sensor</a:t>
+                        <a:t>Temperature</a:t>
                       </a:r>
                     </a:p>
                   </a:txBody>
@@ -29382,7 +29382,7 @@
                           </a:solidFill>
                           <a:latin typeface="Arial"/>
                         </a:rPr>
-                        <a:t>List price, 24 Oct 2026</a:t>
+                        <a:t>Listed price, 24 Oct 2026</a:t>
                       </a:r>
                     </a:p>
                   </a:txBody>
@@ -29618,7 +29618,7 @@
                           </a:solidFill>
                           <a:latin typeface="Arial"/>
                         </a:rPr>
-                        <a:t>DFRobot; stock to confirm</a:t>
+                        <a:t>DFRobot (check stock)</a:t>
                       </a:r>
                     </a:p>
                   </a:txBody>
@@ -29657,7 +29657,7 @@
                           </a:solidFill>
                           <a:latin typeface="Arial"/>
                         </a:rPr>
-                        <a:t>List price, 24 Oct 2026</a:t>
+                        <a:t>Listed price, 24 Oct 2026</a:t>
                       </a:r>
                     </a:p>
                   </a:txBody>
@@ -29698,7 +29698,7 @@
                           </a:solidFill>
                           <a:latin typeface="Arial"/>
                         </a:rPr>
-                        <a:t>Turbidity</a:t>
+                        <a:t>Cloudiness sensor</a:t>
                       </a:r>
                     </a:p>
                   </a:txBody>
@@ -29737,7 +29737,7 @@
                           </a:solidFill>
                           <a:latin typeface="Arial"/>
                         </a:rPr>
-                        <a:t>IR LED + photodiode + amplifier (custom); DFRobot SEN0189 as bench reference</a:t>
+                        <a:t>Our own IR LED and light sensor; DFRobot SEN0189 to compare against</a:t>
                       </a:r>
                     </a:p>
                   </a:txBody>
@@ -29893,7 +29893,7 @@
                           </a:solidFill>
                           <a:latin typeface="Arial"/>
                         </a:rPr>
-                        <a:t>DFRobot / local</a:t>
+                        <a:t>DFRobot and local</a:t>
                       </a:r>
                     </a:p>
                   </a:txBody>
@@ -29932,7 +29932,7 @@
                           </a:solidFill>
                           <a:latin typeface="Arial"/>
                         </a:rPr>
-                        <a:t>Reference priced; custom quote</a:t>
+                        <a:t>Reference priced</a:t>
                       </a:r>
                     </a:p>
                   </a:txBody>
@@ -29973,7 +29973,7 @@
                           </a:solidFill>
                           <a:latin typeface="Arial"/>
                         </a:rPr>
-                        <a:t>ADC &amp; monitoring</a:t>
+                        <a:t>Measurement chips</a:t>
                       </a:r>
                     </a:p>
                   </a:txBody>
@@ -30012,7 +30012,7 @@
                           </a:solidFill>
                           <a:latin typeface="Arial"/>
                         </a:rPr>
-                        <a:t>ADS1115; INA219 current sensor; MCP6001 TIA; battery divider</a:t>
+                        <a:t>ADS1115, INA219, MCP6001, battery level resistors</a:t>
                       </a:r>
                     </a:p>
                   </a:txBody>
@@ -30090,7 +30090,7 @@
                           </a:solidFill>
                           <a:latin typeface="Arial"/>
                         </a:rPr>
-                        <a:t>Quotation required</a:t>
+                        <a:t>Need a quote</a:t>
                       </a:r>
                     </a:p>
                   </a:txBody>
@@ -30168,7 +30168,7 @@
                           </a:solidFill>
                           <a:latin typeface="Arial"/>
                         </a:rPr>
-                        <a:t>Local distributor</a:t>
+                        <a:t>Local electronics shop</a:t>
                       </a:r>
                     </a:p>
                   </a:txBody>
@@ -30207,7 +30207,7 @@
                           </a:solidFill>
                           <a:latin typeface="Arial"/>
                         </a:rPr>
-                        <a:t>Proposed</a:t>
+                        <a:t>Chosen, not bought</a:t>
                       </a:r>
                     </a:p>
                   </a:txBody>
@@ -30287,7 +30287,7 @@
                           </a:solidFill>
                           <a:latin typeface="Arial"/>
                         </a:rPr>
-                        <a:t>5–6 V micro diaphragm, self-priming, food-contact wetted parts</a:t>
+                        <a:t>Small 5–6 V self-priming diaphragm pump, food-safe inside</a:t>
                       </a:r>
                     </a:p>
                   </a:txBody>
@@ -30365,7 +30365,7 @@
                           </a:solidFill>
                           <a:latin typeface="Arial"/>
                         </a:rPr>
-                        <a:t>Quotation required</a:t>
+                        <a:t>Need a quote</a:t>
                       </a:r>
                     </a:p>
                   </a:txBody>
@@ -30443,7 +30443,7 @@
                           </a:solidFill>
                           <a:latin typeface="Arial"/>
                         </a:rPr>
-                        <a:t>Supplier to identify</a:t>
+                        <a:t>Still looking</a:t>
                       </a:r>
                     </a:p>
                   </a:txBody>
@@ -30482,7 +30482,7 @@
                           </a:solidFill>
                           <a:latin typeface="Arial"/>
                         </a:rPr>
-                        <a:t>Proposed</a:t>
+                        <a:t>Chosen, not bought</a:t>
                       </a:r>
                     </a:p>
                   </a:txBody>
@@ -30562,7 +30562,7 @@
                           </a:solidFill>
                           <a:latin typeface="Arial"/>
                         </a:rPr>
-                        <a:t>Micro 3-way solenoid valve, 5–6 V</a:t>
+                        <a:t>Small 3-way valves, 5–6 V</a:t>
                       </a:r>
                     </a:p>
                   </a:txBody>
@@ -30640,7 +30640,7 @@
                           </a:solidFill>
                           <a:latin typeface="Arial"/>
                         </a:rPr>
-                        <a:t>Quotation required</a:t>
+                        <a:t>Need a quote</a:t>
                       </a:r>
                     </a:p>
                   </a:txBody>
@@ -30718,7 +30718,7 @@
                           </a:solidFill>
                           <a:latin typeface="Arial"/>
                         </a:rPr>
-                        <a:t>Supplier to identify</a:t>
+                        <a:t>Still looking</a:t>
                       </a:r>
                     </a:p>
                   </a:txBody>
@@ -30757,7 +30757,7 @@
                           </a:solidFill>
                           <a:latin typeface="Arial"/>
                         </a:rPr>
-                        <a:t>Proposed</a:t>
+                        <a:t>Chosen, not bought</a:t>
                       </a:r>
                     </a:p>
                   </a:txBody>
@@ -30798,7 +30798,7 @@
                           </a:solidFill>
                           <a:latin typeface="Arial"/>
                         </a:rPr>
-                        <a:t>Cartridge</a:t>
+                        <a:t>Filter cartridge</a:t>
                       </a:r>
                     </a:p>
                   </a:txBody>
@@ -30837,7 +30837,7 @@
                           </a:solidFill>
                           <a:latin typeface="Arial"/>
                         </a:rPr>
-                        <a:t>Twist-lock carbon + hollow-fibre UF module; 40 µm intake mesh</a:t>
+                        <a:t>Twist-off carbon and hollow-fibre membrane, plus a 40 µm mesh</a:t>
                       </a:r>
                     </a:p>
                   </a:txBody>
@@ -30915,7 +30915,7 @@
                           </a:solidFill>
                           <a:latin typeface="Arial"/>
                         </a:rPr>
-                        <a:t>Quotation required</a:t>
+                        <a:t>Need a quote</a:t>
                       </a:r>
                     </a:p>
                   </a:txBody>
@@ -30993,7 +30993,7 @@
                           </a:solidFill>
                           <a:latin typeface="Arial"/>
                         </a:rPr>
-                        <a:t>Membrane / filter supplier</a:t>
+                        <a:t>Filter supplier</a:t>
                       </a:r>
                     </a:p>
                   </a:txBody>
@@ -31032,7 +31032,7 @@
                           </a:solidFill>
                           <a:latin typeface="Arial"/>
                         </a:rPr>
-                        <a:t>Proposed</a:t>
+                        <a:t>Chosen, not bought</a:t>
                       </a:r>
                     </a:p>
                   </a:txBody>
@@ -31073,7 +31073,7 @@
                           </a:solidFill>
                           <a:latin typeface="Arial"/>
                         </a:rPr>
-                        <a:t>UV-C module</a:t>
+                        <a:t>UV-C light</a:t>
                       </a:r>
                     </a:p>
                   </a:txBody>
@@ -31112,7 +31112,7 @@
                           </a:solidFill>
                           <a:latin typeface="Arial"/>
                         </a:rPr>
-                        <a:t>UV-C LED, constant-current driver, quartz window</a:t>
+                        <a:t>UV-C LED, driver and quartz window</a:t>
                       </a:r>
                     </a:p>
                   </a:txBody>
@@ -31190,7 +31190,7 @@
                           </a:solidFill>
                           <a:latin typeface="Arial"/>
                         </a:rPr>
-                        <a:t>Quotation required</a:t>
+                        <a:t>Need a quote</a:t>
                       </a:r>
                     </a:p>
                   </a:txBody>
@@ -31268,7 +31268,7 @@
                           </a:solidFill>
                           <a:latin typeface="Arial"/>
                         </a:rPr>
-                        <a:t>Supplier to identify</a:t>
+                        <a:t>Still looking</a:t>
                       </a:r>
                     </a:p>
                   </a:txBody>
@@ -31307,7 +31307,7 @@
                           </a:solidFill>
                           <a:latin typeface="Arial"/>
                         </a:rPr>
-                        <a:t>Decision in Month 1</a:t>
+                        <a:t>We decide in Month 1</a:t>
                       </a:r>
                     </a:p>
                   </a:txBody>
@@ -31387,7 +31387,7 @@
                           </a:solidFill>
                           <a:latin typeface="Arial"/>
                         </a:rPr>
-                        <a:t>Protected 18650; MCP73831; AP2112K-3.3; MT3608; polyfuse</a:t>
+                        <a:t>18650 battery, MCP73831 charger, 3.3 V and 5 V supplies, fuse</a:t>
                       </a:r>
                     </a:p>
                   </a:txBody>
@@ -31465,7 +31465,7 @@
                           </a:solidFill>
                           <a:latin typeface="Arial"/>
                         </a:rPr>
-                        <a:t>Quotation required</a:t>
+                        <a:t>Need a quote</a:t>
                       </a:r>
                     </a:p>
                   </a:txBody>
@@ -31543,7 +31543,7 @@
                           </a:solidFill>
                           <a:latin typeface="Arial"/>
                         </a:rPr>
-                        <a:t>Local distributor</a:t>
+                        <a:t>Local electronics shop</a:t>
                       </a:r>
                     </a:p>
                   </a:txBody>
@@ -31582,7 +31582,7 @@
                           </a:solidFill>
                           <a:latin typeface="Arial"/>
                         </a:rPr>
-                        <a:t>Proposed</a:t>
+                        <a:t>Chosen, not bought</a:t>
                       </a:r>
                     </a:p>
                   </a:txBody>
@@ -31623,7 +31623,7 @@
                           </a:solidFill>
                           <a:latin typeface="Arial"/>
                         </a:rPr>
-                        <a:t>Drivers &amp; HMI</a:t>
+                        <a:t>Switches and display</a:t>
                       </a:r>
                     </a:p>
                   </a:txBody>
@@ -31662,7 +31662,7 @@
                           </a:solidFill>
                           <a:latin typeface="Arial"/>
                         </a:rPr>
-                        <a:t>Logic-level MOSFETs, flyback diodes; 0.91-inch OLED, RGB ring, button</a:t>
+                        <a:t>MOSFETs and diodes; small OLED, light ring, button</a:t>
                       </a:r>
                     </a:p>
                   </a:txBody>
@@ -31740,7 +31740,7 @@
                           </a:solidFill>
                           <a:latin typeface="Arial"/>
                         </a:rPr>
-                        <a:t>Quotation required</a:t>
+                        <a:t>Need a quote</a:t>
                       </a:r>
                     </a:p>
                   </a:txBody>
@@ -31818,7 +31818,7 @@
                           </a:solidFill>
                           <a:latin typeface="Arial"/>
                         </a:rPr>
-                        <a:t>Local distributor</a:t>
+                        <a:t>Local electronics shop</a:t>
                       </a:r>
                     </a:p>
                   </a:txBody>
@@ -31857,7 +31857,7 @@
                           </a:solidFill>
                           <a:latin typeface="Arial"/>
                         </a:rPr>
-                        <a:t>Proposed</a:t>
+                        <a:t>Chosen, not bought</a:t>
                       </a:r>
                     </a:p>
                   </a:txBody>
@@ -31898,7 +31898,7 @@
                           </a:solidFill>
                           <a:latin typeface="Arial"/>
                         </a:rPr>
-                        <a:t>Mechanical</a:t>
+                        <a:t>Body and plumbing</a:t>
                       </a:r>
                     </a:p>
                   </a:txBody>
@@ -31937,7 +31937,7 @@
                           </a:solidFill>
                           <a:latin typeface="Arial"/>
                         </a:rPr>
-                        <a:t>PETG shell (3D-printed), PMMA cell, silicone tubing, O-rings, grip sleeve</a:t>
+                        <a:t>PETG print, acrylic cell, silicone tube, O-rings, grip</a:t>
                       </a:r>
                     </a:p>
                   </a:txBody>
@@ -32015,7 +32015,7 @@
                           </a:solidFill>
                           <a:latin typeface="Arial"/>
                         </a:rPr>
-                        <a:t>Quotation required</a:t>
+                        <a:t>Need a quote</a:t>
                       </a:r>
                     </a:p>
                   </a:txBody>
@@ -32093,7 +32093,7 @@
                           </a:solidFill>
                           <a:latin typeface="Arial"/>
                         </a:rPr>
-                        <a:t>In-house printing; materials</a:t>
+                        <a:t>We print it ourselves</a:t>
                       </a:r>
                     </a:p>
                   </a:txBody>
@@ -32132,7 +32132,7 @@
                           </a:solidFill>
                           <a:latin typeface="Arial"/>
                         </a:rPr>
-                        <a:t>Proposed</a:t>
+                        <a:t>Chosen, not bought</a:t>
                       </a:r>
                     </a:p>
                   </a:txBody>
@@ -32173,7 +32173,7 @@
                           </a:solidFill>
                           <a:latin typeface="Arial"/>
                         </a:rPr>
-                        <a:t>Sourced subtotal</a:t>
+                        <a:t>Priced so far</a:t>
                       </a:r>
                     </a:p>
                   </a:txBody>
@@ -32212,7 +32212,7 @@
                           </a:solidFill>
                           <a:latin typeface="Arial"/>
                         </a:rPr>
-                        <a:t>Items with published list prices only (5 lines)</a:t>
+                        <a:t>Only the 5 parts with a public price</a:t>
                       </a:r>
                     </a:p>
                   </a:txBody>
@@ -32350,7 +32350,7 @@
                           </a:solidFill>
                           <a:latin typeface="Arial"/>
                         </a:rPr>
-                        <a:t>Excl. shipping, duties, GST</a:t>
+                        <a:t>Before shipping and taxes</a:t>
                       </a:r>
                     </a:p>
                   </a:txBody>
@@ -32389,7 +32389,7 @@
                           </a:solidFill>
                           <a:latin typeface="Arial"/>
                         </a:rPr>
-                        <a:t>Partial — not a total</a:t>
+                        <a:t>Not the full cost</a:t>
                       </a:r>
                     </a:p>
                   </a:txBody>
@@ -32477,7 +32477,7 @@
                 </a:solidFill>
                 <a:latin typeface="Arial"/>
               </a:rPr>
-              <a:t>Procurement status:</a:t>
+              <a:t>Where we stand:</a:t>
             </a:r>
             <a:r>
               <a:rPr sz="850" b="0" i="0">
@@ -32486,7 +32486,7 @@
                 </a:solidFill>
                 <a:latin typeface="Arial"/>
               </a:rPr>
-              <a:t> complete prototype budget cannot be stated until quotations are obtained for all “Quotation required” lines. Every selection is proposed and needs final team approval.</a:t>
+              <a:t> we can’t give a full budget until we get quotes for the remaining parts. Every choice here still needs the whole team’s sign-off.</a:t>
             </a:r>
           </a:p>
         </p:txBody>
@@ -32554,7 +32554,7 @@
           <a:lstStyle/>
           <a:p>
             <a:r>
-              <a:t>Maker Journey: Stage 1 to Stage 2 Progression</a:t>
+              <a:t>Maker Journey: From Stage 1 Idea to Stage 2 Design</a:t>
             </a:r>
           </a:p>
         </p:txBody>
@@ -32793,7 +32793,7 @@
                 </a:solidFill>
                 <a:latin typeface="Arial"/>
               </a:rPr>
-              <a:t>Closed-loop concept defined</a:t>
+              <a:t>Came up with the loop idea</a:t>
             </a:r>
           </a:p>
         </p:txBody>
@@ -32890,7 +32890,7 @@
                 </a:solidFill>
                 <a:latin typeface="Arial"/>
               </a:rPr>
-              <a:t>Pocket-capsule water path selected</a:t>
+              <a:t>Chose a pocket-size water path</a:t>
             </a:r>
           </a:p>
         </p:txBody>
@@ -32987,7 +32987,7 @@
                 </a:solidFill>
                 <a:latin typeface="Arial"/>
               </a:rPr>
-              <a:t>ESP32-C3 integration planned</a:t>
+              <a:t>Planned the ESP32-C3 setup</a:t>
             </a:r>
           </a:p>
         </p:txBody>
@@ -33084,7 +33084,7 @@
                 </a:solidFill>
                 <a:latin typeface="Arial"/>
               </a:rPr>
-              <a:t>Sensors &amp; cartridge selected</a:t>
+              <a:t>Picked sensors and filter</a:t>
             </a:r>
           </a:p>
         </p:txBody>
@@ -33181,7 +33181,7 @@
                 </a:solidFill>
                 <a:latin typeface="Arial"/>
               </a:rPr>
-              <a:t>CAD model &amp; KiCad schematic created</a:t>
+              <a:t>Made the CAD model and schematic</a:t>
             </a:r>
           </a:p>
         </p:txBody>
@@ -33278,7 +33278,7 @@
                 </a:solidFill>
                 <a:latin typeface="Arial"/>
               </a:rPr>
-              <a:t>Pump &amp; valve control implemented</a:t>
+              <a:t>Code the pump and valves</a:t>
             </a:r>
           </a:p>
         </p:txBody>
@@ -33375,7 +33375,7 @@
                 </a:solidFill>
                 <a:latin typeface="Arial"/>
               </a:rPr>
-              <a:t>Measurement &amp; comparison logic</a:t>
+              <a:t>Code the test-and-compare logic</a:t>
             </a:r>
           </a:p>
         </p:txBody>
@@ -33472,7 +33472,7 @@
                 </a:solidFill>
                 <a:latin typeface="Arial"/>
               </a:rPr>
-              <a:t>Capsule prototype assembled</a:t>
+              <a:t>Build the first capsule</a:t>
             </a:r>
           </a:p>
         </p:txBody>
@@ -33569,7 +33569,7 @@
                 </a:solidFill>
                 <a:latin typeface="Arial"/>
               </a:rPr>
-              <a:t>Tested with varied water samples</a:t>
+              <a:t>Test it with real water</a:t>
             </a:r>
           </a:p>
         </p:txBody>
@@ -33583,7 +33583,7 @@
         <p:spPr>
           <a:xfrm>
             <a:off x="533095" y="2395728"/>
-            <a:ext cx="2880360" cy="182880"/>
+            <a:ext cx="731520" cy="182880"/>
           </a:xfrm>
           <a:prstGeom prst="roundRect">
             <a:avLst>
@@ -33628,7 +33628,7 @@
                 </a:solidFill>
                 <a:latin typeface="Arial"/>
               </a:rPr>
-              <a:t>Completed — Stage 1 concept and Stage 2 design files</a:t>
+              <a:t>Done</a:t>
             </a:r>
           </a:p>
         </p:txBody>
@@ -33641,8 +33641,8 @@
         </p:nvSpPr>
         <p:spPr>
           <a:xfrm>
-            <a:off x="3596335" y="2395728"/>
-            <a:ext cx="4251960" cy="182880"/>
+            <a:off x="1447495" y="2395728"/>
+            <a:ext cx="2560320" cy="182880"/>
           </a:xfrm>
           <a:prstGeom prst="roundRect">
             <a:avLst>
@@ -33687,7 +33687,7 @@
                 </a:solidFill>
                 <a:latin typeface="Arial"/>
               </a:rPr>
-              <a:t>Design proposed in this Stage 2 document — team approval required</a:t>
+              <a:t>Designed on paper, waiting for team sign-off</a:t>
             </a:r>
           </a:p>
         </p:txBody>
@@ -33700,8 +33700,8 @@
         </p:nvSpPr>
         <p:spPr>
           <a:xfrm>
-            <a:off x="8031175" y="2395728"/>
-            <a:ext cx="2651760" cy="182880"/>
+            <a:off x="4190695" y="2395728"/>
+            <a:ext cx="1920240" cy="182880"/>
           </a:xfrm>
           <a:prstGeom prst="roundRect">
             <a:avLst>
@@ -33746,7 +33746,7 @@
                 </a:solidFill>
                 <a:latin typeface="Arial"/>
               </a:rPr>
-              <a:t>Planned — Months 1–4 (not started)</a:t>
+              <a:t>Still to do, Months 1 to 4</a:t>
             </a:r>
           </a:p>
         </p:txBody>
@@ -33854,7 +33854,7 @@
                 </a:solidFill>
                 <a:latin typeface="Arial"/>
               </a:rPr>
-              <a:t>Stage 1 → Stage 2 engineering refinements (proposed here)</a:t>
+              <a:t>How the idea grew from Stage 1</a:t>
             </a:r>
           </a:p>
         </p:txBody>
@@ -33897,7 +33897,7 @@
                 </a:solidFill>
                 <a:latin typeface="Arial"/>
               </a:rPr>
-              <a:t>Form factor:</a:t>
+              <a:t>Size:</a:t>
             </a:r>
             <a:r>
               <a:rPr sz="1000" b="0" i="0">
@@ -33906,7 +33906,7 @@
                 </a:solidFill>
                 <a:latin typeface="Arial"/>
               </a:rPr>
-              <a:t> “compact prototype” → pocket-size capsule with a sealed dry spine and a twist-lock cartridge.</a:t>
+              <a:t> “a compact prototype” became a pocket capsule, with the electronics sealed away from the water and a twist-off filter.</a:t>
             </a:r>
           </a:p>
           <a:p>
@@ -33928,7 +33928,7 @@
                 </a:solidFill>
                 <a:latin typeface="Arial"/>
               </a:rPr>
-              <a:t>Verification:</a:t>
+              <a:t>Checking:</a:t>
             </a:r>
             <a:r>
               <a:rPr sz="1000" b="0" i="0">
@@ -33937,7 +33937,7 @@
                 </a:solidFill>
                 <a:latin typeface="Arial"/>
               </a:rPr>
-              <a:t> “second sensing chamber” → one shared cell measured twice (M1, M2), removing inter-sensor offset.</a:t>
+              <a:t> instead of two separate test chambers, one cell tests the water twice, so both readings come from the same sensors.</a:t>
             </a:r>
           </a:p>
           <a:p>
@@ -33959,7 +33959,7 @@
                 </a:solidFill>
                 <a:latin typeface="Arial"/>
               </a:rPr>
-              <a:t>Adaptive purification:</a:t>
+              <a:t>Adapting:</a:t>
             </a:r>
             <a:r>
               <a:rPr sz="1000" b="0" i="0">
@@ -33968,7 +33968,7 @@
                 </a:solidFill>
                 <a:latin typeface="Arial"/>
               </a:rPr>
-              <a:t> flow / contact time, UV-C dose, second-pass prompt and cartridge advice set from M1.</a:t>
+              <a:t> the first test sets the flow speed and UV dose, and decides whether to suggest a second run or a new filter.</a:t>
             </a:r>
           </a:p>
           <a:p>
@@ -33990,7 +33990,7 @@
                 </a:solidFill>
                 <a:latin typeface="Arial"/>
               </a:rPr>
-              <a:t>Verify before dispensing:</a:t>
+              <a:t>Pour only if it passes:</a:t>
             </a:r>
             <a:r>
               <a:rPr sz="1000" b="0" i="0">
@@ -33999,7 +33999,7 @@
                 </a:solidFill>
                 <a:latin typeface="Arial"/>
               </a:rPr>
-              <a:t> water is released only after M2 passes; failures go to the reject port.</a:t>
+              <a:t> water leaves the spout only after the second test; anything else goes to the waste outlet.</a:t>
             </a:r>
           </a:p>
           <a:p>
@@ -34021,7 +34021,7 @@
                 </a:solidFill>
                 <a:latin typeface="Arial"/>
               </a:rPr>
-              <a:t>Safety &amp; honesty:</a:t>
+              <a:t>Safety and honesty:</a:t>
             </a:r>
             <a:r>
               <a:rPr sz="1000" b="0" i="0">
@@ -34030,7 +34030,7 @@
                 </a:solidFill>
                 <a:latin typeface="Arial"/>
               </a:rPr>
-              <a:t> moisture, dry-intake, clog and battery protection; warnings when TDS or pH cannot be changed by the cartridge.</a:t>
+              <a:t> leak, dry-run, blockage and battery protection, plus a clear warning when the filter can’t fix TDS or pH.</a:t>
             </a:r>
           </a:p>
         </p:txBody>
@@ -34138,7 +34138,7 @@
                 </a:solidFill>
                 <a:latin typeface="Arial"/>
               </a:rPr>
-              <a:t>Current evidence status</a:t>
+              <a:t>Where we honestly are</a:t>
             </a:r>
           </a:p>
         </p:txBody>
@@ -34181,7 +34181,7 @@
                 </a:solidFill>
                 <a:latin typeface="Arial"/>
               </a:rPr>
-              <a:t>The Stage 1 file is a proposal and implementation plan.</a:t>
+              <a:t>Stage 1 was a proposal and a plan.</a:t>
             </a:r>
           </a:p>
           <a:p>
@@ -34203,7 +34203,7 @@
                 </a:solidFill>
                 <a:latin typeface="Arial"/>
               </a:rPr>
-              <a:t>Native FreeCAD model and KiCad schematic (ERC clean) created 25 Oct 2026 with AI assistance; team review pending.</a:t>
+              <a:t>On 25 Oct 2026 we made the FreeCAD model and the KiCad schematic (which passes its electrical check). We used AI tools to help, and our team will go through both.</a:t>
             </a:r>
           </a:p>
           <a:p>
@@ -34225,7 +34225,7 @@
                 </a:solidFill>
                 <a:latin typeface="Arial"/>
               </a:rPr>
-              <a:t>Public repository holds every design file; fabrication photographs and test logs do not exist yet.</a:t>
+              <a:t>All the design files are in our public repository. There are no build photos or test logs yet.</a:t>
             </a:r>
           </a:p>
           <a:p>
@@ -34247,7 +34247,7 @@
                 </a:solidFill>
                 <a:latin typeface="Arial"/>
               </a:rPr>
-              <a:t>Milestones 6–9 (control code, logic, assembly, testing) have not started.</a:t>
+              <a:t>Steps 6 to 9 (code, build and testing) haven’t started.</a:t>
             </a:r>
           </a:p>
         </p:txBody>
@@ -34309,7 +34309,7 @@
                 </a:solidFill>
                 <a:latin typeface="Arial"/>
               </a:rPr>
-              <a:t>Progress claim:</a:t>
+              <a:t>Where we stand:</a:t>
             </a:r>
             <a:r>
               <a:rPr sz="850" b="0" i="0">
@@ -34318,7 +34318,7 @@
                 </a:solidFill>
                 <a:latin typeface="Arial"/>
               </a:rPr>
-              <a:t> design files exist (milestone 5); no hardware has been fabricated and no test result is claimed.</a:t>
+              <a:t> the design files exist (step 5). We haven’t built any hardware yet, and we aren’t claiming any test results.</a:t>
             </a:r>
           </a:p>
         </p:txBody>
@@ -34386,7 +34386,7 @@
           <a:lstStyle/>
           <a:p>
             <a:r>
-              <a:t>Maker Journey: Authenticity Evidence</a:t>
+              <a:t>Maker Journey: Proof of Our Work</a:t>
             </a:r>
           </a:p>
         </p:txBody>
@@ -34601,7 +34601,7 @@
                 </a:solidFill>
                 <a:latin typeface="Arial"/>
               </a:rPr>
-              <a:t>Authenticity verification</a:t>
+              <a:t>Photos of us building it</a:t>
             </a:r>
           </a:p>
         </p:txBody>
@@ -34639,7 +34639,7 @@
                 </a:solidFill>
                 <a:latin typeface="Arial"/>
               </a:rPr>
-              <a:t>Proof of personal fabrication</a:t>
+              <a:t>To show we really made it ourselves</a:t>
             </a:r>
           </a:p>
           <a:p>
@@ -34661,7 +34661,7 @@
                 </a:solidFill>
                 <a:latin typeface="Arial"/>
               </a:rPr>
-              <a:t>Team members printing the shell, assembling the wet core and calibrating the cell</a:t>
+              <a:t>Us printing the body, putting the water parts together and calibrating the test cell</a:t>
             </a:r>
           </a:p>
           <a:p>
@@ -34683,7 +34683,7 @@
                 </a:solidFill>
                 <a:latin typeface="Arial"/>
               </a:rPr>
-              <a:t>Institutional ID badges visible in frame</a:t>
+              <a:t>With our college ID badges visible</a:t>
             </a:r>
           </a:p>
           <a:p>
@@ -34705,7 +34705,7 @@
                 </a:solidFill>
                 <a:latin typeface="Arial"/>
               </a:rPr>
-              <a:t>Faculty review photo only if a mentor is attached</a:t>
+              <a:t>A photo with our faculty mentor, if we have one</a:t>
             </a:r>
           </a:p>
         </p:txBody>
@@ -34767,7 +34767,7 @@
                 </a:solidFill>
                 <a:latin typeface="Arial"/>
               </a:rPr>
-              <a:t>Photo: capsule wet-core assembly</a:t>
+              <a:t>Photo: assembling the water parts</a:t>
             </a:r>
           </a:p>
           <a:p>
@@ -34783,7 +34783,7 @@
                 </a:solidFill>
                 <a:latin typeface="Arial"/>
               </a:rPr>
-              <a:t>Must be a genuine team photograph — to be captured during Month 2 fabrication</a:t>
+              <a:t>We will take this during the build in Month 2. It has to be a real photo of us.</a:t>
             </a:r>
           </a:p>
         </p:txBody>
@@ -34845,7 +34845,7 @@
                 </a:solidFill>
                 <a:latin typeface="Arial"/>
               </a:rPr>
-              <a:t>Photo: sensing-cell calibration</a:t>
+              <a:t>Photo: calibrating the test cell</a:t>
             </a:r>
           </a:p>
           <a:p>
@@ -34861,7 +34861,7 @@
                 </a:solidFill>
                 <a:latin typeface="Arial"/>
               </a:rPr>
-              <a:t>Must be a genuine team photograph — to be captured during Month 2 fabrication</a:t>
+              <a:t>We will take this during the build in Month 2. It has to be a real photo of us.</a:t>
             </a:r>
           </a:p>
         </p:txBody>
@@ -34969,7 +34969,7 @@
                 </a:solidFill>
                 <a:latin typeface="Arial"/>
               </a:rPr>
-              <a:t>Work-in-progress design evidence</a:t>
+              <a:t>Our design work so far</a:t>
             </a:r>
           </a:p>
         </p:txBody>
@@ -35031,7 +35031,7 @@
                 </a:solidFill>
                 <a:latin typeface="Arial"/>
               </a:rPr>
-              <a:t>FreeCAD 1.1: parametric PartDesign model, 9 bodies, sketches driven by the Params spreadsheet</a:t>
+              <a:t>Our capsule in FreeCAD 1.1: 9 parts, with every key size driven by one parameter table</a:t>
             </a:r>
           </a:p>
         </p:txBody>
@@ -35093,7 +35093,7 @@
                 </a:solidFill>
                 <a:latin typeface="Arial"/>
               </a:rPr>
-              <a:t>KiCad 9 schematic editor + kicad-cli ERC report: 0 errors, 0 warnings</a:t>
+              <a:t>Our schematic in KiCad 9, with its electrical check: no errors, no warnings</a:t>
             </a:r>
           </a:p>
         </p:txBody>
@@ -35201,7 +35201,7 @@
                 </a:solidFill>
                 <a:latin typeface="Arial"/>
               </a:rPr>
-              <a:t>Raw repository linkage</a:t>
+              <a:t>Our project files</a:t>
             </a:r>
           </a:p>
         </p:txBody>
@@ -35278,7 +35278,7 @@
                 </a:solidFill>
                 <a:latin typeface="Arial"/>
               </a:rPr>
-              <a:t>public GitHub repository</a:t>
+              <a:t>public on GitHub</a:t>
             </a:r>
           </a:p>
         </p:txBody>
@@ -35316,7 +35316,7 @@
                 </a:solidFill>
                 <a:latin typeface="Arial"/>
               </a:rPr>
-              <a:t>Native files in the repository</a:t>
+              <a:t>What you’ll find there</a:t>
             </a:r>
           </a:p>
           <a:p>
@@ -35338,7 +35338,7 @@
                 </a:solidFill>
                 <a:latin typeface="Arial"/>
               </a:rPr>
-              <a:t>cad/</a:t>
+              <a:t>cad:</a:t>
             </a:r>
             <a:r>
               <a:rPr sz="850" b="0" i="0">
@@ -35347,7 +35347,7 @@
                 </a:solidFill>
                 <a:latin typeface="Arial"/>
               </a:rPr>
-              <a:t> .FCStd, .STEP, parametric build script, screenshots</a:t>
+              <a:t> the FreeCAD and STEP files, the script that builds the model, and screenshots</a:t>
             </a:r>
           </a:p>
           <a:p>
@@ -35369,7 +35369,7 @@
                 </a:solidFill>
                 <a:latin typeface="Arial"/>
               </a:rPr>
-              <a:t>electronics/</a:t>
+              <a:t>electronics:</a:t>
             </a:r>
             <a:r>
               <a:rPr sz="850" b="0" i="0">
@@ -35378,7 +35378,7 @@
                 </a:solidFill>
                 <a:latin typeface="Arial"/>
               </a:rPr>
-              <a:t> .kicad_sch, ERC report, schematic PDF</a:t>
+              <a:t> the KiCad schematic, its check report and a PDF</a:t>
             </a:r>
           </a:p>
           <a:p>
@@ -35400,7 +35400,7 @@
                 </a:solidFill>
                 <a:latin typeface="Arial"/>
               </a:rPr>
-              <a:t>docs/</a:t>
+              <a:t>docs:</a:t>
             </a:r>
             <a:r>
               <a:rPr sz="850" b="0" i="0">
@@ -35409,7 +35409,7 @@
                 </a:solidFill>
                 <a:latin typeface="Arial"/>
               </a:rPr>
-              <a:t> submission deck, BOM (CSV)</a:t>
+              <a:t> this deck and the parts list</a:t>
             </a:r>
           </a:p>
           <a:p>
@@ -35431,7 +35431,7 @@
                 </a:solidFill>
                 <a:latin typeface="Arial"/>
               </a:rPr>
-              <a:t>visuals/</a:t>
+              <a:t>visuals:</a:t>
             </a:r>
             <a:r>
               <a:rPr sz="850" b="0" i="0">
@@ -35440,7 +35440,7 @@
                 </a:solidFill>
                 <a:latin typeface="Arial"/>
               </a:rPr>
-              <a:t> concept renders and their scripts</a:t>
+              <a:t> the concept renders and how we made them</a:t>
             </a:r>
           </a:p>
           <a:p>
@@ -35457,7 +35457,7 @@
                 </a:solidFill>
                 <a:latin typeface="Arial"/>
               </a:rPr>
-              <a:t>Git history timestamps every change for the Stage 2 audit.</a:t>
+              <a:t>Every change is dated in the Git history, so progress is easy to check.</a:t>
             </a:r>
           </a:p>
           <a:p>
@@ -35474,7 +35474,7 @@
                 </a:solidFill>
                 <a:latin typeface="Arial"/>
               </a:rPr>
-              <a:t>Firmware, app source and raw test logs are added in Months 2–4.</a:t>
+              <a:t>Code, the app and test logs go in as we make them, in Months 2 to 4.</a:t>
             </a:r>
           </a:p>
         </p:txBody>
@@ -35536,7 +35536,7 @@
                 </a:solidFill>
                 <a:latin typeface="Arial"/>
               </a:rPr>
-              <a:t>Authenticity note:</a:t>
+              <a:t>Honest note:</a:t>
             </a:r>
             <a:r>
               <a:rPr sz="850" b="0" i="0">
@@ -35545,7 +35545,7 @@
                 </a:solidFill>
                 <a:latin typeface="Arial"/>
               </a:rPr>
-              <a:t> CAD and schematic are genuine native files created 25 Oct 2026 with AI assistance; the team must review and own them. Photos must be real team photographs — none are generated.</a:t>
+              <a:t> the CAD and schematic are real files made on 25 Oct 2026 with help from AI tools, and our team will review them. The photos must be real ones of us; none are made up.</a:t>
             </a:r>
           </a:p>
         </p:txBody>
@@ -35613,7 +35613,7 @@
           <a:lstStyle/>
           <a:p>
             <a:r>
-              <a:t>Safety &amp; Hazard Mitigation (Design FMEA)</a:t>
+              <a:t>Safety: What Could Go Wrong, and What We Do About It</a:t>
             </a:r>
           </a:p>
         </p:txBody>
@@ -35764,7 +35764,7 @@
                           </a:solidFill>
                           <a:latin typeface="Arial"/>
                         </a:rPr>
-                        <a:t>Failure mode</a:t>
+                        <a:t>What could go wrong</a:t>
                       </a:r>
                     </a:p>
                   </a:txBody>
@@ -35803,7 +35803,7 @@
                           </a:solidFill>
                           <a:latin typeface="Arial"/>
                         </a:rPr>
-                        <a:t>Possible effect</a:t>
+                        <a:t>What it could cause</a:t>
                       </a:r>
                     </a:p>
                   </a:txBody>
@@ -35842,7 +35842,7 @@
                           </a:solidFill>
                           <a:latin typeface="Arial"/>
                         </a:rPr>
-                        <a:t>Detection method</a:t>
+                        <a:t>How we spot it</a:t>
                       </a:r>
                     </a:p>
                   </a:txBody>
@@ -35881,7 +35881,7 @@
                           </a:solidFill>
                           <a:latin typeface="Arial"/>
                         </a:rPr>
-                        <a:t>Mitigation / fail-safe</a:t>
+                        <a:t>What we do about it</a:t>
                       </a:r>
                     </a:p>
                   </a:txBody>
@@ -35920,7 +35920,7 @@
                           </a:solidFill>
                           <a:latin typeface="Arial"/>
                         </a:rPr>
-                        <a:t>Verification status</a:t>
+                        <a:t>Tested yet?</a:t>
                       </a:r>
                     </a:p>
                   </a:txBody>
@@ -35961,7 +35961,7 @@
                           </a:solidFill>
                           <a:latin typeface="Arial"/>
                         </a:rPr>
-                        <a:t>Water ingress into dry spine</a:t>
+                        <a:t>Water gets into the electronics</a:t>
                       </a:r>
                     </a:p>
                   </a:txBody>
@@ -36000,7 +36000,7 @@
                           </a:solidFill>
                           <a:latin typeface="Arial"/>
                         </a:rPr>
-                        <a:t>Short circuit, battery hazard</a:t>
+                        <a:t>A short circuit or battery damage</a:t>
                       </a:r>
                     </a:p>
                   </a:txBody>
@@ -36039,7 +36039,7 @@
                           </a:solidFill>
                           <a:latin typeface="Arial"/>
                         </a:rPr>
-                        <a:t>Moisture-sense traces in the spine</a:t>
+                        <a:t>A leak sensor inside the dry side</a:t>
                       </a:r>
                     </a:p>
                   </a:txBody>
@@ -36078,7 +36078,7 @@
                           </a:solidFill>
                           <a:latin typeface="Arial"/>
                         </a:rPr>
-                        <a:t>O-ring bulkhead, potted feed-throughs, sealed USB-C; ingress → all outputs off and warning</a:t>
+                        <a:t>Sealed wall, sealed wires and USB-C; if it gets wet, everything switches off and warns</a:t>
                       </a:r>
                     </a:p>
                   </a:txBody>
@@ -36117,7 +36117,7 @@
                           </a:solidFill>
                           <a:latin typeface="Arial"/>
                         </a:rPr>
-                        <a:t>Immersion test pending</a:t>
+                        <a:t>Dunk test to do</a:t>
                       </a:r>
                     </a:p>
                   </a:txBody>
@@ -36158,7 +36158,7 @@
                           </a:solidFill>
                           <a:latin typeface="Arial"/>
                         </a:rPr>
-                        <a:t>Unstable / faulty sensor reading</a:t>
+                        <a:t>A sensor gives a bad reading</a:t>
                       </a:r>
                     </a:p>
                   </a:txBody>
@@ -36197,7 +36197,7 @@
                           </a:solidFill>
                           <a:latin typeface="Arial"/>
                         </a:rPr>
-                        <a:t>Wrong adaptation; false “improved” report</a:t>
+                        <a:t>Wrong treatment, or a false “all good”</a:t>
                       </a:r>
                     </a:p>
                   </a:txBody>
@@ -36236,7 +36236,7 @@
                           </a:solidFill>
                           <a:latin typeface="Arial"/>
                         </a:rPr>
-                        <a:t>Range, rate-of-change and SD checks on 30 samples</a:t>
+                        <a:t>Check the range, jumps and spread over 30 readings</a:t>
                       </a:r>
                     </a:p>
                   </a:txBody>
@@ -36275,7 +36275,7 @@
                           </a:solidFill>
                           <a:latin typeface="Arial"/>
                         </a:rPr>
-                        <a:t>Reading rejected and re-sampled twice, then fault warning — no result reported</a:t>
+                        <a:t>Throw the reading out, try twice more, then warn. No result is shown</a:t>
                       </a:r>
                     </a:p>
                   </a:txBody>
@@ -36314,7 +36314,7 @@
                           </a:solidFill>
                           <a:latin typeface="Arial"/>
                         </a:rPr>
-                        <a:t>Pending</a:t>
+                        <a:t>Not yet</a:t>
                       </a:r>
                     </a:p>
                   </a:txBody>
@@ -36355,7 +36355,7 @@
                           </a:solidFill>
                           <a:latin typeface="Arial"/>
                         </a:rPr>
-                        <a:t>Pump dry running (intake out of water)</a:t>
+                        <a:t>The pump runs dry</a:t>
                       </a:r>
                     </a:p>
                   </a:txBody>
@@ -36394,7 +36394,7 @@
                           </a:solidFill>
                           <a:latin typeface="Arial"/>
                         </a:rPr>
-                        <a:t>Pump wear; no sample</a:t>
+                        <a:t>Pump wear and no sample</a:t>
                       </a:r>
                     </a:p>
                   </a:txBody>
@@ -36433,7 +36433,7 @@
                           </a:solidFill>
                           <a:latin typeface="Arial"/>
                         </a:rPr>
-                        <a:t>Pump-current drop; cell not filled (EC open circuit)</a:t>
+                        <a:t>Pump current drops; the test cell stays empty</a:t>
                       </a:r>
                     </a:p>
                   </a:txBody>
@@ -36472,7 +36472,7 @@
                           </a:solidFill>
                           <a:latin typeface="Arial"/>
                         </a:rPr>
-                        <a:t>Pump stops within 3 s; prompt to re-submerge intake</a:t>
+                        <a:t>Pump stops within 3 seconds and asks you to put the hose back in water</a:t>
                       </a:r>
                     </a:p>
                   </a:txBody>
@@ -36511,7 +36511,7 @@
                           </a:solidFill>
                           <a:latin typeface="Arial"/>
                         </a:rPr>
-                        <a:t>Pending</a:t>
+                        <a:t>Not yet</a:t>
                       </a:r>
                     </a:p>
                   </a:txBody>
@@ -36552,7 +36552,7 @@
                           </a:solidFill>
                           <a:latin typeface="Arial"/>
                         </a:rPr>
-                        <a:t>Clogged cartridge / pressure rise</a:t>
+                        <a:t>The filter clogs</a:t>
                       </a:r>
                     </a:p>
                   </a:txBody>
@@ -36591,7 +36591,7 @@
                           </a:solidFill>
                           <a:latin typeface="Arial"/>
                         </a:rPr>
-                        <a:t>Low flow, seal stress, leakage</a:t>
+                        <a:t>Slow flow, pressure, possible leaks</a:t>
                       </a:r>
                     </a:p>
                   </a:txBody>
@@ -36630,7 +36630,7 @@
                           </a:solidFill>
                           <a:latin typeface="Arial"/>
                         </a:rPr>
-                        <a:t>Pump-current rise; litres-treated counter</a:t>
+                        <a:t>Pump current rises; we count litres filtered</a:t>
                       </a:r>
                     </a:p>
                   </a:txBody>
@@ -36669,7 +36669,7 @@
                           </a:solidFill>
                           <a:latin typeface="Arial"/>
                         </a:rPr>
-                        <a:t>Stop at current limit; replace-cartridge prompt; housing tested at 1.5× shut-off pressure</a:t>
+                        <a:t>Stops at a current limit and asks for a new cartridge; housing tested at 1.5 times pump pressure</a:t>
                       </a:r>
                     </a:p>
                   </a:txBody>
@@ -36708,7 +36708,7 @@
                           </a:solidFill>
                           <a:latin typeface="Arial"/>
                         </a:rPr>
-                        <a:t>Pending</a:t>
+                        <a:t>Not yet</a:t>
                       </a:r>
                     </a:p>
                   </a:txBody>
@@ -36749,7 +36749,7 @@
                           </a:solidFill>
                           <a:latin typeface="Arial"/>
                         </a:rPr>
-                        <a:t>Battery / electrical fault</a:t>
+                        <a:t>Battery or electrical fault</a:t>
                       </a:r>
                     </a:p>
                   </a:txBody>
@@ -36788,7 +36788,7 @@
                           </a:solidFill>
                           <a:latin typeface="Arial"/>
                         </a:rPr>
-                        <a:t>Overheating, fire risk</a:t>
+                        <a:t>Heat, in the worst case fire</a:t>
                       </a:r>
                     </a:p>
                   </a:txBody>
@@ -36827,7 +36827,7 @@
                           </a:solidFill>
                           <a:latin typeface="Arial"/>
                         </a:rPr>
-                        <a:t>Cell PCM, battery-voltage sense, brown-out reset</a:t>
+                        <a:t>Battery protection, voltage check, low-voltage reset</a:t>
                       </a:r>
                     </a:p>
                   </a:txBody>
@@ -36866,7 +36866,7 @@
                           </a:solidFill>
                           <a:latin typeface="Arial"/>
                         </a:rPr>
-                        <a:t>Protected cell and polyfuse; NTC-qualified charger planned for rev 0.2; sealed USB-C port</a:t>
+                        <a:t>Protected battery and fuse; a temperature-aware charger in the next version; sealed USB-C</a:t>
                       </a:r>
                     </a:p>
                   </a:txBody>
@@ -36905,7 +36905,7 @@
                           </a:solidFill>
                           <a:latin typeface="Arial"/>
                         </a:rPr>
-                        <a:t>Pending</a:t>
+                        <a:t>Not yet</a:t>
                       </a:r>
                     </a:p>
                   </a:txBody>
@@ -36946,7 +36946,7 @@
                           </a:solidFill>
                           <a:latin typeface="Arial"/>
                         </a:rPr>
-                        <a:t>UV-C exposure</a:t>
+                        <a:t>Someone is exposed to UV-C</a:t>
                       </a:r>
                     </a:p>
                   </a:txBody>
@@ -37024,7 +37024,7 @@
                           </a:solidFill>
                           <a:latin typeface="Arial"/>
                         </a:rPr>
-                        <a:t>Cap-locked switch and flow confirmation</a:t>
+                        <a:t>Cap-locked switch and a flow check</a:t>
                       </a:r>
                     </a:p>
                   </a:txBody>
@@ -37063,7 +37063,7 @@
                           </a:solidFill>
                           <a:latin typeface="Arial"/>
                         </a:rPr>
-                        <a:t>Sealed quartz chamber; LED enabled only with flow and cap locked; automatic timeout</a:t>
+                        <a:t>Sealed quartz chamber; UV turns on only with water flowing and the cap locked; auto timeout</a:t>
                       </a:r>
                     </a:p>
                   </a:txBody>
@@ -37102,7 +37102,7 @@
                           </a:solidFill>
                           <a:latin typeface="Arial"/>
                         </a:rPr>
-                        <a:t>Pending</a:t>
+                        <a:t>Not yet</a:t>
                       </a:r>
                     </a:p>
                   </a:txBody>
@@ -37143,7 +37143,7 @@
                           </a:solidFill>
                           <a:latin typeface="Arial"/>
                         </a:rPr>
-                        <a:t>Intended improvement not achieved</a:t>
+                        <a:t>The water doesn’t improve</a:t>
                       </a:r>
                     </a:p>
                   </a:txBody>
@@ -37182,7 +37182,7 @@
                           </a:solidFill>
                           <a:latin typeface="Arial"/>
                         </a:rPr>
-                        <a:t>Reliance on ineffective treatment</a:t>
+                        <a:t>Someone trusts treatment that didn’t work</a:t>
                       </a:r>
                     </a:p>
                   </a:txBody>
@@ -37221,7 +37221,7 @@
                           </a:solidFill>
                           <a:latin typeface="Arial"/>
                         </a:rPr>
-                        <a:t>Δ = M2 − M1 below target band</a:t>
+                        <a:t>The second test isn’t better than the first</a:t>
                       </a:r>
                     </a:p>
                   </a:txBody>
@@ -37260,7 +37260,7 @@
                           </a:solidFill>
                           <a:latin typeface="Arial"/>
                         </a:rPr>
-                        <a:t>Stop before dispensing; warning; second pass, cartridge replacement or laboratory testing</a:t>
+                        <a:t>Don’t pour, warn, and suggest another run, a new cartridge or a lab test</a:t>
                       </a:r>
                     </a:p>
                   </a:txBody>
@@ -37299,7 +37299,7 @@
                           </a:solidFill>
                           <a:latin typeface="Arial"/>
                         </a:rPr>
-                        <a:t>Pending</a:t>
+                        <a:t>Not yet</a:t>
                       </a:r>
                     </a:p>
                   </a:txBody>
@@ -37340,7 +37340,7 @@
                           </a:solidFill>
                           <a:latin typeface="Arial"/>
                         </a:rPr>
-                        <a:t>User misinterprets readings</a:t>
+                        <a:t>Someone misreads the screen</a:t>
                       </a:r>
                     </a:p>
                   </a:txBody>
@@ -37379,7 +37379,7 @@
                           </a:solidFill>
                           <a:latin typeface="Arial"/>
                         </a:rPr>
-                        <a:t>False sense of safety</a:t>
+                        <a:t>A false sense of safety</a:t>
                       </a:r>
                     </a:p>
                   </a:txBody>
@@ -37418,7 +37418,7 @@
                           </a:solidFill>
                           <a:latin typeface="Arial"/>
                         </a:rPr>
-                        <a:t>Usability walkthrough with users</a:t>
+                        <a:t>Try the screen with real users</a:t>
                       </a:r>
                     </a:p>
                   </a:txBody>
@@ -37457,7 +37457,7 @@
                           </a:solidFill>
                           <a:latin typeface="Arial"/>
                         </a:rPr>
-                        <a:t>Plain-language labels; never displays “safe to drink”; shows measured parameters only</a:t>
+                        <a:t>Plain words; never says “safe to drink”; shows only what we measured</a:t>
                       </a:r>
                     </a:p>
                   </a:txBody>
@@ -37496,7 +37496,7 @@
                           </a:solidFill>
                           <a:latin typeface="Arial"/>
                         </a:rPr>
-                        <a:t>Pending</a:t>
+                        <a:t>Not yet</a:t>
                       </a:r>
                     </a:p>
                   </a:txBody>
@@ -37537,7 +37537,7 @@
                           </a:solidFill>
                           <a:latin typeface="Arial"/>
                         </a:rPr>
-                        <a:t>Contaminant not measurable by sensors</a:t>
+                        <a:t>Something our sensors can’t detect</a:t>
                       </a:r>
                     </a:p>
                   </a:txBody>
@@ -37576,7 +37576,7 @@
                           </a:solidFill>
                           <a:latin typeface="Arial"/>
                         </a:rPr>
-                        <a:t>Undetected pathogen or chemical hazard</a:t>
+                        <a:t>Hidden germs or chemicals</a:t>
                       </a:r>
                     </a:p>
                   </a:txBody>
@@ -37615,7 +37615,7 @@
                           </a:solidFill>
                           <a:latin typeface="Arial"/>
                         </a:rPr>
-                        <a:t>Not detectable by installed sensors</a:t>
+                        <a:t>Our sensors can’t see it</a:t>
                       </a:r>
                     </a:p>
                   </a:txBody>
@@ -37654,7 +37654,7 @@
                           </a:solidFill>
                           <a:latin typeface="Arial"/>
                         </a:rPr>
-                        <a:t>Permanent limitation notice; laboratory testing recommended for new or unknown sources</a:t>
+                        <a:t>A permanent note on the screen, and we suggest a lab test for new or unknown sources</a:t>
                       </a:r>
                     </a:p>
                   </a:txBody>
@@ -37693,7 +37693,7 @@
                           </a:solidFill>
                           <a:latin typeface="Arial"/>
                         </a:rPr>
-                        <a:t>Design rule</a:t>
+                        <a:t>Built into the design</a:t>
                       </a:r>
                     </a:p>
                   </a:txBody>
@@ -37827,7 +37827,7 @@
                 </a:solidFill>
                 <a:latin typeface="Arial"/>
               </a:rPr>
-              <a:t>Standards considered (design references only — no testing or certification claimed)</a:t>
+              <a:t>Standards we designed around (none tested or certified yet)</a:t>
             </a:r>
           </a:p>
         </p:txBody>
@@ -37865,7 +37865,7 @@
                 </a:solidFill>
                 <a:latin typeface="Arial"/>
               </a:rPr>
-              <a:t>IEC 60529 IP code (IPX7 design target, not tested) · IEC 62133-2 (portable lithium cells — select a cell certified to it) · ISO 7027-1 (nephelometric turbidity principle) · IS 10500:2012 and WHO GDWQ (reference values for interpretation only).</a:t>
+              <a:t>IEC 60529 for water-tightness (we aim for IPX7). IEC 62133-2 for lithium batteries (we will buy a cell certified to it). ISO 7027-1 for measuring cloudiness. IS 10500:2012 and the WHO guidelines as reference points for water quality.</a:t>
             </a:r>
           </a:p>
         </p:txBody>
@@ -37927,7 +37927,7 @@
                 </a:solidFill>
                 <a:latin typeface="Arial"/>
               </a:rPr>
-              <a:t>Safety principle:</a:t>
+              <a:t>Our rule:</a:t>
             </a:r>
             <a:r>
               <a:rPr sz="850" b="0" i="0">
@@ -37936,7 +37936,7 @@
                 </a:solidFill>
                 <a:latin typeface="Arial"/>
               </a:rPr>
-              <a:t> Hydra Nexus never reports water as universally safe; it reports measured changes in installed parameters and recommends laboratory testing where required.</a:t>
+              <a:t> Hydra Nexus never says water is completely safe. It shows how the readings it can measure changed, and suggests a lab test when needed.</a:t>
             </a:r>
           </a:p>
         </p:txBody>
@@ -38004,7 +38004,7 @@
           <a:lstStyle/>
           <a:p>
             <a:r>
-              <a:t>Four-Month Fabrication &amp; Validation Roadmap</a:t>
+              <a:t>Roadmap: Our Four-Month Plan</a:t>
             </a:r>
           </a:p>
         </p:txBody>
@@ -38252,7 +38252,7 @@
                 </a:solidFill>
                 <a:latin typeface="Arial"/>
               </a:rPr>
-              <a:t>Engineering design &amp; component selection</a:t>
+              <a:t>Finish the design and pick parts</a:t>
             </a:r>
           </a:p>
           <a:p>
@@ -38268,13 +38268,13 @@
               <a:buChar char="▪"/>
             </a:pPr>
             <a:r>
-              <a:rPr sz="950" b="0" i="0">
+              <a:rPr sz="900" b="0" i="0">
                 <a:solidFill>
                   <a:srgbClr val="334155"/>
                 </a:solidFill>
                 <a:latin typeface="Arial"/>
               </a:rPr>
-              <a:t>Finalize capsule architecture, water path and control logic</a:t>
+              <a:t>Lock in the layout, water path and control logic</a:t>
             </a:r>
           </a:p>
           <a:p>
@@ -38290,13 +38290,13 @@
               <a:buChar char="▪"/>
             </a:pPr>
             <a:r>
-              <a:rPr sz="950" b="0" i="0">
+              <a:rPr sz="900" b="0" i="0">
                 <a:solidFill>
                   <a:srgbClr val="334155"/>
                 </a:solidFill>
                 <a:latin typeface="Arial"/>
               </a:rPr>
-              <a:t>Native CAD of shell, cartridge bayonet, cell and spine</a:t>
+              <a:t>Finish the CAD for the body, cartridge, test cell and electronics side</a:t>
             </a:r>
           </a:p>
           <a:p>
@@ -38312,13 +38312,13 @@
               <a:buChar char="▪"/>
             </a:pPr>
             <a:r>
-              <a:rPr sz="950" b="0" i="0">
+              <a:rPr sz="900" b="0" i="0">
                 <a:solidFill>
                   <a:srgbClr val="334155"/>
                 </a:solidFill>
                 <a:latin typeface="Arial"/>
               </a:rPr>
-              <a:t>KiCad schematic; source mini pH electrode, pump, valves; quotations</a:t>
+              <a:t>Polish the schematic; find the small pH probe, pump and valves; get quotes</a:t>
             </a:r>
           </a:p>
           <a:p>
@@ -38329,22 +38329,22 @@
               <a:buNone/>
             </a:pPr>
             <a:r>
-              <a:rPr sz="950" b="1" i="0">
+              <a:rPr sz="900" b="1" i="0">
                 <a:solidFill>
                   <a:srgbClr val="0F172A"/>
                 </a:solidFill>
                 <a:latin typeface="Arial"/>
               </a:rPr>
-              <a:t>Deliverables:</a:t>
-            </a:r>
-            <a:r>
-              <a:rPr sz="950" b="0" i="0">
+              <a:t>We deliver:</a:t>
+            </a:r>
+            <a:r>
+              <a:rPr sz="900" b="0" i="0">
                 <a:solidFill>
                   <a:srgbClr val="334155"/>
                 </a:solidFill>
                 <a:latin typeface="Arial"/>
               </a:rPr>
-              <a:t> CAD (.STEP), schematic + ERC log, approved BOM</a:t>
+              <a:t> final CAD files, checked schematic, approved parts list</a:t>
             </a:r>
           </a:p>
           <a:p>
@@ -38355,22 +38355,22 @@
               <a:buNone/>
             </a:pPr>
             <a:r>
-              <a:rPr sz="950" b="1" i="0">
+              <a:rPr sz="900" b="1" i="0">
                 <a:solidFill>
                   <a:srgbClr val="0F172A"/>
                 </a:solidFill>
                 <a:latin typeface="Arial"/>
               </a:rPr>
-              <a:t>Depends on:</a:t>
-            </a:r>
-            <a:r>
-              <a:rPr sz="950" b="0" i="0">
+              <a:t>We need:</a:t>
+            </a:r>
+            <a:r>
+              <a:rPr sz="900" b="0" i="0">
                 <a:solidFill>
                   <a:srgbClr val="334155"/>
                 </a:solidFill>
                 <a:latin typeface="Arial"/>
               </a:rPr>
-              <a:t> Team approval of proposed selections; quotations</a:t>
+              <a:t> the whole team agreeing on the parts; supplier quotes</a:t>
             </a:r>
           </a:p>
           <a:p>
@@ -38381,22 +38381,22 @@
               <a:buNone/>
             </a:pPr>
             <a:r>
-              <a:rPr sz="950" b="1" i="0">
+              <a:rPr sz="900" b="1" i="0">
                 <a:solidFill>
                   <a:srgbClr val="0F172A"/>
                 </a:solidFill>
                 <a:latin typeface="Arial"/>
               </a:rPr>
-              <a:t>Test gate:</a:t>
-            </a:r>
-            <a:r>
-              <a:rPr sz="950" b="0" i="0">
+              <a:t>Done when:</a:t>
+            </a:r>
+            <a:r>
+              <a:rPr sz="900" b="0" i="0">
                 <a:solidFill>
                   <a:srgbClr val="334155"/>
                 </a:solidFill>
                 <a:latin typeface="Arial"/>
               </a:rPr>
-              <a:t> Design review: every FMEA item mitigated; energy estimate ≥ 30 cycles per charge</a:t>
+              <a:t> a design review where every risk has a fix, and the battery maths still gives 30+ runs</a:t>
             </a:r>
           </a:p>
         </p:txBody>
@@ -38537,7 +38537,7 @@
                 </a:solidFill>
                 <a:latin typeface="Arial"/>
               </a:rPr>
-              <a:t>Fabrication &amp; hardware assembly</a:t>
+              <a:t>Build it</a:t>
             </a:r>
           </a:p>
           <a:p>
@@ -38553,13 +38553,13 @@
               <a:buChar char="▪"/>
             </a:pPr>
             <a:r>
-              <a:rPr sz="950" b="0" i="0">
+              <a:rPr sz="900" b="0" i="0">
                 <a:solidFill>
                   <a:srgbClr val="334155"/>
                 </a:solidFill>
                 <a:latin typeface="Arial"/>
               </a:rPr>
-              <a:t>3D-print shell v1; build sensing cell and wet core</a:t>
+              <a:t>3D-print the first body; build the test cell and water parts</a:t>
             </a:r>
           </a:p>
           <a:p>
@@ -38575,13 +38575,13 @@
               <a:buChar char="▪"/>
             </a:pPr>
             <a:r>
-              <a:rPr sz="950" b="0" i="0">
+              <a:rPr sz="900" b="0" i="0">
                 <a:solidFill>
                   <a:srgbClr val="334155"/>
                 </a:solidFill>
                 <a:latin typeface="Arial"/>
               </a:rPr>
-              <a:t>Assemble dry spine: battery, charger, controller, drivers</a:t>
+              <a:t>Put together the electronics side: battery, charger, board, switches</a:t>
             </a:r>
           </a:p>
           <a:p>
@@ -38597,13 +38597,13 @@
               <a:buChar char="▪"/>
             </a:pPr>
             <a:r>
-              <a:rPr sz="950" b="0" i="0">
+              <a:rPr sz="900" b="0" i="0">
                 <a:solidFill>
                   <a:srgbClr val="334155"/>
                 </a:solidFill>
                 <a:latin typeface="Arial"/>
               </a:rPr>
-              <a:t>Install sensors, pump, valves, protection</a:t>
+              <a:t>Fit the sensors, pump, valves and protection</a:t>
             </a:r>
           </a:p>
           <a:p>
@@ -38614,22 +38614,22 @@
               <a:buNone/>
             </a:pPr>
             <a:r>
-              <a:rPr sz="950" b="1" i="0">
+              <a:rPr sz="900" b="1" i="0">
                 <a:solidFill>
                   <a:srgbClr val="0F172A"/>
                 </a:solidFill>
                 <a:latin typeface="Arial"/>
               </a:rPr>
-              <a:t>Deliverables:</a:t>
-            </a:r>
-            <a:r>
-              <a:rPr sz="950" b="0" i="0">
+              <a:t>We deliver:</a:t>
+            </a:r>
+            <a:r>
+              <a:rPr sz="900" b="0" i="0">
                 <a:solidFill>
                   <a:srgbClr val="334155"/>
                 </a:solidFill>
                 <a:latin typeface="Arial"/>
               </a:rPr>
-              <a:t> Assembled capsule v1; as-built wiring diagram; genuine build photos</a:t>
+              <a:t> a working first capsule, wiring notes and real build photos</a:t>
             </a:r>
           </a:p>
           <a:p>
@@ -38640,22 +38640,22 @@
               <a:buNone/>
             </a:pPr>
             <a:r>
-              <a:rPr sz="950" b="1" i="0">
+              <a:rPr sz="900" b="1" i="0">
                 <a:solidFill>
                   <a:srgbClr val="0F172A"/>
                 </a:solidFill>
                 <a:latin typeface="Arial"/>
               </a:rPr>
-              <a:t>Depends on:</a:t>
-            </a:r>
-            <a:r>
-              <a:rPr sz="950" b="0" i="0">
+              <a:t>We need:</a:t>
+            </a:r>
+            <a:r>
+              <a:rPr sz="900" b="0" i="0">
                 <a:solidFill>
                   <a:srgbClr val="334155"/>
                 </a:solidFill>
                 <a:latin typeface="Arial"/>
               </a:rPr>
-              <a:t> Components delivered from Month 1 orders</a:t>
+              <a:t> parts arriving from our Month 1 orders</a:t>
             </a:r>
           </a:p>
           <a:p>
@@ -38666,22 +38666,22 @@
               <a:buNone/>
             </a:pPr>
             <a:r>
-              <a:rPr sz="950" b="1" i="0">
+              <a:rPr sz="900" b="1" i="0">
                 <a:solidFill>
                   <a:srgbClr val="0F172A"/>
                 </a:solidFill>
                 <a:latin typeface="Arial"/>
               </a:rPr>
-              <a:t>Test gate:</a:t>
-            </a:r>
-            <a:r>
-              <a:rPr sz="950" b="0" i="0">
+              <a:t>Done when:</a:t>
+            </a:r>
+            <a:r>
+              <a:rPr sz="900" b="0" i="0">
                 <a:solidFill>
                   <a:srgbClr val="334155"/>
                 </a:solidFill>
                 <a:latin typeface="Arial"/>
               </a:rPr>
-              <a:t> Hydrostatic test at 1.5× pump shut-off pressure; dry spine stays dry; battery protection checked before first charge</a:t>
+              <a:t> it holds 1.5 times pump pressure, the electronics stay dry, and the battery protection works before the first charge</a:t>
             </a:r>
           </a:p>
         </p:txBody>
@@ -38822,7 +38822,7 @@
                 </a:solidFill>
                 <a:latin typeface="Arial"/>
               </a:rPr>
-              <a:t>Software integration &amp; bench testing</a:t>
+              <a:t>Write the code and test on the bench</a:t>
             </a:r>
           </a:p>
           <a:p>
@@ -38838,13 +38838,13 @@
               <a:buChar char="▪"/>
             </a:pPr>
             <a:r>
-              <a:rPr sz="950" b="0" i="0">
+              <a:rPr sz="900" b="0" i="0">
                 <a:solidFill>
                   <a:srgbClr val="334155"/>
                 </a:solidFill>
                 <a:latin typeface="Arial"/>
               </a:rPr>
-              <a:t>Sampling, adaptation and verify-before-dispense logic</a:t>
+              <a:t>Code the test, adapt and pour-only-if-it-passes logic</a:t>
             </a:r>
           </a:p>
           <a:p>
@@ -38860,13 +38860,13 @@
               <a:buChar char="▪"/>
             </a:pPr>
             <a:r>
-              <a:rPr sz="950" b="0" i="0">
+              <a:rPr sz="900" b="0" i="0">
                 <a:solidFill>
                   <a:srgbClr val="334155"/>
                 </a:solidFill>
                 <a:latin typeface="Arial"/>
               </a:rPr>
-              <a:t>OLED, RGB ring and BLE phone app</a:t>
+              <a:t>Get the screen, light ring and phone app working</a:t>
             </a:r>
           </a:p>
           <a:p>
@@ -38882,13 +38882,13 @@
               <a:buChar char="▪"/>
             </a:pPr>
             <a:r>
-              <a:rPr sz="950" b="0" i="0">
+              <a:rPr sz="900" b="0" i="0">
                 <a:solidFill>
                   <a:srgbClr val="334155"/>
                 </a:solidFill>
                 <a:latin typeface="Arial"/>
               </a:rPr>
-              <a:t>Sensor calibration; carry-over and functional tests</a:t>
+              <a:t>Calibrate the sensors; run leftover-water and function tests</a:t>
             </a:r>
           </a:p>
           <a:p>
@@ -38899,22 +38899,22 @@
               <a:buNone/>
             </a:pPr>
             <a:r>
-              <a:rPr sz="950" b="1" i="0">
+              <a:rPr sz="900" b="1" i="0">
                 <a:solidFill>
                   <a:srgbClr val="0F172A"/>
                 </a:solidFill>
                 <a:latin typeface="Arial"/>
               </a:rPr>
-              <a:t>Deliverables:</a:t>
-            </a:r>
-            <a:r>
-              <a:rPr sz="950" b="0" i="0">
+              <a:t>We deliver:</a:t>
+            </a:r>
+            <a:r>
+              <a:rPr sz="900" b="0" i="0">
                 <a:solidFill>
                   <a:srgbClr val="334155"/>
                 </a:solidFill>
                 <a:latin typeface="Arial"/>
               </a:rPr>
-              <a:t> Firmware &amp; app v1 in repository; calibration records; functional test log</a:t>
+              <a:t> first version of the code and app, calibration notes, test log</a:t>
             </a:r>
           </a:p>
           <a:p>
@@ -38925,22 +38925,22 @@
               <a:buNone/>
             </a:pPr>
             <a:r>
-              <a:rPr sz="950" b="1" i="0">
+              <a:rPr sz="900" b="1" i="0">
                 <a:solidFill>
                   <a:srgbClr val="0F172A"/>
                 </a:solidFill>
                 <a:latin typeface="Arial"/>
               </a:rPr>
-              <a:t>Depends on:</a:t>
-            </a:r>
-            <a:r>
-              <a:rPr sz="950" b="0" i="0">
+              <a:t>We need:</a:t>
+            </a:r>
+            <a:r>
+              <a:rPr sz="900" b="0" i="0">
                 <a:solidFill>
                   <a:srgbClr val="334155"/>
                 </a:solidFill>
                 <a:latin typeface="Arial"/>
               </a:rPr>
-              <a:t> Assembled capsule; calibration solutions</a:t>
+              <a:t> the built capsule and calibration liquids</a:t>
             </a:r>
           </a:p>
           <a:p>
@@ -38951,22 +38951,22 @@
               <a:buNone/>
             </a:pPr>
             <a:r>
-              <a:rPr sz="950" b="1" i="0">
+              <a:rPr sz="900" b="1" i="0">
                 <a:solidFill>
                   <a:srgbClr val="0F172A"/>
                 </a:solidFill>
                 <a:latin typeface="Arial"/>
               </a:rPr>
-              <a:t>Test gate:</a:t>
-            </a:r>
-            <a:r>
-              <a:rPr sz="950" b="0" i="0">
+              <a:t>Done when:</a:t>
+            </a:r>
+            <a:r>
+              <a:rPr sz="900" b="0" i="0">
                 <a:solidFill>
                   <a:srgbClr val="334155"/>
                 </a:solidFill>
                 <a:latin typeface="Arial"/>
               </a:rPr>
-              <a:t> Carry-over and repeatability within targets; every injected fault reaches the safe state</a:t>
+              <a:t> repeat readings and leftover water within our targets, and every fault we create is caught</a:t>
             </a:r>
           </a:p>
         </p:txBody>
@@ -39107,7 +39107,7 @@
                 </a:solidFill>
                 <a:latin typeface="Arial"/>
               </a:rPr>
-              <a:t>Performance validation &amp; Stage 3 preparation</a:t>
+              <a:t>Test properly and get ready for Stage 3</a:t>
             </a:r>
           </a:p>
           <a:p>
@@ -39123,13 +39123,13 @@
               <a:buChar char="▪"/>
             </a:pPr>
             <a:r>
-              <a:rPr sz="950" b="0" i="0">
+              <a:rPr sz="900" b="0" i="0">
                 <a:solidFill>
                   <a:srgbClr val="334155"/>
                 </a:solidFill>
                 <a:latin typeface="Arial"/>
               </a:rPr>
-              <a:t>Test samples with different measurable conditions</a:t>
+              <a:t>Try lots of different water samples</a:t>
             </a:r>
           </a:p>
           <a:p>
@@ -39145,13 +39145,13 @@
               <a:buChar char="▪"/>
             </a:pPr>
             <a:r>
-              <a:rPr sz="950" b="0" i="0">
+              <a:rPr sz="900" b="0" i="0">
                 <a:solidFill>
                   <a:srgbClr val="334155"/>
                 </a:solidFill>
                 <a:latin typeface="Arial"/>
               </a:rPr>
-              <a:t>Record paired readings; battery endurance; immersion and drop checks</a:t>
+              <a:t>Record before and after readings; test battery life, dunking and drops</a:t>
             </a:r>
           </a:p>
           <a:p>
@@ -39167,13 +39167,13 @@
               <a:buChar char="▪"/>
             </a:pPr>
             <a:r>
-              <a:rPr sz="950" b="0" i="0">
+              <a:rPr sz="900" b="0" i="0">
                 <a:solidFill>
                   <a:srgbClr val="334155"/>
                 </a:solidFill>
                 <a:latin typeface="Arial"/>
               </a:rPr>
-              <a:t>Refine logic; documentation and demo</a:t>
+              <a:t>Fine-tune the logic; write up and prepare the demo</a:t>
             </a:r>
           </a:p>
           <a:p>
@@ -39184,22 +39184,22 @@
               <a:buNone/>
             </a:pPr>
             <a:r>
-              <a:rPr sz="950" b="1" i="0">
+              <a:rPr sz="900" b="1" i="0">
                 <a:solidFill>
                   <a:srgbClr val="0F172A"/>
                 </a:solidFill>
                 <a:latin typeface="Arial"/>
               </a:rPr>
-              <a:t>Deliverables:</a:t>
-            </a:r>
-            <a:r>
-              <a:rPr sz="950" b="0" i="0">
+              <a:t>We deliver:</a:t>
+            </a:r>
+            <a:r>
+              <a:rPr sz="900" b="0" i="0">
                 <a:solidFill>
                   <a:srgbClr val="334155"/>
                 </a:solidFill>
                 <a:latin typeface="Arial"/>
               </a:rPr>
-              <a:t> Testing report with genuine data; demonstration script</a:t>
+              <a:t> a test report with real data, and a demo plan</a:t>
             </a:r>
           </a:p>
           <a:p>
@@ -39210,22 +39210,22 @@
               <a:buNone/>
             </a:pPr>
             <a:r>
-              <a:rPr sz="950" b="1" i="0">
+              <a:rPr sz="900" b="1" i="0">
                 <a:solidFill>
                   <a:srgbClr val="0F172A"/>
                 </a:solidFill>
                 <a:latin typeface="Arial"/>
               </a:rPr>
-              <a:t>Depends on:</a:t>
-            </a:r>
-            <a:r>
-              <a:rPr sz="950" b="0" i="0">
+              <a:t>We need:</a:t>
+            </a:r>
+            <a:r>
+              <a:rPr sz="900" b="0" i="0">
                 <a:solidFill>
                   <a:srgbClr val="334155"/>
                 </a:solidFill>
                 <a:latin typeface="Arial"/>
               </a:rPr>
-              <a:t> Month 3 gate passed</a:t>
+              <a:t> passing the Month 3 checks</a:t>
             </a:r>
           </a:p>
           <a:p>
@@ -39236,22 +39236,22 @@
               <a:buNone/>
             </a:pPr>
             <a:r>
-              <a:rPr sz="950" b="1" i="0">
+              <a:rPr sz="900" b="1" i="0">
                 <a:solidFill>
                   <a:srgbClr val="0F172A"/>
                 </a:solidFill>
                 <a:latin typeface="Arial"/>
               </a:rPr>
-              <a:t>Test gate:</a:t>
-            </a:r>
-            <a:r>
-              <a:rPr sz="950" b="0" i="0">
+              <a:t>Done when:</a:t>
+            </a:r>
+            <a:r>
+              <a:rPr sz="900" b="0" i="0">
                 <a:solidFill>
                   <a:srgbClr val="334155"/>
                 </a:solidFill>
                 <a:latin typeface="Arial"/>
               </a:rPr>
-              <a:t> ≥ 3 logged runs per sample type; open issues listed with owners</a:t>
+              <a:t> at least 3 logged runs per water type, with open issues listed and assigned</a:t>
             </a:r>
           </a:p>
         </p:txBody>
@@ -39312,7 +39312,7 @@
                 </a:solidFill>
                 <a:latin typeface="Arial"/>
               </a:rPr>
-              <a:t>Stage 3 target:</a:t>
+              <a:t>By Stage 3:</a:t>
             </a:r>
             <a:r>
               <a:rPr sz="900" b="0" i="0">
@@ -39321,7 +39321,7 @@
                 </a:solidFill>
                 <a:latin typeface="Arial"/>
               </a:rPr>
-              <a:t> a working pocket-size capsule ready for functional demonstration and further validation — complete IDENTIFY → DECIDE → PURIFY → VERIFY → COMPARE cycle on real samples.</a:t>
+              <a:t> a working pocket capsule we can demo live, running the full identify, decide, purify, verify, compare loop on real water.</a:t>
             </a:r>
           </a:p>
         </p:txBody>
@@ -39383,7 +39383,7 @@
                 </a:solidFill>
                 <a:latin typeface="Arial"/>
               </a:rPr>
-              <a:t>Schedule basis:</a:t>
+              <a:t>About the dates:</a:t>
             </a:r>
             <a:r>
               <a:rPr sz="850" b="0" i="0">
@@ -39392,7 +39392,7 @@
                 </a:solidFill>
                 <a:latin typeface="Arial"/>
               </a:rPr>
-              <a:t> months are counted from Stage 2 project commencement; calendar dates to be set by the team. This is a proposed schedule — no milestone has been achieved yet.</a:t>
+              <a:t> months count from when Stage 2 starts; we will set the exact dates. This is our plan, and none of it is done yet.</a:t>
             </a:r>
           </a:p>
         </p:txBody>
@@ -39460,7 +39460,7 @@
           <a:lstStyle/>
           <a:p>
             <a:r>
-              <a:t>Technical Challenges &amp; Risks</a:t>
+              <a:t>Technical Challenges: The Hard Parts</a:t>
             </a:r>
           </a:p>
         </p:txBody>
@@ -39767,7 +39767,7 @@
                 </a:solidFill>
                 <a:latin typeface="Arial"/>
               </a:rPr>
-              <a:t>Sensor accuracy, drift &amp; miniature pH</a:t>
+              <a:t>Keeping sensors accurate</a:t>
             </a:r>
           </a:p>
           <a:p>
@@ -39778,22 +39778,22 @@
               <a:buNone/>
             </a:pPr>
             <a:r>
-              <a:rPr sz="950" b="1" i="0">
+              <a:rPr sz="900" b="1" i="0">
                 <a:solidFill>
                   <a:srgbClr val="0F172A"/>
                 </a:solidFill>
                 <a:latin typeface="Arial"/>
               </a:rPr>
-              <a:t>Consequence:</a:t>
-            </a:r>
-            <a:r>
-              <a:rPr sz="950" b="0" i="0">
+              <a:t>Why it matters:</a:t>
+            </a:r>
+            <a:r>
+              <a:rPr sz="900" b="0" i="0">
                 <a:solidFill>
                   <a:srgbClr val="334155"/>
                 </a:solidFill>
                 <a:latin typeface="Arial"/>
               </a:rPr>
-              <a:t> Small pH electrodes drift and need wet storage; offsets distort Δ.</a:t>
+              <a:t> Small pH probes drift and need to stay wet. A small error ruins the before-and-after comparison.</a:t>
             </a:r>
           </a:p>
           <a:p>
@@ -39804,22 +39804,22 @@
               <a:buNone/>
             </a:pPr>
             <a:r>
-              <a:rPr sz="950" b="1" i="0">
+              <a:rPr sz="900" b="1" i="0">
                 <a:solidFill>
                   <a:srgbClr val="0F172A"/>
                 </a:solidFill>
                 <a:latin typeface="Arial"/>
               </a:rPr>
-              <a:t>Test / monitor:</a:t>
-            </a:r>
-            <a:r>
-              <a:rPr sz="950" b="0" i="0">
+              <a:t>How we’ll check:</a:t>
+            </a:r>
+            <a:r>
+              <a:rPr sz="900" b="0" i="0">
                 <a:solidFill>
                   <a:srgbClr val="334155"/>
                 </a:solidFill>
                 <a:latin typeface="Arial"/>
               </a:rPr>
-              <a:t> Drift vs bench reference over 4 h; storage-cap protocol.</a:t>
+              <a:t> Compare against a lab-grade probe over 4 hours; use a wet storage cap.</a:t>
             </a:r>
           </a:p>
         </p:txBody>
@@ -40019,7 +40019,7 @@
                 </a:solidFill>
                 <a:latin typeface="Arial"/>
               </a:rPr>
-              <a:t>Interpreting combined readings</a:t>
+              <a:t>Making sense of mixed readings</a:t>
             </a:r>
           </a:p>
           <a:p>
@@ -40030,22 +40030,22 @@
               <a:buNone/>
             </a:pPr>
             <a:r>
-              <a:rPr sz="950" b="1" i="0">
+              <a:rPr sz="900" b="1" i="0">
                 <a:solidFill>
                   <a:srgbClr val="0F172A"/>
                 </a:solidFill>
                 <a:latin typeface="Arial"/>
               </a:rPr>
-              <a:t>Consequence:</a:t>
-            </a:r>
-            <a:r>
-              <a:rPr sz="950" b="0" i="0">
+              <a:t>Why it matters:</a:t>
+            </a:r>
+            <a:r>
+              <a:rPr sz="900" b="0" i="0">
                 <a:solidFill>
                   <a:srgbClr val="334155"/>
                 </a:solidFill>
                 <a:latin typeface="Arial"/>
               </a:rPr>
-              <a:t> Ambiguous pH/TDS/turbidity/EC combinations may trigger the wrong adaptation.</a:t>
+              <a:t> Some combinations of pH, TDS and cloudiness are confusing and could lead to the wrong choice.</a:t>
             </a:r>
           </a:p>
           <a:p>
@@ -40056,22 +40056,22 @@
               <a:buNone/>
             </a:pPr>
             <a:r>
-              <a:rPr sz="950" b="1" i="0">
+              <a:rPr sz="900" b="1" i="0">
                 <a:solidFill>
                   <a:srgbClr val="0F172A"/>
                 </a:solidFill>
                 <a:latin typeface="Arial"/>
               </a:rPr>
-              <a:t>Test / monitor:</a:t>
-            </a:r>
-            <a:r>
-              <a:rPr sz="950" b="0" i="0">
+              <a:t>How we’ll check:</a:t>
+            </a:r>
+            <a:r>
+              <a:rPr sz="900" b="0" i="0">
                 <a:solidFill>
                   <a:srgbClr val="334155"/>
                 </a:solidFill>
                 <a:latin typeface="Arial"/>
               </a:rPr>
-              <a:t> Prepared samples exercise every rule in the decision table.</a:t>
+              <a:t> Prepare test water for every rule we wrote, and try each one.</a:t>
             </a:r>
           </a:p>
         </p:txBody>
@@ -40271,7 +40271,7 @@
                 </a:solidFill>
                 <a:latin typeface="Arial"/>
               </a:rPr>
-              <a:t>Adapting with one cartridge</a:t>
+              <a:t>One filter can’t fix everything</a:t>
             </a:r>
           </a:p>
           <a:p>
@@ -40282,22 +40282,22 @@
               <a:buNone/>
             </a:pPr>
             <a:r>
-              <a:rPr sz="950" b="1" i="0">
+              <a:rPr sz="900" b="1" i="0">
                 <a:solidFill>
                   <a:srgbClr val="0F172A"/>
                 </a:solidFill>
                 <a:latin typeface="Arial"/>
               </a:rPr>
-              <a:t>Consequence:</a:t>
-            </a:r>
-            <a:r>
-              <a:rPr sz="950" b="0" i="0">
+              <a:t>Why it matters:</a:t>
+            </a:r>
+            <a:r>
+              <a:rPr sz="900" b="0" i="0">
                 <a:solidFill>
                   <a:srgbClr val="334155"/>
                 </a:solidFill>
                 <a:latin typeface="Arial"/>
               </a:rPr>
-              <a:t> A pocket cartridge cannot correct every condition (e.g., high TDS).</a:t>
+              <a:t> A pocket cartridge can’t lower high TDS, for example.</a:t>
             </a:r>
           </a:p>
           <a:p>
@@ -40308,22 +40308,22 @@
               <a:buNone/>
             </a:pPr>
             <a:r>
-              <a:rPr sz="950" b="1" i="0">
+              <a:rPr sz="900" b="1" i="0">
                 <a:solidFill>
                   <a:srgbClr val="0F172A"/>
                 </a:solidFill>
                 <a:latin typeface="Arial"/>
               </a:rPr>
-              <a:t>Test / monitor:</a:t>
-            </a:r>
-            <a:r>
-              <a:rPr sz="950" b="0" i="0">
+              <a:t>How we’ll check:</a:t>
+            </a:r>
+            <a:r>
+              <a:rPr sz="900" b="0" i="0">
                 <a:solidFill>
                   <a:srgbClr val="334155"/>
                 </a:solidFill>
                 <a:latin typeface="Arial"/>
               </a:rPr>
-              <a:t> Verify warnings fire for out-of-capability cases.</a:t>
+              <a:t> Check that the capsule warns every time it can’t help.</a:t>
             </a:r>
           </a:p>
         </p:txBody>
@@ -40523,7 +40523,7 @@
                 </a:solidFill>
                 <a:latin typeface="Arial"/>
               </a:rPr>
-              <a:t>Shared-cell flow &amp; carry-over</a:t>
+              <a:t>Sharing one test cell</a:t>
             </a:r>
           </a:p>
           <a:p>
@@ -40534,22 +40534,22 @@
               <a:buNone/>
             </a:pPr>
             <a:r>
-              <a:rPr sz="950" b="1" i="0">
+              <a:rPr sz="900" b="1" i="0">
                 <a:solidFill>
                   <a:srgbClr val="0F172A"/>
                 </a:solidFill>
                 <a:latin typeface="Arial"/>
               </a:rPr>
-              <a:t>Consequence:</a:t>
-            </a:r>
-            <a:r>
-              <a:rPr sz="950" b="0" i="0">
+              <a:t>Why it matters:</a:t>
+            </a:r>
+            <a:r>
+              <a:rPr sz="900" b="0" i="0">
                 <a:solidFill>
                   <a:srgbClr val="334155"/>
                 </a:solidFill>
                 <a:latin typeface="Arial"/>
               </a:rPr>
-              <a:t> Bubbles distort turbidity; raw residue can bias M2.</a:t>
+              <a:t> Bubbles confuse the cloudiness sensor, and leftover raw water could skew the second test.</a:t>
             </a:r>
           </a:p>
           <a:p>
@@ -40560,22 +40560,22 @@
               <a:buNone/>
             </a:pPr>
             <a:r>
-              <a:rPr sz="950" b="1" i="0">
+              <a:rPr sz="900" b="1" i="0">
                 <a:solidFill>
                   <a:srgbClr val="0F172A"/>
                 </a:solidFill>
                 <a:latin typeface="Arial"/>
               </a:rPr>
-              <a:t>Test / monitor:</a:t>
-            </a:r>
-            <a:r>
-              <a:rPr sz="950" b="0" i="0">
+              <a:t>How we’ll check:</a:t>
+            </a:r>
+            <a:r>
+              <a:rPr sz="900" b="0" i="0">
                 <a:solidFill>
                   <a:srgbClr val="334155"/>
                 </a:solidFill>
                 <a:latin typeface="Arial"/>
               </a:rPr>
-              <a:t> Carry-over test; flowing vs settled readings.</a:t>
+              <a:t> Measure leftover water; compare readings while flowing and while still.</a:t>
             </a:r>
           </a:p>
         </p:txBody>
@@ -40775,7 +40775,7 @@
                 </a:solidFill>
                 <a:latin typeface="Arial"/>
               </a:rPr>
-              <a:t>Consistent flow on battery power</a:t>
+              <a:t>Steady flow on a battery</a:t>
             </a:r>
           </a:p>
           <a:p>
@@ -40786,22 +40786,22 @@
               <a:buNone/>
             </a:pPr>
             <a:r>
-              <a:rPr sz="950" b="1" i="0">
+              <a:rPr sz="900" b="1" i="0">
                 <a:solidFill>
                   <a:srgbClr val="0F172A"/>
                 </a:solidFill>
                 <a:latin typeface="Arial"/>
               </a:rPr>
-              <a:t>Consequence:</a:t>
-            </a:r>
-            <a:r>
-              <a:rPr sz="950" b="0" i="0">
+              <a:t>Why it matters:</a:t>
+            </a:r>
+            <a:r>
+              <a:rPr sz="900" b="0" i="0">
                 <a:solidFill>
                   <a:srgbClr val="334155"/>
                 </a:solidFill>
                 <a:latin typeface="Arial"/>
               </a:rPr>
-              <a:t> Membrane loading and voltage sag change contact time.</a:t>
+              <a:t> As the filter fills up and the battery drains, the flow changes.</a:t>
             </a:r>
           </a:p>
           <a:p>
@@ -40812,22 +40812,22 @@
               <a:buNone/>
             </a:pPr>
             <a:r>
-              <a:rPr sz="950" b="1" i="0">
+              <a:rPr sz="900" b="1" i="0">
                 <a:solidFill>
                   <a:srgbClr val="0F172A"/>
                 </a:solidFill>
                 <a:latin typeface="Arial"/>
               </a:rPr>
-              <a:t>Test / monitor:</a:t>
-            </a:r>
-            <a:r>
-              <a:rPr sz="950" b="0" i="0">
+              <a:t>How we’ll check:</a:t>
+            </a:r>
+            <a:r>
+              <a:rPr sz="900" b="0" i="0">
                 <a:solidFill>
                   <a:srgbClr val="334155"/>
                 </a:solidFill>
                 <a:latin typeface="Arial"/>
               </a:rPr>
-              <a:t> Flow vs battery level and litres treated.</a:t>
+              <a:t> Log flow against battery level and litres filtered.</a:t>
             </a:r>
           </a:p>
         </p:txBody>
@@ -41027,7 +41027,7 @@
                 </a:solidFill>
                 <a:latin typeface="Arial"/>
               </a:rPr>
-              <a:t>Micro pump &amp; valve integration</a:t>
+              <a:t>Tiny pumps and valves</a:t>
             </a:r>
           </a:p>
           <a:p>
@@ -41038,22 +41038,22 @@
               <a:buNone/>
             </a:pPr>
             <a:r>
-              <a:rPr sz="950" b="1" i="0">
+              <a:rPr sz="900" b="1" i="0">
                 <a:solidFill>
                   <a:srgbClr val="0F172A"/>
                 </a:solidFill>
                 <a:latin typeface="Arial"/>
               </a:rPr>
-              <a:t>Consequence:</a:t>
-            </a:r>
-            <a:r>
-              <a:rPr sz="950" b="0" i="0">
+              <a:t>Why it matters:</a:t>
+            </a:r>
+            <a:r>
+              <a:rPr sz="900" b="0" i="0">
                 <a:solidFill>
                   <a:srgbClr val="334155"/>
                 </a:solidFill>
                 <a:latin typeface="Arial"/>
               </a:rPr>
-              <a:t> Priming, air locks and small valve orifices.</a:t>
+              <a:t> Small pumps need priming and air pockets can block tiny valves.</a:t>
             </a:r>
           </a:p>
           <a:p>
@@ -41064,22 +41064,22 @@
               <a:buNone/>
             </a:pPr>
             <a:r>
-              <a:rPr sz="950" b="1" i="0">
+              <a:rPr sz="900" b="1" i="0">
                 <a:solidFill>
                   <a:srgbClr val="0F172A"/>
                 </a:solidFill>
                 <a:latin typeface="Arial"/>
               </a:rPr>
-              <a:t>Test / monitor:</a:t>
-            </a:r>
-            <a:r>
-              <a:rPr sz="950" b="0" i="0">
+              <a:t>How we’ll check:</a:t>
+            </a:r>
+            <a:r>
+              <a:rPr sz="900" b="0" i="0">
                 <a:solidFill>
                   <a:srgbClr val="334155"/>
                 </a:solidFill>
                 <a:latin typeface="Arial"/>
               </a:rPr>
-              <a:t> Switching-sequence and priming tests.</a:t>
+              <a:t> Test the switching order and priming.</a:t>
             </a:r>
           </a:p>
         </p:txBody>
@@ -41279,7 +41279,7 @@
                 </a:solidFill>
                 <a:latin typeface="Arial"/>
               </a:rPr>
-              <a:t>Cartridge clogging &amp; changing performance</a:t>
+              <a:t>Filters clogging over time</a:t>
             </a:r>
           </a:p>
           <a:p>
@@ -41290,22 +41290,22 @@
               <a:buNone/>
             </a:pPr>
             <a:r>
-              <a:rPr sz="950" b="1" i="0">
+              <a:rPr sz="900" b="1" i="0">
                 <a:solidFill>
                   <a:srgbClr val="0F172A"/>
                 </a:solidFill>
                 <a:latin typeface="Arial"/>
               </a:rPr>
-              <a:t>Consequence:</a:t>
-            </a:r>
-            <a:r>
-              <a:rPr sz="950" b="0" i="0">
+              <a:t>Why it matters:</a:t>
+            </a:r>
+            <a:r>
+              <a:rPr sz="900" b="0" i="0">
                 <a:solidFill>
                   <a:srgbClr val="334155"/>
                 </a:solidFill>
                 <a:latin typeface="Arial"/>
               </a:rPr>
-              <a:t> Declining flow and removal as the cartridge loads.</a:t>
+              <a:t> Flow drops and cleaning gets worse as the cartridge fills up.</a:t>
             </a:r>
           </a:p>
           <a:p>
@@ -41316,22 +41316,22 @@
               <a:buNone/>
             </a:pPr>
             <a:r>
-              <a:rPr sz="950" b="1" i="0">
+              <a:rPr sz="900" b="1" i="0">
                 <a:solidFill>
                   <a:srgbClr val="0F172A"/>
                 </a:solidFill>
                 <a:latin typeface="Arial"/>
               </a:rPr>
-              <a:t>Test / monitor:</a:t>
-            </a:r>
-            <a:r>
-              <a:rPr sz="950" b="0" i="0">
+              <a:t>How we’ll check:</a:t>
+            </a:r>
+            <a:r>
+              <a:rPr sz="900" b="0" i="0">
                 <a:solidFill>
                   <a:srgbClr val="334155"/>
                 </a:solidFill>
                 <a:latin typeface="Arial"/>
               </a:rPr>
-              <a:t> Pump-current trend vs volume treated.</a:t>
+              <a:t> Track pump current against litres filtered.</a:t>
             </a:r>
           </a:p>
         </p:txBody>
@@ -41531,7 +41531,7 @@
                 </a:solidFill>
                 <a:latin typeface="Arial"/>
               </a:rPr>
-              <a:t>Reliability of before/after comparison</a:t>
+              <a:t>Fair before-and-after tests</a:t>
             </a:r>
           </a:p>
           <a:p>
@@ -41542,22 +41542,22 @@
               <a:buNone/>
             </a:pPr>
             <a:r>
-              <a:rPr sz="950" b="1" i="0">
+              <a:rPr sz="900" b="1" i="0">
                 <a:solidFill>
                   <a:srgbClr val="0F172A"/>
                 </a:solidFill>
                 <a:latin typeface="Arial"/>
               </a:rPr>
-              <a:t>Consequence:</a:t>
-            </a:r>
-            <a:r>
-              <a:rPr sz="950" b="0" i="0">
+              <a:t>Why it matters:</a:t>
+            </a:r>
+            <a:r>
+              <a:rPr sz="900" b="0" i="0">
                 <a:solidFill>
                   <a:srgbClr val="334155"/>
                 </a:solidFill>
                 <a:latin typeface="Arial"/>
               </a:rPr>
-              <a:t> Temperature or timing differences between M1 and M2.</a:t>
+              <a:t> Temperature or timing differences between the two tests can make the numbers misleading.</a:t>
             </a:r>
           </a:p>
           <a:p>
@@ -41568,22 +41568,22 @@
               <a:buNone/>
             </a:pPr>
             <a:r>
-              <a:rPr sz="950" b="1" i="0">
+              <a:rPr sz="900" b="1" i="0">
                 <a:solidFill>
                   <a:srgbClr val="0F172A"/>
                 </a:solidFill>
                 <a:latin typeface="Arial"/>
               </a:rPr>
-              <a:t>Test / monitor:</a:t>
-            </a:r>
-            <a:r>
-              <a:rPr sz="950" b="0" i="0">
+              <a:t>How we’ll check:</a:t>
+            </a:r>
+            <a:r>
+              <a:rPr sz="900" b="0" i="0">
                 <a:solidFill>
                   <a:srgbClr val="334155"/>
                 </a:solidFill>
                 <a:latin typeface="Arial"/>
               </a:rPr>
-              <a:t> Temperature-compensated repeat tests.</a:t>
+              <a:t> Correct for temperature and repeat the tests.</a:t>
             </a:r>
           </a:p>
         </p:txBody>
@@ -41783,7 +41783,7 @@
                 </a:solidFill>
                 <a:latin typeface="Arial"/>
               </a:rPr>
-              <a:t>Measured improvement ≠ drinking-water safety</a:t>
+              <a:t>Better numbers aren’t the same as safe water</a:t>
             </a:r>
           </a:p>
           <a:p>
@@ -41794,22 +41794,22 @@
               <a:buNone/>
             </a:pPr>
             <a:r>
-              <a:rPr sz="950" b="1" i="0">
+              <a:rPr sz="900" b="1" i="0">
                 <a:solidFill>
                   <a:srgbClr val="0F172A"/>
                 </a:solidFill>
                 <a:latin typeface="Arial"/>
               </a:rPr>
-              <a:t>Consequence:</a:t>
-            </a:r>
-            <a:r>
-              <a:rPr sz="950" b="0" i="0">
+              <a:t>Why it matters:</a:t>
+            </a:r>
+            <a:r>
+              <a:rPr sz="900" b="0" i="0">
                 <a:solidFill>
                   <a:srgbClr val="334155"/>
                 </a:solidFill>
                 <a:latin typeface="Arial"/>
               </a:rPr>
-              <a:t> Risk of false assurance about unmeasured hazards.</a:t>
+              <a:t> People might feel safe about things we can’t measure.</a:t>
             </a:r>
           </a:p>
           <a:p>
@@ -41820,22 +41820,22 @@
               <a:buNone/>
             </a:pPr>
             <a:r>
-              <a:rPr sz="950" b="1" i="0">
+              <a:rPr sz="900" b="1" i="0">
                 <a:solidFill>
                   <a:srgbClr val="0F172A"/>
                 </a:solidFill>
                 <a:latin typeface="Arial"/>
               </a:rPr>
-              <a:t>Test / monitor:</a:t>
-            </a:r>
-            <a:r>
-              <a:rPr sz="950" b="0" i="0">
+              <a:t>How we’ll check:</a:t>
+            </a:r>
+            <a:r>
+              <a:rPr sz="900" b="0" i="0">
                 <a:solidFill>
                   <a:srgbClr val="334155"/>
                 </a:solidFill>
                 <a:latin typeface="Arial"/>
               </a:rPr>
-              <a:t> UI wording review; limitation notice always shown.</a:t>
+              <a:t> Review the wording carefully and always show the limits.</a:t>
             </a:r>
           </a:p>
         </p:txBody>
@@ -42035,7 +42035,7 @@
                 </a:solidFill>
                 <a:latin typeface="Arial"/>
               </a:rPr>
-              <a:t>Miniaturisation, sealing &amp; cost</a:t>
+              <a:t>Fitting it all in a pocket</a:t>
             </a:r>
           </a:p>
           <a:p>
@@ -42046,22 +42046,22 @@
               <a:buNone/>
             </a:pPr>
             <a:r>
-              <a:rPr sz="950" b="1" i="0">
+              <a:rPr sz="900" b="1" i="0">
                 <a:solidFill>
                   <a:srgbClr val="0F172A"/>
                 </a:solidFill>
                 <a:latin typeface="Arial"/>
               </a:rPr>
-              <a:t>Consequence:</a:t>
-            </a:r>
-            <a:r>
-              <a:rPr sz="950" b="0" i="0">
+              <a:t>Why it matters:</a:t>
+            </a:r>
+            <a:r>
+              <a:rPr sz="900" b="0" i="0">
                 <a:solidFill>
                   <a:srgbClr val="334155"/>
                 </a:solidFill>
                 <a:latin typeface="Arial"/>
               </a:rPr>
-              <a:t> Fitting electronics, battery and wet path into a sealed pocket body.</a:t>
+              <a:t> Electronics, battery and water parts all need to fit in a small, sealed body.</a:t>
             </a:r>
           </a:p>
           <a:p>
@@ -42072,22 +42072,22 @@
               <a:buNone/>
             </a:pPr>
             <a:r>
-              <a:rPr sz="950" b="1" i="0">
+              <a:rPr sz="900" b="1" i="0">
                 <a:solidFill>
                   <a:srgbClr val="0F172A"/>
                 </a:solidFill>
                 <a:latin typeface="Arial"/>
               </a:rPr>
-              <a:t>Test / monitor:</a:t>
-            </a:r>
-            <a:r>
-              <a:rPr sz="950" b="0" i="0">
+              <a:t>How we’ll check:</a:t>
+            </a:r>
+            <a:r>
+              <a:rPr sz="900" b="0" i="0">
                 <a:solidFill>
                   <a:srgbClr val="334155"/>
                 </a:solidFill>
                 <a:latin typeface="Arial"/>
               </a:rPr>
-              <a:t> Mass, size and leak checks per build; BOM vs budget.</a:t>
+              <a:t> Check size, weight and leaks on every build; watch the budget.</a:t>
             </a:r>
           </a:p>
         </p:txBody>
@@ -42155,7 +42155,7 @@
           <a:lstStyle/>
           <a:p>
             <a:r>
-              <a:t>Potential Solutions &amp; Risk Mitigation</a:t>
+              <a:t>Potential Solutions: How We Plan to Handle Each One</a:t>
             </a:r>
           </a:p>
         </p:txBody>
@@ -42343,7 +42343,7 @@
                           </a:solidFill>
                           <a:latin typeface="Arial"/>
                         </a:rPr>
-                        <a:t>Primary mitigation</a:t>
+                        <a:t>Our main plan</a:t>
                       </a:r>
                     </a:p>
                   </a:txBody>
@@ -42382,7 +42382,7 @@
                           </a:solidFill>
                           <a:latin typeface="Arial"/>
                         </a:rPr>
-                        <a:t>Backup / fallback</a:t>
+                        <a:t>If that isn’t enough</a:t>
                       </a:r>
                     </a:p>
                   </a:txBody>
@@ -42462,7 +42462,7 @@
                           </a:solidFill>
                           <a:latin typeface="Arial"/>
                         </a:rPr>
-                        <a:t>Two-point pH calibration (4.00 / 7.00), wet storage cap, temperature compensation; calibration date logged</a:t>
+                        <a:t>Calibrate pH at two points (pH 4 and 7), keep the probe wet, correct for temperature, and log each calibration</a:t>
                       </a:r>
                     </a:p>
                   </a:txBody>
@@ -42501,7 +42501,7 @@
                           </a:solidFill>
                           <a:latin typeface="Arial"/>
                         </a:rPr>
-                        <a:t>Recalibration prompt when buffer check deviates &gt; 0.1 pH</a:t>
+                        <a:t>Ask for recalibration if a check is off by more than 0.1 pH</a:t>
                       </a:r>
                     </a:p>
                   </a:txBody>
@@ -42581,7 +42581,7 @@
                           </a:solidFill>
                           <a:latin typeface="Arial"/>
                         </a:rPr>
-                        <a:t>Validity checks (range, rate of change, SD) before any decision; rule table with explicit priorities</a:t>
+                        <a:t>Sanity-check every reading before deciding, and follow a clear set of rules</a:t>
                       </a:r>
                     </a:p>
                   </a:txBody>
@@ -42620,7 +42620,7 @@
                           </a:solidFill>
                           <a:latin typeface="Arial"/>
                         </a:rPr>
-                        <a:t>Default to slowest flow + UV-C with warning</a:t>
+                        <a:t>Use the slowest flow plus UV, and warn the user</a:t>
                       </a:r>
                     </a:p>
                   </a:txBody>
@@ -42700,7 +42700,7 @@
                           </a:solidFill>
                           <a:latin typeface="Arial"/>
                         </a:rPr>
-                        <a:t>Cartridge ID read by the capsule; out-of-capability warnings</a:t>
+                        <a:t>The capsule knows which cartridge is fitted and warns when it can’t help</a:t>
                       </a:r>
                     </a:p>
                   </a:txBody>
@@ -42739,7 +42739,7 @@
                           </a:solidFill>
                           <a:latin typeface="Arial"/>
                         </a:rPr>
-                        <a:t>Specialist / laboratory testing recommendation</a:t>
+                        <a:t>Suggest a proper lab test</a:t>
                       </a:r>
                     </a:p>
                   </a:txBody>
@@ -42819,7 +42819,7 @@
                           </a:solidFill>
                           <a:latin typeface="Arial"/>
                         </a:rPr>
-                        <a:t>Settle time before M1/M2; 15 mL flush to reject; isolated pH channel</a:t>
+                        <a:t>Let water settle before each test, rinse with 15 mL, keep the pH sensor isolated</a:t>
                       </a:r>
                     </a:p>
                   </a:txBody>
@@ -42858,7 +42858,7 @@
                           </a:solidFill>
                           <a:latin typeface="Arial"/>
                         </a:rPr>
-                        <a:t>Dual-cell variant (separate raw and treated cells)</a:t>
+                        <a:t>Switch to a version with two separate test cells</a:t>
                       </a:r>
                     </a:p>
                   </a:txBody>
@@ -42938,7 +42938,7 @@
                           </a:solidFill>
                           <a:latin typeface="Arial"/>
                         </a:rPr>
-                        <a:t>Closed-loop pump PWM against calibrated flow; low-battery cut-off</a:t>
+                        <a:t>Adjust the pump to hold a steady flow, and cut off on low battery</a:t>
                       </a:r>
                     </a:p>
                   </a:txBody>
@@ -42977,7 +42977,7 @@
                           </a:solidFill>
                           <a:latin typeface="Arial"/>
                         </a:rPr>
-                        <a:t>Fixed-time cycle with flow logging</a:t>
+                        <a:t>Run for a fixed time and log the flow</a:t>
                       </a:r>
                     </a:p>
                   </a:txBody>
@@ -43057,7 +43057,7 @@
                           </a:solidFill>
                           <a:latin typeface="Arial"/>
                         </a:rPr>
-                        <a:t>Valves set before pump starts; priming routine; check valve on intake</a:t>
+                        <a:t>Set the valves before the pump starts, prime it, and add a one-way valve at the intake</a:t>
                       </a:r>
                     </a:p>
                   </a:txBody>
@@ -43096,7 +43096,7 @@
                           </a:solidFill>
                           <a:latin typeface="Arial"/>
                         </a:rPr>
-                        <a:t>Manual prime by squeezing intake hose</a:t>
+                        <a:t>Prime by hand by squeezing the hose</a:t>
                       </a:r>
                     </a:p>
                   </a:txBody>
@@ -43176,7 +43176,7 @@
                           </a:solidFill>
                           <a:latin typeface="Arial"/>
                         </a:rPr>
-                        <a:t>Pump-current and litres trend → replace-cartridge prompt</a:t>
+                        <a:t>Watch pump current and litres filtered, and prompt for a new cartridge</a:t>
                       </a:r>
                     </a:p>
                   </a:txBody>
@@ -43215,7 +43215,7 @@
                           </a:solidFill>
                           <a:latin typeface="Arial"/>
                         </a:rPr>
-                        <a:t>Replace cartridge at a fixed volume interval</a:t>
+                        <a:t>Swap the cartridge after a fixed number of litres</a:t>
                       </a:r>
                     </a:p>
                   </a:txBody>
@@ -43295,7 +43295,7 @@
                           </a:solidFill>
                           <a:latin typeface="Arial"/>
                         </a:rPr>
-                        <a:t>Same sensors for M1 and M2; temperature compensation; verify before dispensing</a:t>
+                        <a:t>Same sensors for both tests, temperature correction, check before pouring</a:t>
                       </a:r>
                     </a:p>
                   </a:txBody>
@@ -43334,7 +43334,7 @@
                           </a:solidFill>
                           <a:latin typeface="Arial"/>
                         </a:rPr>
-                        <a:t>Repeat M2 and report both values</a:t>
+                        <a:t>Repeat the second test and show both results</a:t>
                       </a:r>
                     </a:p>
                   </a:txBody>
@@ -43414,7 +43414,7 @@
                           </a:solidFill>
                           <a:latin typeface="Arial"/>
                         </a:rPr>
-                        <a:t>Never displays “safe”; reports measured Δ only; recommends testing</a:t>
+                        <a:t>Never say “safe”; show only the change we measured; suggest testing</a:t>
                       </a:r>
                     </a:p>
                   </a:txBody>
@@ -43453,7 +43453,7 @@
                           </a:solidFill>
                           <a:latin typeface="Arial"/>
                         </a:rPr>
-                        <a:t>Printed limitation label on the capsule</a:t>
+                        <a:t>A printed label on the capsule explaining its limits</a:t>
                       </a:r>
                     </a:p>
                   </a:txBody>
@@ -43533,7 +43533,7 @@
                           </a:solidFill>
                           <a:latin typeface="Arial"/>
                         </a:rPr>
-                        <a:t>v1 printed larger for access, then miniaturised; UV-C optional; quotations in Month 1</a:t>
+                        <a:t>Print the first version a bit bigger, then shrink it; UV is optional; get quotes early</a:t>
                       </a:r>
                     </a:p>
                   </a:txBody>
@@ -43572,7 +43572,7 @@
                           </a:solidFill>
                           <a:latin typeface="Arial"/>
                         </a:rPr>
-                        <a:t>Bench-board electronics in v1, custom PCB in Stage 3</a:t>
+                        <a:t>Use ready-made boards first and a custom board for Stage 3</a:t>
                       </a:r>
                     </a:p>
                   </a:txBody>
@@ -43706,7 +43706,7 @@
                 </a:solidFill>
                 <a:latin typeface="Arial"/>
               </a:rPr>
-              <a:t>Future development</a:t>
+              <a:t>What we would like to add later</a:t>
             </a:r>
           </a:p>
         </p:txBody>
@@ -43744,7 +43744,7 @@
                 </a:solidFill>
                 <a:latin typeface="Arial"/>
               </a:rPr>
-              <a:t>Not present capabilities</a:t>
+              <a:t>Future ideas, not part of this prototype</a:t>
             </a:r>
           </a:p>
         </p:txBody>
@@ -43787,7 +43787,7 @@
                 </a:solidFill>
                 <a:latin typeface="Arial"/>
               </a:rPr>
-              <a:t>Additional micro-sensors (e.g., ORP, free chlorine)</a:t>
+              <a:t>More sensors, such as chlorine</a:t>
             </a:r>
           </a:p>
           <a:p>
@@ -43809,7 +43809,7 @@
                 </a:solidFill>
                 <a:latin typeface="Arial"/>
               </a:rPr>
-              <a:t>Specialty cartridges: ion-exchange, pH-adjusting media</a:t>
+              <a:t>Special cartridges that can lower TDS or adjust pH</a:t>
             </a:r>
           </a:p>
           <a:p>
@@ -43831,7 +43831,7 @@
                 </a:solidFill>
                 <a:latin typeface="Arial"/>
               </a:rPr>
-              <a:t>Reading history to spot recurring source changes</a:t>
+              <a:t>A reading history that spots when a source keeps changing</a:t>
             </a:r>
           </a:p>
           <a:p>
@@ -43853,7 +43853,7 @@
                 </a:solidFill>
                 <a:latin typeface="Arial"/>
               </a:rPr>
-              <a:t>Predictive cartridge replacement from pump current and volume</a:t>
+              <a:t>Telling you when the filter is about to wear out</a:t>
             </a:r>
           </a:p>
           <a:p>
@@ -43875,7 +43875,7 @@
                 </a:solidFill>
                 <a:latin typeface="Arial"/>
               </a:rPr>
-              <a:t>IoT sync of many capsules to a central dashboard</a:t>
+              <a:t>Linking many capsules to one online dashboard</a:t>
             </a:r>
           </a:p>
           <a:p>
@@ -43897,7 +43897,7 @@
                 </a:solidFill>
                 <a:latin typeface="Arial"/>
               </a:rPr>
-              <a:t>Community-scale version for wells and lakes</a:t>
+              <a:t>A bigger version for wells and lakes</a:t>
             </a:r>
           </a:p>
         </p:txBody>
@@ -43935,7 +43935,7 @@
                 </a:solidFill>
                 <a:latin typeface="Arial"/>
               </a:rPr>
-              <a:t>STAGED TESTING PROTOCOL BEFORE ANY PUBLIC DEMONSTRATION</a:t>
+              <a:t>HOW WE WILL TEST BEFORE SHOWING IT TO ANYONE</a:t>
             </a:r>
           </a:p>
         </p:txBody>
@@ -43992,7 +43992,7 @@
                 </a:solidFill>
                 <a:latin typeface="Arial"/>
               </a:rPr>
-              <a:t>Dry bench (electronics)</a:t>
+              <a:t>Electronics on the bench</a:t>
             </a:r>
           </a:p>
         </p:txBody>
@@ -44049,7 +44049,7 @@
                 </a:solidFill>
                 <a:latin typeface="Arial"/>
               </a:rPr>
-              <a:t>Clean-water hydraulics &amp; leaks</a:t>
+              <a:t>Clean water and leaks</a:t>
             </a:r>
           </a:p>
         </p:txBody>
@@ -44106,7 +44106,7 @@
                 </a:solidFill>
                 <a:latin typeface="Arial"/>
               </a:rPr>
-              <a:t>Reference solutions</a:t>
+              <a:t>Reference liquids</a:t>
             </a:r>
           </a:p>
         </p:txBody>
@@ -44163,7 +44163,7 @@
                 </a:solidFill>
                 <a:latin typeface="Arial"/>
               </a:rPr>
-              <a:t>Prepared samples</a:t>
+              <a:t>Prepared water samples</a:t>
             </a:r>
           </a:p>
         </p:txBody>
@@ -44220,7 +44220,7 @@
                 </a:solidFill>
                 <a:latin typeface="Arial"/>
               </a:rPr>
-              <a:t>Fault injection</a:t>
+              <a:t>Making faults on purpose</a:t>
             </a:r>
           </a:p>
         </p:txBody>
@@ -44277,7 +44277,7 @@
                 </a:solidFill>
                 <a:latin typeface="Arial"/>
               </a:rPr>
-              <a:t>Supervised demonstration</a:t>
+              <a:t>Supervised demo</a:t>
             </a:r>
           </a:p>
         </p:txBody>
@@ -44339,7 +44339,7 @@
                 </a:solidFill>
                 <a:latin typeface="Arial"/>
               </a:rPr>
-              <a:t>Traceability:</a:t>
+              <a:t>Matching up:</a:t>
             </a:r>
             <a:r>
               <a:rPr sz="850" b="0" i="0">
@@ -44348,7 +44348,7 @@
                 </a:solidFill>
                 <a:latin typeface="Arial"/>
               </a:rPr>
-              <a:t> row numbers 1–10 correspond to the challenges on the previous slide.</a:t>
+              <a:t> the numbers 1 to 10 match the challenges on the previous slide.</a:t>
             </a:r>
           </a:p>
         </p:txBody>
@@ -44570,7 +44570,7 @@
                 </a:solidFill>
                 <a:latin typeface="Arial"/>
               </a:rPr>
-              <a:t> Hydra Nexus Stage 1 Proposal — team document supplied as Hydra_Nexus_Stage1_Proposal.pdf (primary project source).</a:t>
+              <a:t> Hydra Nexus Stage 1 Proposal, our own submission (Hydra_Nexus_Stage1_Proposal.pdf).</a:t>
             </a:r>
           </a:p>
           <a:p>
@@ -44596,7 +44596,7 @@
                 </a:solidFill>
                 <a:latin typeface="Arial"/>
               </a:rPr>
-              <a:t> Vishwakarma Awards 2026–27 Stage 2 Submission Template — Maker Bhavan Foundation (supplied .pptx).</a:t>
+              <a:t> Vishwakarma Awards 2026–27 Stage 2 Submission Template, Maker Bhavan Foundation.</a:t>
             </a:r>
           </a:p>
           <a:p>
@@ -44622,7 +44622,7 @@
                 </a:solidFill>
                 <a:latin typeface="Arial"/>
               </a:rPr>
-              <a:t> Espressif Systems, ESP32-C3 Series Datasheet — documentation.espressif.com/esp32-c3_datasheet_en.pdf</a:t>
+              <a:t> Espressif Systems, ESP32-C3 Series Datasheet. documentation.espressif.com/esp32-c3_datasheet_en.pdf</a:t>
             </a:r>
           </a:p>
           <a:p>
@@ -44648,7 +44648,7 @@
                 </a:solidFill>
                 <a:latin typeface="Arial"/>
               </a:rPr>
-              <a:t> Espressif Systems, ESP32-C3-MINI-1 Module Datasheet — documentation.espressif.com/esp32-c3-mini-1_datasheet_en.pdf</a:t>
+              <a:t> Espressif Systems, ESP32-C3-MINI-1 Module Datasheet. documentation.espressif.com/esp32-c3-mini-1_datasheet_en.pdf</a:t>
             </a:r>
           </a:p>
           <a:p>
@@ -44674,7 +44674,7 @@
                 </a:solidFill>
                 <a:latin typeface="Arial"/>
               </a:rPr>
-              <a:t> DFRobot Wiki, Gravity: Analog pH Sensor V2 (SEN0161-V2) — wiki.dfrobot.com/Gravity__Analog_pH_Sensor_Meter_Kit_V2_SKU_SEN0161-V2</a:t>
+              <a:t> DFRobot Wiki, Gravity Analog pH Sensor V2 (SEN0161-V2). wiki.dfrobot.com/Gravity__Analog_pH_Sensor_Meter_Kit_V2_SKU_SEN0161-V2</a:t>
             </a:r>
           </a:p>
           <a:p>
@@ -44700,7 +44700,7 @@
                 </a:solidFill>
                 <a:latin typeface="Arial"/>
               </a:rPr>
-              <a:t> DFRobot Wiki, Gravity: Analog TDS Sensor/Meter (SEN0244) — wiki.dfrobot.com/Gravity__Analog_TDS_Sensor___Meter_For_Arduino_SKU__SEN0244</a:t>
+              <a:t> DFRobot Wiki, Gravity Analog TDS Sensor (SEN0244). wiki.dfrobot.com/Gravity__Analog_TDS_Sensor___Meter_For_Arduino_SKU__SEN0244</a:t>
             </a:r>
           </a:p>
           <a:p>
@@ -44726,7 +44726,7 @@
                 </a:solidFill>
                 <a:latin typeface="Arial"/>
               </a:rPr>
-              <a:t> DFRobot Wiki, Gravity: Analog Turbidity Sensor (SEN0189) — wiki.dfrobot.com/Turbidity_sensor_SKU__SEN0189</a:t>
+              <a:t> DFRobot Wiki, Gravity Analog Turbidity Sensor (SEN0189). wiki.dfrobot.com/Turbidity_sensor_SKU__SEN0189</a:t>
             </a:r>
           </a:p>
           <a:p>
@@ -44752,7 +44752,7 @@
                 </a:solidFill>
                 <a:latin typeface="Arial"/>
               </a:rPr>
-              <a:t> DFRobot Wiki, Gravity: Analog Signal Isolator (DFR0504) — wiki.dfrobot.com/Gravity__Analog_Signal_Isolator_SKU_DFR0504</a:t>
+              <a:t> DFRobot Wiki, Gravity Analog Signal Isolator (DFR0504). wiki.dfrobot.com/Gravity__Analog_Signal_Isolator_SKU_DFR0504</a:t>
             </a:r>
           </a:p>
           <a:p>
@@ -44778,7 +44778,7 @@
                 </a:solidFill>
                 <a:latin typeface="Arial"/>
               </a:rPr>
-              <a:t> Analog Devices, DS18B20 1-Wire Digital Thermometer datasheet — analog.com/media/en/technical-documentation/data-sheets/DS18B20.pdf</a:t>
+              <a:t> Analog Devices, DS18B20 Digital Thermometer datasheet. analog.com/media/en/technical-documentation/data-sheets/DS18B20.pdf</a:t>
             </a:r>
           </a:p>
           <a:p>
@@ -44804,7 +44804,7 @@
                 </a:solidFill>
                 <a:latin typeface="Arial"/>
               </a:rPr>
-              <a:t> Texas Instruments, ADS111x 16-bit ADC datasheet — ti.com/lit/ds/symlink/ads1115.pdf</a:t>
+              <a:t> Texas Instruments, ADS111x 16-bit ADC datasheet. ti.com/lit/ds/symlink/ads1115.pdf</a:t>
             </a:r>
           </a:p>
         </p:txBody>
@@ -44851,7 +44851,7 @@
                 </a:solidFill>
                 <a:latin typeface="Arial"/>
               </a:rPr>
-              <a:t> DFRobot product pages (list prices accessed 24 Oct 2026): dfrobot.com/product-1782.html (SEN0161-V2), -1662 (SEN0244), -1394 (SEN0189), -1354 (KIT0021), -1621 (DFR0504)</a:t>
+              <a:t> DFRobot product pages, prices checked on 24 Oct 2026: dfrobot.com/product-1782.html (SEN0161-V2), -1662 (SEN0244), -1394 (SEN0189), -1354 (KIT0021), -1621 (DFR0504)</a:t>
             </a:r>
           </a:p>
           <a:p>
@@ -44877,7 +44877,7 @@
                 </a:solidFill>
                 <a:latin typeface="Arial"/>
               </a:rPr>
-              <a:t> Bureau of Indian Standards, IS 10500:2012 Drinking Water — Specification (Second Revision) — bis.gov.in/other/DrinWatIS10500.pdf</a:t>
+              <a:t> Bureau of Indian Standards, IS 10500:2012 Drinking Water Specification. bis.gov.in/other/DrinWatIS10500.pdf</a:t>
             </a:r>
           </a:p>
           <a:p>
@@ -44903,7 +44903,7 @@
                 </a:solidFill>
                 <a:latin typeface="Arial"/>
               </a:rPr>
-              <a:t> World Health Organization, Guidelines for Drinking-water Quality, 4th ed. incorporating the 1st, 2nd and 3rd addenda — who.int/publications/i/item/9789240121225</a:t>
+              <a:t> World Health Organization, Guidelines for Drinking-water Quality, 4th edition with the 1st, 2nd and 3rd addenda. who.int/publications/i/item/9789240121225</a:t>
             </a:r>
           </a:p>
           <a:p>
@@ -44929,7 +44929,7 @@
                 </a:solidFill>
                 <a:latin typeface="Arial"/>
               </a:rPr>
-              <a:t> IEC 60529:1989+A1:1999+A2:2013, Degrees of protection provided by enclosures (IP Code) — IEC, webstore.iec.ch</a:t>
+              <a:t> IEC 60529, Degrees of protection provided by enclosures (IP Code). webstore.iec.ch</a:t>
             </a:r>
           </a:p>
           <a:p>
@@ -44955,7 +44955,7 @@
                 </a:solidFill>
                 <a:latin typeface="Arial"/>
               </a:rPr>
-              <a:t> IEC 62133-2:2017, Safety requirements for portable sealed secondary lithium cells and batteries — IEC, webstore.iec.ch</a:t>
+              <a:t> IEC 62133-2:2017, Safety requirements for portable lithium cells and batteries. webstore.iec.ch</a:t>
             </a:r>
           </a:p>
           <a:p>
@@ -44981,7 +44981,7 @@
                 </a:solidFill>
                 <a:latin typeface="Arial"/>
               </a:rPr>
-              <a:t> ISO 7027-1:2016, Water quality — Determination of turbidity — Part 1: Quantitative methods — iso.org</a:t>
+              <a:t> ISO 7027-1:2016, Water quality, Determination of turbidity, Part 1. iso.org</a:t>
             </a:r>
           </a:p>
           <a:p>
@@ -45007,7 +45007,7 @@
                 </a:solidFill>
                 <a:latin typeface="Arial"/>
               </a:rPr>
-              <a:t> F. M. White, Fluid Mechanics, McGraw-Hill — laminar friction factor f = 64/Re used for the internal flow-loss estimate (slide 9).</a:t>
+              <a:t> F. M. White, Fluid Mechanics, McGraw-Hill. We used its laminar-flow friction formula for the tube calculation on slide 9.</a:t>
             </a:r>
           </a:p>
           <a:p>
@@ -45033,7 +45033,7 @@
                 </a:solidFill>
                 <a:latin typeface="Arial"/>
               </a:rPr>
-              <a:t> Design tools: FreeCAD 1.1 (freecad.org) parametric model; KiCad 9 (kicad.org) schematic editor and kicad-cli ERC.</a:t>
+              <a:t> Our design tools: FreeCAD 1.1 (freecad.org) and KiCad 9 (kicad.org).</a:t>
             </a:r>
           </a:p>
           <a:p>
@@ -45059,7 +45059,7 @@
                 </a:solidFill>
                 <a:latin typeface="Arial"/>
               </a:rPr>
-              <a:t> Hydra Nexus project repository (CAD, schematic, BOM, deck) — github.com/Abishekkishore-byte/hydra-nexus</a:t>
+              <a:t> Our project repository with the CAD, schematic, parts list and this deck. github.com/Abishekkishore-byte/hydra-nexus</a:t>
             </a:r>
           </a:p>
         </p:txBody>
@@ -45121,7 +45121,7 @@
                 </a:solidFill>
                 <a:latin typeface="Arial"/>
               </a:rPr>
-              <a:t>Scope of sources:</a:t>
+              <a:t>About our numbers:</a:t>
             </a:r>
             <a:r>
               <a:rPr sz="850" b="0" i="0">
@@ -45130,7 +45130,7 @@
                 </a:solidFill>
                 <a:latin typeface="Arial"/>
               </a:rPr>
-              <a:t> calculations on slides 7 and 9 are preliminary hand calculations using the assumptions stated on those slides; no supplier quotation has been obtained.</a:t>
+              <a:t> the calculations on slides 7 and 9 are our own rough estimates with the assumptions shown. We haven’t received any supplier quotes yet.</a:t>
             </a:r>
           </a:p>
         </p:txBody>
@@ -45367,7 +45367,7 @@
                 </a:solidFill>
                 <a:latin typeface="Arial"/>
               </a:rPr>
-              <a:t>Cover — conceptual capsule visualization</a:t>
+              <a:t>Cover: concept render of the capsule</a:t>
             </a:r>
           </a:p>
           <a:p>
@@ -45384,7 +45384,7 @@
                 </a:solidFill>
                 <a:latin typeface="Arial"/>
               </a:rPr>
-              <a:t>Custom conceptual CAD-style illustration created programmatically for this submission. Not a photograph, native CAD screenshot or fabricated hardware.</a:t>
+              <a:t>We made this illustration ourselves with a script. It is not a photo, a CAD screenshot or a built device.</a:t>
             </a:r>
           </a:p>
         </p:txBody>
@@ -45446,7 +45446,7 @@
                 </a:solidFill>
                 <a:latin typeface="Arial"/>
               </a:rPr>
-              <a:t>Slide 8 — capsule assembly (numbered, with concept dimensions)</a:t>
+              <a:t>Slide 8: assembled capsule with numbered parts</a:t>
             </a:r>
           </a:p>
           <a:p>
@@ -45463,7 +45463,7 @@
                 </a:solidFill>
                 <a:latin typeface="Arial"/>
               </a:rPr>
-              <a:t>Same conceptual illustration with component markers. Conceptual only.</a:t>
+              <a:t>The same illustration with labels added. Concept only.</a:t>
             </a:r>
           </a:p>
         </p:txBody>
@@ -45525,7 +45525,7 @@
                 </a:solidFill>
                 <a:latin typeface="Arial"/>
               </a:rPr>
-              <a:t>Slide 8 — exploded view (numbered)</a:t>
+              <a:t>Slide 8: exploded view with numbered parts</a:t>
             </a:r>
           </a:p>
           <a:p>
@@ -45542,7 +45542,7 @@
                 </a:solidFill>
                 <a:latin typeface="Arial"/>
               </a:rPr>
-              <a:t>Conceptual exploded illustration created for this submission. Conceptual only.</a:t>
+              <a:t>A taken-apart version of our illustration. Concept only.</a:t>
             </a:r>
           </a:p>
         </p:txBody>
@@ -45604,7 +45604,7 @@
                 </a:solidFill>
                 <a:latin typeface="Arial"/>
               </a:rPr>
-              <a:t>Slide 13 — FreeCAD and KiCad screenshots</a:t>
+              <a:t>Slide 13: FreeCAD and KiCad screenshots</a:t>
             </a:r>
           </a:p>
           <a:p>
@@ -45621,7 +45621,7 @@
                 </a:solidFill>
                 <a:latin typeface="Arial"/>
               </a:rPr>
-              <a:t>Genuine screen captures of FreeCAD 1.1 and KiCad 9 with the project files open (25 Oct 2026); the ERC panel shows the actual kicad-cli report.</a:t>
+              <a:t>Real screenshots of FreeCAD 1.1 and KiCad 9 with our files open, taken on 25 Oct 2026. The check report is KiCad’s actual output.</a:t>
             </a:r>
           </a:p>
         </p:txBody>
@@ -45683,7 +45683,7 @@
                 </a:solidFill>
                 <a:latin typeface="Arial"/>
               </a:rPr>
-              <a:t>All slides — Vishwakarma Awards logo, Maker Bhavan Foundation logo, award banner, icons and backgrounds</a:t>
+              <a:t>Every slide: Vishwakarma Awards and Maker Bhavan Foundation logos, banner, icons and backgrounds</a:t>
             </a:r>
           </a:p>
           <a:p>
@@ -45700,7 +45700,7 @@
                 </a:solidFill>
                 <a:latin typeface="Arial"/>
               </a:rPr>
-              <a:t>Reused from the official Vishwakarma Awards 2026–27 Stage 2 Submission Template.</a:t>
+              <a:t>From the official Vishwakarma Awards 2026–27 Stage 2 template.</a:t>
             </a:r>
           </a:p>
         </p:txBody>
@@ -45761,7 +45761,7 @@
                 </a:solidFill>
                 <a:latin typeface="Arial"/>
               </a:rPr>
-              <a:t>Native shapes</a:t>
+              <a:t>Drawn in PowerPoint</a:t>
             </a:r>
           </a:p>
         </p:txBody>
@@ -45799,7 +45799,7 @@
                 </a:solidFill>
                 <a:latin typeface="Arial"/>
               </a:rPr>
-              <a:t>Slides 3–7, 10, 12–17 — diagrams, flowcharts, tables and timelines</a:t>
+              <a:t>Slides 3–7, 10, 12–17: diagrams, flowcharts, tables and timelines</a:t>
             </a:r>
           </a:p>
           <a:p>
@@ -45816,7 +45816,7 @@
                 </a:solidFill>
                 <a:latin typeface="Arial"/>
               </a:rPr>
-              <a:t>Native, editable PowerPoint shapes created for this submission. No third-party photographs are used; template example images were removed.</a:t>
+              <a:t>Drawn by us directly in PowerPoint. We used no outside photos and removed the template’s example pictures.</a:t>
             </a:r>
           </a:p>
         </p:txBody>

--- a/docs/Hydra_Nexus_Vishwakarma_Stage2_Submission.pptx
+++ b/docs/Hydra_Nexus_Vishwakarma_Stage2_Submission.pptx
@@ -32768,8 +32768,8 @@
         </p:nvSpPr>
         <p:spPr>
           <a:xfrm>
-            <a:off x="265175" y="1737360"/>
-            <a:ext cx="1207008" cy="548640"/>
+            <a:off x="320040" y="1737360"/>
+            <a:ext cx="1097280" cy="548640"/>
           </a:xfrm>
           <a:prstGeom prst="rect">
             <a:avLst/>
@@ -32787,7 +32787,7 @@
               <a:buNone/>
             </a:pPr>
             <a:r>
-              <a:rPr sz="800" b="0" i="0">
+              <a:rPr sz="750" b="0" i="0">
                 <a:solidFill>
                   <a:srgbClr val="0F172A"/>
                 </a:solidFill>
@@ -32806,7 +32806,7 @@
         </p:nvSpPr>
         <p:spPr>
           <a:xfrm>
-            <a:off x="2021967" y="1325880"/>
+            <a:off x="1876552" y="1325880"/>
             <a:ext cx="310896" cy="310896"/>
           </a:xfrm>
           <a:prstGeom prst="ellipse">
@@ -32865,8 +32865,8 @@
         </p:nvSpPr>
         <p:spPr>
           <a:xfrm>
-            <a:off x="1573911" y="1737360"/>
-            <a:ext cx="1207008" cy="548640"/>
+            <a:off x="1483360" y="1737360"/>
+            <a:ext cx="1097280" cy="548640"/>
           </a:xfrm>
           <a:prstGeom prst="rect">
             <a:avLst/>
@@ -32884,7 +32884,7 @@
               <a:buNone/>
             </a:pPr>
             <a:r>
-              <a:rPr sz="800" b="0" i="0">
+              <a:rPr sz="750" b="0" i="0">
                 <a:solidFill>
                   <a:srgbClr val="0F172A"/>
                 </a:solidFill>
@@ -32903,7 +32903,7 @@
         </p:nvSpPr>
         <p:spPr>
           <a:xfrm>
-            <a:off x="3330702" y="1325880"/>
+            <a:off x="3039872" y="1325880"/>
             <a:ext cx="310896" cy="310896"/>
           </a:xfrm>
           <a:prstGeom prst="ellipse">
@@ -32962,8 +32962,8 @@
         </p:nvSpPr>
         <p:spPr>
           <a:xfrm>
-            <a:off x="2882646" y="1737360"/>
-            <a:ext cx="1207008" cy="548640"/>
+            <a:off x="2646680" y="1737360"/>
+            <a:ext cx="1097280" cy="548640"/>
           </a:xfrm>
           <a:prstGeom prst="rect">
             <a:avLst/>
@@ -32981,7 +32981,7 @@
               <a:buNone/>
             </a:pPr>
             <a:r>
-              <a:rPr sz="800" b="0" i="0">
+              <a:rPr sz="750" b="0" i="0">
                 <a:solidFill>
                   <a:srgbClr val="0F172A"/>
                 </a:solidFill>
@@ -33000,7 +33000,7 @@
         </p:nvSpPr>
         <p:spPr>
           <a:xfrm>
-            <a:off x="4639437" y="1325880"/>
+            <a:off x="4203192" y="1325880"/>
             <a:ext cx="310896" cy="310896"/>
           </a:xfrm>
           <a:prstGeom prst="ellipse">
@@ -33059,8 +33059,8 @@
         </p:nvSpPr>
         <p:spPr>
           <a:xfrm>
-            <a:off x="4191381" y="1737360"/>
-            <a:ext cx="1207008" cy="548640"/>
+            <a:off x="3810000" y="1737360"/>
+            <a:ext cx="1097280" cy="548640"/>
           </a:xfrm>
           <a:prstGeom prst="rect">
             <a:avLst/>
@@ -33078,7 +33078,7 @@
               <a:buNone/>
             </a:pPr>
             <a:r>
-              <a:rPr sz="800" b="0" i="0">
+              <a:rPr sz="750" b="0" i="0">
                 <a:solidFill>
                   <a:srgbClr val="0F172A"/>
                 </a:solidFill>
@@ -33097,7 +33097,7 @@
         </p:nvSpPr>
         <p:spPr>
           <a:xfrm>
-            <a:off x="5948172" y="1325880"/>
+            <a:off x="5366512" y="1325880"/>
             <a:ext cx="310896" cy="310896"/>
           </a:xfrm>
           <a:prstGeom prst="ellipse">
@@ -33156,8 +33156,8 @@
         </p:nvSpPr>
         <p:spPr>
           <a:xfrm>
-            <a:off x="5500116" y="1737360"/>
-            <a:ext cx="1207008" cy="548640"/>
+            <a:off x="4973320" y="1737360"/>
+            <a:ext cx="1097280" cy="548640"/>
           </a:xfrm>
           <a:prstGeom prst="rect">
             <a:avLst/>
@@ -33175,7 +33175,7 @@
               <a:buNone/>
             </a:pPr>
             <a:r>
-              <a:rPr sz="800" b="0" i="0">
+              <a:rPr sz="750" b="0" i="0">
                 <a:solidFill>
                   <a:srgbClr val="0F172A"/>
                 </a:solidFill>
@@ -33194,7 +33194,104 @@
         </p:nvSpPr>
         <p:spPr>
           <a:xfrm>
-            <a:off x="7256907" y="1325880"/>
+            <a:off x="6529832" y="1325880"/>
+            <a:ext cx="310896" cy="310896"/>
+          </a:xfrm>
+          <a:prstGeom prst="ellipse">
+            <a:avLst/>
+          </a:prstGeom>
+          <a:solidFill>
+            <a:srgbClr val="059668"/>
+          </a:solidFill>
+          <a:ln w="19050">
+            <a:solidFill>
+              <a:srgbClr val="059668"/>
+            </a:solidFill>
+          </a:ln>
+          <a:effectLst/>
+        </p:spPr>
+        <p:style>
+          <a:lnRef idx="1">
+            <a:schemeClr val="accent1"/>
+          </a:lnRef>
+          <a:fillRef idx="3">
+            <a:schemeClr val="accent1"/>
+          </a:fillRef>
+          <a:effectRef idx="2">
+            <a:schemeClr val="accent1"/>
+          </a:effectRef>
+          <a:fontRef idx="minor">
+            <a:schemeClr val="lt1"/>
+          </a:fontRef>
+        </p:style>
+        <p:txBody>
+          <a:bodyPr rtlCol="0" anchor="ctr" wrap="square" lIns="0" rIns="0" tIns="27432" bIns="27432"/>
+          <a:lstStyle/>
+          <a:p>
+            <a:pPr algn="ctr">
+              <a:spcAft>
+                <a:spcPts val="0"/>
+              </a:spcAft>
+            </a:pPr>
+            <a:r>
+              <a:rPr sz="800" b="1" i="0">
+                <a:solidFill>
+                  <a:srgbClr val="FFFFFF"/>
+                </a:solidFill>
+                <a:latin typeface="Arial"/>
+              </a:rPr>
+              <a:t>6</a:t>
+            </a:r>
+          </a:p>
+        </p:txBody>
+      </p:sp>
+      <p:sp>
+        <p:nvSpPr>
+          <p:cNvPr id="19" name="TextBox 18"/>
+          <p:cNvSpPr txBox="1"/>
+          <p:nvPr/>
+        </p:nvSpPr>
+        <p:spPr>
+          <a:xfrm>
+            <a:off x="6136640" y="1737360"/>
+            <a:ext cx="1097280" cy="548640"/>
+          </a:xfrm>
+          <a:prstGeom prst="rect">
+            <a:avLst/>
+          </a:prstGeom>
+          <a:noFill/>
+        </p:spPr>
+        <p:txBody>
+          <a:bodyPr wrap="square" lIns="0" rIns="0" tIns="0" bIns="0" anchor="t"/>
+          <a:lstStyle/>
+          <a:p>
+            <a:pPr algn="ctr">
+              <a:spcAft>
+                <a:spcPts val="300"/>
+              </a:spcAft>
+              <a:buNone/>
+            </a:pPr>
+            <a:r>
+              <a:rPr sz="750" b="0" i="0">
+                <a:solidFill>
+                  <a:srgbClr val="0F172A"/>
+                </a:solidFill>
+                <a:latin typeface="Arial"/>
+              </a:rPr>
+              <a:t>Wired the sensors on a bench</a:t>
+            </a:r>
+          </a:p>
+        </p:txBody>
+      </p:sp>
+      <p:sp>
+        <p:nvSpPr>
+          <p:cNvPr id="20" name="Oval 19"/>
+          <p:cNvSpPr/>
+          <p:nvPr/>
+        </p:nvSpPr>
+        <p:spPr>
+          <a:xfrm>
+            <a:off x="7693152" y="1325880"/>
             <a:ext cx="310896" cy="310896"/>
           </a:xfrm>
           <a:prstGeom prst="ellipse">
@@ -33240,21 +33337,21 @@
                 </a:solidFill>
                 <a:latin typeface="Arial"/>
               </a:rPr>
-              <a:t>6</a:t>
+              <a:t>7</a:t>
             </a:r>
           </a:p>
         </p:txBody>
       </p:sp>
       <p:sp>
         <p:nvSpPr>
-          <p:cNvPr id="19" name="TextBox 18"/>
+          <p:cNvPr id="21" name="TextBox 20"/>
           <p:cNvSpPr txBox="1"/>
           <p:nvPr/>
         </p:nvSpPr>
         <p:spPr>
           <a:xfrm>
-            <a:off x="6808851" y="1737360"/>
-            <a:ext cx="1207008" cy="548640"/>
+            <a:off x="7299960" y="1737360"/>
+            <a:ext cx="1097280" cy="548640"/>
           </a:xfrm>
           <a:prstGeom prst="rect">
             <a:avLst/>
@@ -33272,7 +33369,7 @@
               <a:buNone/>
             </a:pPr>
             <a:r>
-              <a:rPr sz="800" b="0" i="0">
+              <a:rPr sz="750" b="0" i="0">
                 <a:solidFill>
                   <a:srgbClr val="0F172A"/>
                 </a:solidFill>
@@ -33285,13 +33382,13 @@
       </p:sp>
       <p:sp>
         <p:nvSpPr>
-          <p:cNvPr id="20" name="Oval 19"/>
+          <p:cNvPr id="22" name="Oval 21"/>
           <p:cNvSpPr/>
           <p:nvPr/>
         </p:nvSpPr>
         <p:spPr>
           <a:xfrm>
-            <a:off x="8565642" y="1325880"/>
+            <a:off x="8856472" y="1325880"/>
             <a:ext cx="310896" cy="310896"/>
           </a:xfrm>
           <a:prstGeom prst="ellipse">
@@ -33337,21 +33434,21 @@
                 </a:solidFill>
                 <a:latin typeface="Arial"/>
               </a:rPr>
-              <a:t>7</a:t>
+              <a:t>8</a:t>
             </a:r>
           </a:p>
         </p:txBody>
       </p:sp>
       <p:sp>
         <p:nvSpPr>
-          <p:cNvPr id="21" name="TextBox 20"/>
+          <p:cNvPr id="23" name="TextBox 22"/>
           <p:cNvSpPr txBox="1"/>
           <p:nvPr/>
         </p:nvSpPr>
         <p:spPr>
           <a:xfrm>
-            <a:off x="8117586" y="1737360"/>
-            <a:ext cx="1207008" cy="548640"/>
+            <a:off x="8463280" y="1737360"/>
+            <a:ext cx="1097280" cy="548640"/>
           </a:xfrm>
           <a:prstGeom prst="rect">
             <a:avLst/>
@@ -33369,7 +33466,7 @@
               <a:buNone/>
             </a:pPr>
             <a:r>
-              <a:rPr sz="800" b="0" i="0">
+              <a:rPr sz="750" b="0" i="0">
                 <a:solidFill>
                   <a:srgbClr val="0F172A"/>
                 </a:solidFill>
@@ -33382,13 +33479,13 @@
       </p:sp>
       <p:sp>
         <p:nvSpPr>
-          <p:cNvPr id="22" name="Oval 21"/>
+          <p:cNvPr id="24" name="Oval 23"/>
           <p:cNvSpPr/>
           <p:nvPr/>
         </p:nvSpPr>
         <p:spPr>
           <a:xfrm>
-            <a:off x="9874377" y="1325880"/>
+            <a:off x="10019792" y="1325880"/>
             <a:ext cx="310896" cy="310896"/>
           </a:xfrm>
           <a:prstGeom prst="ellipse">
@@ -33434,21 +33531,21 @@
                 </a:solidFill>
                 <a:latin typeface="Arial"/>
               </a:rPr>
-              <a:t>8</a:t>
+              <a:t>9</a:t>
             </a:r>
           </a:p>
         </p:txBody>
       </p:sp>
       <p:sp>
         <p:nvSpPr>
-          <p:cNvPr id="23" name="TextBox 22"/>
+          <p:cNvPr id="25" name="TextBox 24"/>
           <p:cNvSpPr txBox="1"/>
           <p:nvPr/>
         </p:nvSpPr>
         <p:spPr>
           <a:xfrm>
-            <a:off x="9426321" y="1737360"/>
-            <a:ext cx="1207008" cy="548640"/>
+            <a:off x="9626600" y="1737360"/>
+            <a:ext cx="1097280" cy="548640"/>
           </a:xfrm>
           <a:prstGeom prst="rect">
             <a:avLst/>
@@ -33466,7 +33563,7 @@
               <a:buNone/>
             </a:pPr>
             <a:r>
-              <a:rPr sz="800" b="0" i="0">
+              <a:rPr sz="750" b="0" i="0">
                 <a:solidFill>
                   <a:srgbClr val="0F172A"/>
                 </a:solidFill>
@@ -33479,7 +33576,7 @@
       </p:sp>
       <p:sp>
         <p:nvSpPr>
-          <p:cNvPr id="24" name="Oval 23"/>
+          <p:cNvPr id="26" name="Oval 25"/>
           <p:cNvSpPr/>
           <p:nvPr/>
         </p:nvSpPr>
@@ -33531,21 +33628,21 @@
                 </a:solidFill>
                 <a:latin typeface="Arial"/>
               </a:rPr>
-              <a:t>9</a:t>
+              <a:t>10</a:t>
             </a:r>
           </a:p>
         </p:txBody>
       </p:sp>
       <p:sp>
         <p:nvSpPr>
-          <p:cNvPr id="25" name="TextBox 24"/>
+          <p:cNvPr id="27" name="TextBox 26"/>
           <p:cNvSpPr txBox="1"/>
           <p:nvPr/>
         </p:nvSpPr>
         <p:spPr>
           <a:xfrm>
-            <a:off x="10735056" y="1737360"/>
-            <a:ext cx="1207008" cy="548640"/>
+            <a:off x="10789920" y="1737360"/>
+            <a:ext cx="1097280" cy="548640"/>
           </a:xfrm>
           <a:prstGeom prst="rect">
             <a:avLst/>
@@ -33563,20 +33660,20 @@
               <a:buNone/>
             </a:pPr>
             <a:r>
-              <a:rPr sz="800" b="0" i="0">
+              <a:rPr sz="750" b="0" i="0">
                 <a:solidFill>
                   <a:srgbClr val="0F172A"/>
                 </a:solidFill>
                 <a:latin typeface="Arial"/>
               </a:rPr>
-              <a:t>Test it with real water</a:t>
+              <a:t>Test the full capsule</a:t>
             </a:r>
           </a:p>
         </p:txBody>
       </p:sp>
       <p:sp>
         <p:nvSpPr>
-          <p:cNvPr id="26" name="Rounded Rectangle 25"/>
+          <p:cNvPr id="28" name="Rounded Rectangle 27"/>
           <p:cNvSpPr/>
           <p:nvPr/>
         </p:nvSpPr>
@@ -33635,7 +33732,7 @@
       </p:sp>
       <p:sp>
         <p:nvSpPr>
-          <p:cNvPr id="27" name="Rounded Rectangle 26"/>
+          <p:cNvPr id="29" name="Rounded Rectangle 28"/>
           <p:cNvSpPr/>
           <p:nvPr/>
         </p:nvSpPr>
@@ -33694,7 +33791,7 @@
       </p:sp>
       <p:sp>
         <p:nvSpPr>
-          <p:cNvPr id="28" name="Rounded Rectangle 27"/>
+          <p:cNvPr id="30" name="Rounded Rectangle 29"/>
           <p:cNvSpPr/>
           <p:nvPr/>
         </p:nvSpPr>
@@ -33753,7 +33850,7 @@
       </p:sp>
       <p:sp>
         <p:nvSpPr>
-          <p:cNvPr id="29" name="Rounded Rectangle 28"/>
+          <p:cNvPr id="31" name="Rounded Rectangle 30"/>
           <p:cNvSpPr/>
           <p:nvPr/>
         </p:nvSpPr>
@@ -33799,7 +33896,7 @@
       </p:sp>
       <p:pic>
         <p:nvPicPr>
-          <p:cNvPr id="30" name="Picture 29" descr="image.png"/>
+          <p:cNvPr id="32" name="Picture 31" descr="image.png"/>
           <p:cNvPicPr>
             <a:picLocks noChangeAspect="1"/>
           </p:cNvPicPr>
@@ -33823,7 +33920,7 @@
       </p:pic>
       <p:sp>
         <p:nvSpPr>
-          <p:cNvPr id="31" name="TextBox 30"/>
+          <p:cNvPr id="33" name="TextBox 32"/>
           <p:cNvSpPr txBox="1"/>
           <p:nvPr/>
         </p:nvSpPr>
@@ -33861,7 +33958,7 @@
       </p:sp>
       <p:sp>
         <p:nvSpPr>
-          <p:cNvPr id="32" name="TextBox 31"/>
+          <p:cNvPr id="34" name="TextBox 33"/>
           <p:cNvSpPr txBox="1"/>
           <p:nvPr/>
         </p:nvSpPr>
@@ -34037,7 +34134,7 @@
       </p:sp>
       <p:sp>
         <p:nvSpPr>
-          <p:cNvPr id="33" name="Rounded Rectangle 32"/>
+          <p:cNvPr id="35" name="Rounded Rectangle 34"/>
           <p:cNvSpPr/>
           <p:nvPr/>
         </p:nvSpPr>
@@ -34083,7 +34180,7 @@
       </p:sp>
       <p:pic>
         <p:nvPicPr>
-          <p:cNvPr id="34" name="Picture 33" descr="image.png"/>
+          <p:cNvPr id="36" name="Picture 35" descr="image.png"/>
           <p:cNvPicPr>
             <a:picLocks noChangeAspect="1"/>
           </p:cNvPicPr>
@@ -34107,7 +34204,7 @@
       </p:pic>
       <p:sp>
         <p:nvSpPr>
-          <p:cNvPr id="35" name="TextBox 34"/>
+          <p:cNvPr id="37" name="TextBox 36"/>
           <p:cNvSpPr txBox="1"/>
           <p:nvPr/>
         </p:nvSpPr>
@@ -34145,7 +34242,7 @@
       </p:sp>
       <p:sp>
         <p:nvSpPr>
-          <p:cNvPr id="36" name="TextBox 35"/>
+          <p:cNvPr id="38" name="TextBox 37"/>
           <p:cNvSpPr txBox="1"/>
           <p:nvPr/>
         </p:nvSpPr>
@@ -34225,7 +34322,7 @@
                 </a:solidFill>
                 <a:latin typeface="Arial"/>
               </a:rPr>
-              <a:t>All the design files are in our public repository. There are no build photos or test logs yet.</a:t>
+              <a:t>We have wired the pH, TDS and turbidity sensors to an ESP32 board on a breadboard and tried them in water (photos on slide 13). We haven’t logged any measured results yet.</a:t>
             </a:r>
           </a:p>
           <a:p>
@@ -34247,14 +34344,14 @@
                 </a:solidFill>
                 <a:latin typeface="Arial"/>
               </a:rPr>
-              <a:t>Steps 6 to 9 (code, build and testing) haven’t started.</a:t>
+              <a:t>Steps 7 to 10 (code, building the capsule and full testing) are still ahead of us.</a:t>
             </a:r>
           </a:p>
         </p:txBody>
       </p:sp>
       <p:pic>
         <p:nvPicPr>
-          <p:cNvPr id="37" name="Note bar" descr="image.png"/>
+          <p:cNvPr id="39" name="Note bar" descr="image.png"/>
           <p:cNvPicPr>
             <a:picLocks noChangeAspect="1"/>
           </p:cNvPicPr>
@@ -34278,7 +34375,7 @@
       </p:pic>
       <p:sp>
         <p:nvSpPr>
-          <p:cNvPr id="38" name="Note text"/>
+          <p:cNvPr id="40" name="Note text"/>
           <p:cNvSpPr txBox="1"/>
           <p:nvPr/>
         </p:nvSpPr>
@@ -34318,7 +34415,7 @@
                 </a:solidFill>
                 <a:latin typeface="Arial"/>
               </a:rPr>
-              <a:t> the design files exist (step 5). We haven’t built any hardware yet, and we aren’t claiming any test results.</a:t>
+              <a:t> the design files exist and our sensors are running on a bench setup (steps 5 and 6). The capsule itself isn’t built yet, and we aren’t claiming test results.</a:t>
             </a:r>
           </a:p>
         </p:txBody>
@@ -34601,7 +34698,7 @@
                 </a:solidFill>
                 <a:latin typeface="Arial"/>
               </a:rPr>
-              <a:t>Photos of us building it</a:t>
+              <a:t>Our first bench session</a:t>
             </a:r>
           </a:p>
         </p:txBody>
@@ -34614,8 +34711,8 @@
         </p:nvSpPr>
         <p:spPr>
           <a:xfrm>
-            <a:off x="697687" y="1325880"/>
-            <a:ext cx="2971800" cy="1463040"/>
+            <a:off x="697687" y="1298448"/>
+            <a:ext cx="2971800" cy="274320"/>
           </a:xfrm>
           <a:prstGeom prst="rect">
             <a:avLst/>
@@ -34628,7 +34725,7 @@
           <a:p>
             <a:pPr algn="l">
               <a:spcAft>
-                <a:spcPts val="400"/>
+                <a:spcPts val="300"/>
               </a:spcAft>
               <a:buNone/>
             </a:pPr>
@@ -34639,236 +34736,138 @@
                 </a:solidFill>
                 <a:latin typeface="Arial"/>
               </a:rPr>
-              <a:t>To show we really made it ourselves</a:t>
-            </a:r>
-          </a:p>
-          <a:p>
-            <a:pPr algn="l" marL="128016" indent="-128016">
+              <a:t>Real photos from our own bench work</a:t>
+            </a:r>
+          </a:p>
+        </p:txBody>
+      </p:sp>
+      <p:pic>
+        <p:nvPicPr>
+          <p:cNvPr id="11" name="Photo: bench wiring" descr="Team bench setup: ESP32 board wired to pH, TDS and turbidity sensor boards on a breadboard"/>
+          <p:cNvPicPr>
+            <a:picLocks noChangeAspect="1"/>
+          </p:cNvPicPr>
+          <p:nvPr/>
+        </p:nvPicPr>
+        <p:blipFill>
+          <a:blip r:embed="rId6"/>
+          <a:stretch>
+            <a:fillRect/>
+          </a:stretch>
+        </p:blipFill>
+        <p:spPr>
+          <a:xfrm>
+            <a:off x="697687" y="1572768"/>
+            <a:ext cx="2971800" cy="1669316"/>
+          </a:xfrm>
+          <a:prstGeom prst="rect">
+            <a:avLst/>
+          </a:prstGeom>
+        </p:spPr>
+      </p:pic>
+      <p:sp>
+        <p:nvSpPr>
+          <p:cNvPr id="12" name="TextBox 11"/>
+          <p:cNvSpPr txBox="1"/>
+          <p:nvPr/>
+        </p:nvSpPr>
+        <p:spPr>
+          <a:xfrm>
+            <a:off x="697687" y="3264408"/>
+            <a:ext cx="2971800" cy="329184"/>
+          </a:xfrm>
+          <a:prstGeom prst="rect">
+            <a:avLst/>
+          </a:prstGeom>
+          <a:noFill/>
+        </p:spPr>
+        <p:txBody>
+          <a:bodyPr wrap="square" lIns="0" rIns="0" tIns="0" bIns="0" anchor="t"/>
+          <a:lstStyle/>
+          <a:p>
+            <a:pPr algn="ctr">
               <a:spcAft>
                 <a:spcPts val="300"/>
               </a:spcAft>
-              <a:buClr>
-                <a:srgbClr val="059668"/>
-              </a:buClr>
-              <a:buSzPct val="100000"/>
-              <a:buFont typeface="Arial"/>
-              <a:buChar char="▪"/>
+              <a:buNone/>
             </a:pPr>
             <a:r>
-              <a:rPr sz="850" b="0" i="0">
-                <a:solidFill>
-                  <a:srgbClr val="334155"/>
-                </a:solidFill>
-                <a:latin typeface="Arial"/>
-              </a:rPr>
-              <a:t>Us printing the body, putting the water parts together and calibrating the test cell</a:t>
-            </a:r>
-          </a:p>
-          <a:p>
-            <a:pPr algn="l" marL="128016" indent="-128016">
+              <a:rPr sz="750" b="0" i="1">
+                <a:solidFill>
+                  <a:srgbClr val="64748B"/>
+                </a:solidFill>
+                <a:latin typeface="Arial"/>
+              </a:rPr>
+              <a:t>Our ESP32 board wired to the pH, TDS and turbidity sensors on a breadboard</a:t>
+            </a:r>
+          </a:p>
+        </p:txBody>
+      </p:sp>
+      <p:pic>
+        <p:nvPicPr>
+          <p:cNvPr id="13" name="Photo: sensors in water" descr="Team member placing the pH probe and turbidity sensor in a water sample"/>
+          <p:cNvPicPr>
+            <a:picLocks noChangeAspect="1"/>
+          </p:cNvPicPr>
+          <p:nvPr/>
+        </p:nvPicPr>
+        <p:blipFill>
+          <a:blip r:embed="rId7"/>
+          <a:stretch>
+            <a:fillRect/>
+          </a:stretch>
+        </p:blipFill>
+        <p:spPr>
+          <a:xfrm>
+            <a:off x="697687" y="3611880"/>
+            <a:ext cx="2971800" cy="1666297"/>
+          </a:xfrm>
+          <a:prstGeom prst="rect">
+            <a:avLst/>
+          </a:prstGeom>
+        </p:spPr>
+      </p:pic>
+      <p:sp>
+        <p:nvSpPr>
+          <p:cNvPr id="14" name="TextBox 13"/>
+          <p:cNvSpPr txBox="1"/>
+          <p:nvPr/>
+        </p:nvSpPr>
+        <p:spPr>
+          <a:xfrm>
+            <a:off x="697687" y="5303520"/>
+            <a:ext cx="2971800" cy="228600"/>
+          </a:xfrm>
+          <a:prstGeom prst="rect">
+            <a:avLst/>
+          </a:prstGeom>
+          <a:noFill/>
+        </p:spPr>
+        <p:txBody>
+          <a:bodyPr wrap="square" lIns="0" rIns="0" tIns="0" bIns="0" anchor="t"/>
+          <a:lstStyle/>
+          <a:p>
+            <a:pPr algn="ctr">
               <a:spcAft>
                 <a:spcPts val="300"/>
               </a:spcAft>
-              <a:buClr>
-                <a:srgbClr val="059668"/>
-              </a:buClr>
-              <a:buSzPct val="100000"/>
-              <a:buFont typeface="Arial"/>
-              <a:buChar char="▪"/>
+              <a:buNone/>
             </a:pPr>
             <a:r>
-              <a:rPr sz="850" b="0" i="0">
-                <a:solidFill>
-                  <a:srgbClr val="334155"/>
-                </a:solidFill>
-                <a:latin typeface="Arial"/>
-              </a:rPr>
-              <a:t>With our college ID badges visible</a:t>
-            </a:r>
-          </a:p>
-          <a:p>
-            <a:pPr algn="l" marL="128016" indent="-128016">
-              <a:spcAft>
-                <a:spcPts val="300"/>
-              </a:spcAft>
-              <a:buClr>
-                <a:srgbClr val="059668"/>
-              </a:buClr>
-              <a:buSzPct val="100000"/>
-              <a:buFont typeface="Arial"/>
-              <a:buChar char="▪"/>
-            </a:pPr>
-            <a:r>
-              <a:rPr sz="850" b="0" i="0">
-                <a:solidFill>
-                  <a:srgbClr val="334155"/>
-                </a:solidFill>
-                <a:latin typeface="Arial"/>
-              </a:rPr>
-              <a:t>A photo with our faculty mentor, if we have one</a:t>
+              <a:rPr sz="750" b="0" i="1">
+                <a:solidFill>
+                  <a:srgbClr val="64748B"/>
+                </a:solidFill>
+                <a:latin typeface="Arial"/>
+              </a:rPr>
+              <a:t>Trying the pH probe and turbidity sensor in a water sample</a:t>
             </a:r>
           </a:p>
         </p:txBody>
       </p:sp>
       <p:sp>
         <p:nvSpPr>
-          <p:cNvPr id="11" name="Rounded Rectangle 10"/>
-          <p:cNvSpPr/>
-          <p:nvPr/>
-        </p:nvSpPr>
-        <p:spPr>
-          <a:xfrm>
-            <a:off x="697687" y="2971800"/>
-            <a:ext cx="2971800" cy="1170432"/>
-          </a:xfrm>
-          <a:prstGeom prst="roundRect">
-            <a:avLst>
-              <a:gd name="adj" fmla="val 4687"/>
-            </a:avLst>
-          </a:prstGeom>
-          <a:solidFill>
-            <a:srgbClr val="FFFFFF"/>
-          </a:solidFill>
-          <a:ln w="9525">
-            <a:solidFill>
-              <a:srgbClr val="94A3B8"/>
-            </a:solidFill>
-            <a:prstDash val="dash"/>
-          </a:ln>
-          <a:effectLst/>
-        </p:spPr>
-        <p:style>
-          <a:lnRef idx="1">
-            <a:schemeClr val="accent1"/>
-          </a:lnRef>
-          <a:fillRef idx="3">
-            <a:schemeClr val="accent1"/>
-          </a:fillRef>
-          <a:effectRef idx="2">
-            <a:schemeClr val="accent1"/>
-          </a:effectRef>
-          <a:fontRef idx="minor">
-            <a:schemeClr val="lt1"/>
-          </a:fontRef>
-        </p:style>
-        <p:txBody>
-          <a:bodyPr rtlCol="0" anchor="ctr" wrap="square" lIns="54864" rIns="54864" tIns="27432" bIns="27432"/>
-          <a:lstStyle/>
-          <a:p>
-            <a:pPr algn="ctr">
-              <a:spcAft>
-                <a:spcPts val="0"/>
-              </a:spcAft>
-            </a:pPr>
-            <a:r>
-              <a:rPr sz="850" b="1" i="0">
-                <a:solidFill>
-                  <a:srgbClr val="64748B"/>
-                </a:solidFill>
-                <a:latin typeface="Arial"/>
-              </a:rPr>
-              <a:t>Photo: assembling the water parts</a:t>
-            </a:r>
-          </a:p>
-          <a:p>
-            <a:pPr algn="ctr">
-              <a:spcAft>
-                <a:spcPts val="0"/>
-              </a:spcAft>
-            </a:pPr>
-            <a:r>
-              <a:rPr sz="750" b="0" i="1">
-                <a:solidFill>
-                  <a:srgbClr val="B45309"/>
-                </a:solidFill>
-                <a:latin typeface="Arial"/>
-              </a:rPr>
-              <a:t>We will take this during the build in Month 2. It has to be a real photo of us.</a:t>
-            </a:r>
-          </a:p>
-        </p:txBody>
-      </p:sp>
-      <p:sp>
-        <p:nvSpPr>
-          <p:cNvPr id="12" name="Rounded Rectangle 11"/>
-          <p:cNvSpPr/>
-          <p:nvPr/>
-        </p:nvSpPr>
-        <p:spPr>
-          <a:xfrm>
-            <a:off x="697687" y="4251960"/>
-            <a:ext cx="2971800" cy="1170432"/>
-          </a:xfrm>
-          <a:prstGeom prst="roundRect">
-            <a:avLst>
-              <a:gd name="adj" fmla="val 4687"/>
-            </a:avLst>
-          </a:prstGeom>
-          <a:solidFill>
-            <a:srgbClr val="FFFFFF"/>
-          </a:solidFill>
-          <a:ln w="9525">
-            <a:solidFill>
-              <a:srgbClr val="94A3B8"/>
-            </a:solidFill>
-            <a:prstDash val="dash"/>
-          </a:ln>
-          <a:effectLst/>
-        </p:spPr>
-        <p:style>
-          <a:lnRef idx="1">
-            <a:schemeClr val="accent1"/>
-          </a:lnRef>
-          <a:fillRef idx="3">
-            <a:schemeClr val="accent1"/>
-          </a:fillRef>
-          <a:effectRef idx="2">
-            <a:schemeClr val="accent1"/>
-          </a:effectRef>
-          <a:fontRef idx="minor">
-            <a:schemeClr val="lt1"/>
-          </a:fontRef>
-        </p:style>
-        <p:txBody>
-          <a:bodyPr rtlCol="0" anchor="ctr" wrap="square" lIns="54864" rIns="54864" tIns="27432" bIns="27432"/>
-          <a:lstStyle/>
-          <a:p>
-            <a:pPr algn="ctr">
-              <a:spcAft>
-                <a:spcPts val="0"/>
-              </a:spcAft>
-            </a:pPr>
-            <a:r>
-              <a:rPr sz="850" b="1" i="0">
-                <a:solidFill>
-                  <a:srgbClr val="64748B"/>
-                </a:solidFill>
-                <a:latin typeface="Arial"/>
-              </a:rPr>
-              <a:t>Photo: calibrating the test cell</a:t>
-            </a:r>
-          </a:p>
-          <a:p>
-            <a:pPr algn="ctr">
-              <a:spcAft>
-                <a:spcPts val="0"/>
-              </a:spcAft>
-            </a:pPr>
-            <a:r>
-              <a:rPr sz="750" b="0" i="1">
-                <a:solidFill>
-                  <a:srgbClr val="B45309"/>
-                </a:solidFill>
-                <a:latin typeface="Arial"/>
-              </a:rPr>
-              <a:t>We will take this during the build in Month 2. It has to be a real photo of us.</a:t>
-            </a:r>
-          </a:p>
-        </p:txBody>
-      </p:sp>
-      <p:sp>
-        <p:nvSpPr>
-          <p:cNvPr id="13" name="Rounded Rectangle 12"/>
+          <p:cNvPr id="15" name="Rounded Rectangle 14"/>
           <p:cNvSpPr/>
           <p:nvPr/>
         </p:nvSpPr>
@@ -34914,131 +34913,7 @@
       </p:sp>
       <p:pic>
         <p:nvPicPr>
-          <p:cNvPr id="14" name="Picture 13" descr="image.png"/>
-          <p:cNvPicPr>
-            <a:picLocks noChangeAspect="1"/>
-          </p:cNvPicPr>
-          <p:nvPr/>
-        </p:nvPicPr>
-        <p:blipFill>
-          <a:blip r:embed="rId6"/>
-          <a:stretch>
-            <a:fillRect/>
-          </a:stretch>
-        </p:blipFill>
-        <p:spPr>
-          <a:xfrm>
-            <a:off x="4114800" y="1115568"/>
-            <a:ext cx="153296" cy="173736"/>
-          </a:xfrm>
-          <a:prstGeom prst="rect">
-            <a:avLst/>
-          </a:prstGeom>
-        </p:spPr>
-      </p:pic>
-      <p:sp>
-        <p:nvSpPr>
-          <p:cNvPr id="15" name="TextBox 14"/>
-          <p:cNvSpPr txBox="1"/>
-          <p:nvPr/>
-        </p:nvSpPr>
-        <p:spPr>
-          <a:xfrm>
-            <a:off x="4370832" y="1078992"/>
-            <a:ext cx="3794759" cy="274320"/>
-          </a:xfrm>
-          <a:prstGeom prst="rect">
-            <a:avLst/>
-          </a:prstGeom>
-          <a:noFill/>
-        </p:spPr>
-        <p:txBody>
-          <a:bodyPr wrap="square" lIns="0" rIns="0" tIns="0" bIns="0" anchor="t"/>
-          <a:lstStyle/>
-          <a:p>
-            <a:pPr algn="l">
-              <a:spcAft>
-                <a:spcPts val="300"/>
-              </a:spcAft>
-              <a:buNone/>
-            </a:pPr>
-            <a:r>
-              <a:rPr sz="1100" b="1" i="0">
-                <a:solidFill>
-                  <a:srgbClr val="0F172A"/>
-                </a:solidFill>
-                <a:latin typeface="Arial"/>
-              </a:rPr>
-              <a:t>Our design work so far</a:t>
-            </a:r>
-          </a:p>
-        </p:txBody>
-      </p:sp>
-      <p:pic>
-        <p:nvPicPr>
-          <p:cNvPr id="16" name="FreeCAD screenshot" descr="freecad_model_tree.png"/>
-          <p:cNvPicPr>
-            <a:picLocks noChangeAspect="1"/>
-          </p:cNvPicPr>
-          <p:nvPr/>
-        </p:nvPicPr>
-        <p:blipFill>
-          <a:blip r:embed="rId7"/>
-          <a:stretch>
-            <a:fillRect/>
-          </a:stretch>
-        </p:blipFill>
-        <p:spPr>
-          <a:xfrm>
-            <a:off x="4114800" y="1325880"/>
-            <a:ext cx="4032504" cy="2211170"/>
-          </a:xfrm>
-          <a:prstGeom prst="rect">
-            <a:avLst/>
-          </a:prstGeom>
-        </p:spPr>
-      </p:pic>
-      <p:sp>
-        <p:nvSpPr>
-          <p:cNvPr id="17" name="TextBox 16"/>
-          <p:cNvSpPr txBox="1"/>
-          <p:nvPr/>
-        </p:nvSpPr>
-        <p:spPr>
-          <a:xfrm>
-            <a:off x="4114800" y="3502152"/>
-            <a:ext cx="4032504" cy="329184"/>
-          </a:xfrm>
-          <a:prstGeom prst="rect">
-            <a:avLst/>
-          </a:prstGeom>
-          <a:noFill/>
-        </p:spPr>
-        <p:txBody>
-          <a:bodyPr wrap="square" lIns="0" rIns="0" tIns="0" bIns="0" anchor="t"/>
-          <a:lstStyle/>
-          <a:p>
-            <a:pPr algn="ctr">
-              <a:spcAft>
-                <a:spcPts val="300"/>
-              </a:spcAft>
-              <a:buNone/>
-            </a:pPr>
-            <a:r>
-              <a:rPr sz="750" b="0" i="1">
-                <a:solidFill>
-                  <a:srgbClr val="64748B"/>
-                </a:solidFill>
-                <a:latin typeface="Arial"/>
-              </a:rPr>
-              <a:t>Our capsule in FreeCAD 1.1: 9 parts, with every key size driven by one parameter table</a:t>
-            </a:r>
-          </a:p>
-        </p:txBody>
-      </p:sp>
-      <p:pic>
-        <p:nvPicPr>
-          <p:cNvPr id="18" name="KiCad screenshot" descr="kicad_schematic_with_ERC.png"/>
+          <p:cNvPr id="16" name="Picture 15" descr="image.png"/>
           <p:cNvPicPr>
             <a:picLocks noChangeAspect="1"/>
           </p:cNvPicPr>
@@ -35052,8 +34927,70 @@
         </p:blipFill>
         <p:spPr>
           <a:xfrm>
-            <a:off x="4114800" y="3840480"/>
-            <a:ext cx="3200400" cy="1714146"/>
+            <a:off x="4114800" y="1115568"/>
+            <a:ext cx="153296" cy="173736"/>
+          </a:xfrm>
+          <a:prstGeom prst="rect">
+            <a:avLst/>
+          </a:prstGeom>
+        </p:spPr>
+      </p:pic>
+      <p:sp>
+        <p:nvSpPr>
+          <p:cNvPr id="17" name="TextBox 16"/>
+          <p:cNvSpPr txBox="1"/>
+          <p:nvPr/>
+        </p:nvSpPr>
+        <p:spPr>
+          <a:xfrm>
+            <a:off x="4370832" y="1078992"/>
+            <a:ext cx="3794759" cy="274320"/>
+          </a:xfrm>
+          <a:prstGeom prst="rect">
+            <a:avLst/>
+          </a:prstGeom>
+          <a:noFill/>
+        </p:spPr>
+        <p:txBody>
+          <a:bodyPr wrap="square" lIns="0" rIns="0" tIns="0" bIns="0" anchor="t"/>
+          <a:lstStyle/>
+          <a:p>
+            <a:pPr algn="l">
+              <a:spcAft>
+                <a:spcPts val="300"/>
+              </a:spcAft>
+              <a:buNone/>
+            </a:pPr>
+            <a:r>
+              <a:rPr sz="1100" b="1" i="0">
+                <a:solidFill>
+                  <a:srgbClr val="0F172A"/>
+                </a:solidFill>
+                <a:latin typeface="Arial"/>
+              </a:rPr>
+              <a:t>Our design work so far</a:t>
+            </a:r>
+          </a:p>
+        </p:txBody>
+      </p:sp>
+      <p:pic>
+        <p:nvPicPr>
+          <p:cNvPr id="18" name="FreeCAD screenshot" descr="freecad_model_tree.png"/>
+          <p:cNvPicPr>
+            <a:picLocks noChangeAspect="1"/>
+          </p:cNvPicPr>
+          <p:nvPr/>
+        </p:nvPicPr>
+        <p:blipFill>
+          <a:blip r:embed="rId9"/>
+          <a:stretch>
+            <a:fillRect/>
+          </a:stretch>
+        </p:blipFill>
+        <p:spPr>
+          <a:xfrm>
+            <a:off x="4114800" y="1325880"/>
+            <a:ext cx="4032504" cy="2211170"/>
           </a:xfrm>
           <a:prstGeom prst="rect">
             <a:avLst/>
@@ -35068,6 +35005,68 @@
         </p:nvSpPr>
         <p:spPr>
           <a:xfrm>
+            <a:off x="4114800" y="3502152"/>
+            <a:ext cx="4032504" cy="329184"/>
+          </a:xfrm>
+          <a:prstGeom prst="rect">
+            <a:avLst/>
+          </a:prstGeom>
+          <a:noFill/>
+        </p:spPr>
+        <p:txBody>
+          <a:bodyPr wrap="square" lIns="0" rIns="0" tIns="0" bIns="0" anchor="t"/>
+          <a:lstStyle/>
+          <a:p>
+            <a:pPr algn="ctr">
+              <a:spcAft>
+                <a:spcPts val="300"/>
+              </a:spcAft>
+              <a:buNone/>
+            </a:pPr>
+            <a:r>
+              <a:rPr sz="750" b="0" i="1">
+                <a:solidFill>
+                  <a:srgbClr val="64748B"/>
+                </a:solidFill>
+                <a:latin typeface="Arial"/>
+              </a:rPr>
+              <a:t>Our capsule in FreeCAD 1.1: 9 parts, with every key size driven by one parameter table</a:t>
+            </a:r>
+          </a:p>
+        </p:txBody>
+      </p:sp>
+      <p:pic>
+        <p:nvPicPr>
+          <p:cNvPr id="20" name="KiCad screenshot" descr="kicad_schematic_with_ERC.png"/>
+          <p:cNvPicPr>
+            <a:picLocks noChangeAspect="1"/>
+          </p:cNvPicPr>
+          <p:nvPr/>
+        </p:nvPicPr>
+        <p:blipFill>
+          <a:blip r:embed="rId10"/>
+          <a:stretch>
+            <a:fillRect/>
+          </a:stretch>
+        </p:blipFill>
+        <p:spPr>
+          <a:xfrm>
+            <a:off x="4114800" y="3840480"/>
+            <a:ext cx="3200400" cy="1714146"/>
+          </a:xfrm>
+          <a:prstGeom prst="rect">
+            <a:avLst/>
+          </a:prstGeom>
+        </p:spPr>
+      </p:pic>
+      <p:sp>
+        <p:nvSpPr>
+          <p:cNvPr id="21" name="TextBox 20"/>
+          <p:cNvSpPr txBox="1"/>
+          <p:nvPr/>
+        </p:nvSpPr>
+        <p:spPr>
+          <a:xfrm>
             <a:off x="7388352" y="3886200"/>
             <a:ext cx="822960" cy="1600200"/>
           </a:xfrm>
@@ -35100,7 +35099,7 @@
       </p:sp>
       <p:sp>
         <p:nvSpPr>
-          <p:cNvPr id="20" name="Rounded Rectangle 19"/>
+          <p:cNvPr id="22" name="Rounded Rectangle 21"/>
           <p:cNvSpPr/>
           <p:nvPr/>
         </p:nvSpPr>
@@ -35146,14 +35145,14 @@
       </p:sp>
       <p:pic>
         <p:nvPicPr>
-          <p:cNvPr id="21" name="Picture 20" descr="image.png"/>
+          <p:cNvPr id="23" name="Picture 22" descr="image.png"/>
           <p:cNvPicPr>
             <a:picLocks noChangeAspect="1"/>
           </p:cNvPicPr>
           <p:nvPr/>
         </p:nvPicPr>
         <p:blipFill>
-          <a:blip r:embed="rId9"/>
+          <a:blip r:embed="rId11"/>
           <a:stretch>
             <a:fillRect/>
           </a:stretch>
@@ -35170,7 +35169,7 @@
       </p:pic>
       <p:sp>
         <p:nvSpPr>
-          <p:cNvPr id="22" name="TextBox 21"/>
+          <p:cNvPr id="24" name="TextBox 23"/>
           <p:cNvSpPr txBox="1"/>
           <p:nvPr/>
         </p:nvSpPr>
@@ -35208,7 +35207,7 @@
       </p:sp>
       <p:sp>
         <p:nvSpPr>
-          <p:cNvPr id="23" name="Rounded Rectangle 22"/>
+          <p:cNvPr id="25" name="Rounded Rectangle 24"/>
           <p:cNvSpPr/>
           <p:nvPr/>
         </p:nvSpPr>
@@ -35285,7 +35284,7 @@
       </p:sp>
       <p:sp>
         <p:nvSpPr>
-          <p:cNvPr id="24" name="TextBox 23"/>
+          <p:cNvPr id="26" name="TextBox 25"/>
           <p:cNvSpPr txBox="1"/>
           <p:nvPr/>
         </p:nvSpPr>
@@ -35481,14 +35480,14 @@
       </p:sp>
       <p:pic>
         <p:nvPicPr>
-          <p:cNvPr id="25" name="Note bar" descr="image.png"/>
+          <p:cNvPr id="27" name="Note bar" descr="image.png"/>
           <p:cNvPicPr>
             <a:picLocks noChangeAspect="1"/>
           </p:cNvPicPr>
           <p:nvPr/>
         </p:nvPicPr>
         <p:blipFill>
-          <a:blip r:embed="rId10"/>
+          <a:blip r:embed="rId12"/>
           <a:stretch>
             <a:fillRect/>
           </a:stretch>
@@ -35505,7 +35504,7 @@
       </p:pic>
       <p:sp>
         <p:nvSpPr>
-          <p:cNvPr id="26" name="Note text"/>
+          <p:cNvPr id="28" name="Note text"/>
           <p:cNvSpPr txBox="1"/>
           <p:nvPr/>
         </p:nvSpPr>
@@ -35545,7 +35544,7 @@
                 </a:solidFill>
                 <a:latin typeface="Arial"/>
               </a:rPr>
-              <a:t> the CAD and schematic are real files made on 25 Oct 2026 with help from AI tools, and our team will review them. The photos must be real ones of us; none are made up.</a:t>
+              <a:t> the photos are from our own bench session; build photos with our ID badges will follow in Month 2. The CAD and schematic were made with help from AI tools, and we are reviewing them.</a:t>
             </a:r>
           </a:p>
         </p:txBody>
@@ -45391,7 +45390,7 @@
       </p:sp>
       <p:pic>
         <p:nvPicPr>
-          <p:cNvPr id="9" name="Picture 8" descr="cap_assembly_c.png"/>
+          <p:cNvPr id="9" name="Picture 8" descr="cap_exploded_c.png"/>
           <p:cNvPicPr>
             <a:picLocks noChangeAspect="1"/>
           </p:cNvPicPr>
@@ -45406,7 +45405,7 @@
         <p:spPr>
           <a:xfrm>
             <a:off x="548640" y="1792224"/>
-            <a:ext cx="475978" cy="640080"/>
+            <a:ext cx="407879" cy="640080"/>
           </a:xfrm>
           <a:prstGeom prst="rect">
             <a:avLst/>
@@ -45446,7 +45445,7 @@
                 </a:solidFill>
                 <a:latin typeface="Arial"/>
               </a:rPr>
-              <a:t>Slide 8: assembled capsule with numbered parts</a:t>
+              <a:t>Slide 8: assembled and exploded views with numbered parts</a:t>
             </a:r>
           </a:p>
           <a:p>
@@ -45463,14 +45462,14 @@
                 </a:solidFill>
                 <a:latin typeface="Arial"/>
               </a:rPr>
-              <a:t>The same illustration with labels added. Concept only.</a:t>
+              <a:t>The same illustration with labels added, and a taken-apart version. Concept only.</a:t>
             </a:r>
           </a:p>
         </p:txBody>
       </p:sp>
       <p:pic>
         <p:nvPicPr>
-          <p:cNvPr id="11" name="Picture 10" descr="cap_exploded_c.png"/>
+          <p:cNvPr id="11" name="Picture 10" descr="bench_wiring.jpg"/>
           <p:cNvPicPr>
             <a:picLocks noChangeAspect="1"/>
           </p:cNvPicPr>
@@ -45484,8 +45483,8 @@
         </p:blipFill>
         <p:spPr>
           <a:xfrm>
-            <a:off x="548640" y="2578608"/>
-            <a:ext cx="407879" cy="640080"/>
+            <a:off x="548640" y="2651760"/>
+            <a:ext cx="1143000" cy="642045"/>
           </a:xfrm>
           <a:prstGeom prst="rect">
             <a:avLst/>
@@ -45525,7 +45524,7 @@
                 </a:solidFill>
                 <a:latin typeface="Arial"/>
               </a:rPr>
-              <a:t>Slide 8: exploded view with numbered parts</a:t>
+              <a:t>Slide 13: bench session photos</a:t>
             </a:r>
           </a:p>
           <a:p>
@@ -45542,7 +45541,7 @@
                 </a:solidFill>
                 <a:latin typeface="Arial"/>
               </a:rPr>
-              <a:t>A taken-apart version of our illustration. Concept only.</a:t>
+              <a:t>Taken by our team during our own bench work with the sensors. The first photo was cropped to remove black borders; nothing else was edited.</a:t>
             </a:r>
           </a:p>
         </p:txBody>
